--- a/docs/Manuel_Utilisation_Kalanso.pptx
+++ b/docs/Manuel_Utilisation_Kalanso.pptx
@@ -36,9 +36,10 @@
     <p:sldId id="284" r:id="rId30"/>
     <p:sldId id="285" r:id="rId31"/>
     <p:sldId id="286" r:id="rId32"/>
+    <p:sldId id="287" r:id="rId33"/>
   </p:sldIdLst>
   <p:notesMasterIdLst>
-    <p:notesMasterId r:id="rId33"/>
+    <p:notesMasterId r:id="rId34"/>
   </p:notesMasterIdLst>
   <p:sldSz cx="12191695" cy="6858000"/>
   <p:notesSz cx="6858000" cy="12191695"/>
@@ -2668,6 +2669,94 @@
             <a:fld id="{F7021451-1387-4CA6-816F-3879F97B5CBC}" type="slidenum">
               <a:rPr lang="en-US"/>
               <a:t>31</a:t>
+            </a:fld>
+            <a:endParaRPr lang="en-US"/>
+          </a:p>
+        </p:txBody>
+      </p:sp>
+    </p:spTree>
+    <p:extLst>
+      <p:ext uri="{BB962C8B-B14F-4D97-AF65-F5344CB8AC3E}">
+        <p14:creationId xmlns:p14="http://schemas.microsoft.com/office/powerpoint/2010/main" val="1024086991"/>
+      </p:ext>
+    </p:extLst>
+  </p:cSld>
+  <p:clrMapOvr>
+    <a:masterClrMapping/>
+  </p:clrMapOvr>
+</p:notes>
+</file>
+
+<file path=ppt/notesSlides/notesSlide32.xml><?xml version="1.0" encoding="utf-8"?>
+<p:notes xmlns:a="http://schemas.openxmlformats.org/drawingml/2006/main" xmlns:r="http://schemas.openxmlformats.org/officeDocument/2006/relationships" xmlns:p="http://schemas.openxmlformats.org/presentationml/2006/main">
+  <p:cSld>
+    <p:spTree>
+      <p:nvGrpSpPr>
+        <p:cNvPr id="1" name=""/>
+        <p:cNvGrpSpPr/>
+        <p:nvPr/>
+      </p:nvGrpSpPr>
+      <p:grpSpPr>
+        <a:xfrm>
+          <a:off x="0" y="0"/>
+          <a:ext cx="0" cy="0"/>
+          <a:chOff x="0" y="0"/>
+          <a:chExt cx="0" cy="0"/>
+        </a:xfrm>
+      </p:grpSpPr>
+      <p:sp>
+        <p:nvSpPr>
+          <p:cNvPr id="2" name="Slide Image Placeholder 1"/>
+          <p:cNvSpPr>
+            <a:spLocks noGrp="1" noRot="1" noChangeAspect="1"/>
+          </p:cNvSpPr>
+          <p:nvPr>
+            <p:ph type="sldImg"/>
+          </p:nvPr>
+        </p:nvSpPr>
+        <p:spPr/>
+      </p:sp>
+      <p:sp>
+        <p:nvSpPr>
+          <p:cNvPr id="3" name="Notes Placeholder 2"/>
+          <p:cNvSpPr>
+            <a:spLocks noGrp="1"/>
+          </p:cNvSpPr>
+          <p:nvPr>
+            <p:ph type="body" idx="1"/>
+          </p:nvPr>
+        </p:nvSpPr>
+        <p:spPr/>
+        <p:txBody>
+          <a:bodyPr/>
+          <a:lstStyle/>
+          <a:p>
+            <a:r>
+              <a:rPr lang="en-US" dirty="0"/>
+              <a:t/>
+            </a:r>
+            <a:endParaRPr lang="en-US" dirty="0"/>
+          </a:p>
+        </p:txBody>
+      </p:sp>
+      <p:sp>
+        <p:nvSpPr>
+          <p:cNvPr id="4" name="Slide Number Placeholder 3"/>
+          <p:cNvSpPr>
+            <a:spLocks noGrp="1"/>
+          </p:cNvSpPr>
+          <p:nvPr>
+            <p:ph type="sldNum" sz="quarter" idx="10"/>
+          </p:nvPr>
+        </p:nvSpPr>
+        <p:spPr/>
+        <p:txBody>
+          <a:bodyPr/>
+          <a:lstStyle/>
+          <a:p>
+            <a:fld id="{F7021451-1387-4CA6-816F-3879F97B5CBC}" type="slidenum">
+              <a:rPr lang="en-US"/>
+              <a:t>32</a:t>
             </a:fld>
             <a:endParaRPr lang="en-US"/>
           </a:p>
@@ -3812,7 +3901,7 @@
                 <a:ea typeface="Calibri" pitchFamily="34" charset="-122"/>
                 <a:cs typeface="Calibri" pitchFamily="34" charset="-120"/>
               </a:rPr>
-              <a:t>Admissions — Traitement</a:t>
+              <a:t>Admissions — Demandes</a:t>
             </a:r>
             <a:endParaRPr lang="en-US" sz="2600" dirty="0"/>
           </a:p>
@@ -3827,6 +3916,45 @@
         <p:spPr>
           <a:xfrm>
             <a:off x="457200" y="1051560"/>
+            <a:ext cx="11277295" cy="457200"/>
+          </a:xfrm>
+          <a:prstGeom prst="rect">
+            <a:avLst/>
+          </a:prstGeom>
+          <a:noFill/>
+          <a:ln/>
+        </p:spPr>
+        <p:txBody>
+          <a:bodyPr wrap="square" rtlCol="0" anchor="ctr"/>
+          <a:lstStyle/>
+          <a:p>
+            <a:pPr indent="0" marL="0">
+              <a:buNone/>
+            </a:pPr>
+            <a:r>
+              <a:rPr lang="en-US" sz="1500" i="1" dirty="0">
+                <a:solidFill>
+                  <a:srgbClr val="6B6B6B"/>
+                </a:solidFill>
+                <a:latin typeface="Calibri" pitchFamily="34" charset="0"/>
+                <a:ea typeface="Calibri" pitchFamily="34" charset="-122"/>
+                <a:cs typeface="Calibri" pitchFamily="34" charset="-120"/>
+              </a:rPr>
+              <a:t>Élèves → Admissions</a:t>
+            </a:r>
+            <a:endParaRPr lang="en-US" sz="1500" dirty="0"/>
+          </a:p>
+        </p:txBody>
+      </p:sp>
+      <p:sp>
+        <p:nvSpPr>
+          <p:cNvPr id="5" name="Text 3"/>
+          <p:cNvSpPr/>
+          <p:nvPr/>
+        </p:nvSpPr>
+        <p:spPr>
+          <a:xfrm>
+            <a:off x="457200" y="1600200"/>
             <a:ext cx="11277295" cy="365760"/>
           </a:xfrm>
           <a:prstGeom prst="rect">
@@ -3873,14 +4001,14 @@
       </p:sp>
       <p:sp>
         <p:nvSpPr>
-          <p:cNvPr id="5" name="Text 3"/>
-          <p:cNvSpPr/>
-          <p:nvPr/>
-        </p:nvSpPr>
-        <p:spPr>
-          <a:xfrm>
-            <a:off x="457200" y="1554480"/>
-            <a:ext cx="11277295" cy="4297680"/>
+          <p:cNvPr id="6" name="Text 4"/>
+          <p:cNvSpPr/>
+          <p:nvPr/>
+        </p:nvSpPr>
+        <p:spPr>
+          <a:xfrm>
+            <a:off x="457200" y="2103120"/>
+            <a:ext cx="11277295" cy="4206240"/>
           </a:xfrm>
           <a:prstGeom prst="rect">
             <a:avLst/>
@@ -3908,7 +4036,7 @@
                 <a:ea typeface="Calibri" pitchFamily="34" charset="-122"/>
                 <a:cs typeface="Calibri" pitchFamily="34" charset="-120"/>
               </a:rPr>
-              <a:t>Vérifier les pièces jointes : chaque document reçu peut être ouvert, puis marqué « Vérifié » ou « Rejeté ».</a:t>
+              <a:t>Aucun élève n'est créé directement : toute entrée d'élève passe par une demande d'admission, acceptée ou refusée.</a:t>
             </a:r>
             <a:endParaRPr lang="en-US" sz="1500" dirty="0"/>
           </a:p>
@@ -3921,7 +4049,7 @@
               <a:buChar char="▸"/>
             </a:pPr>
             <a:r>
-              <a:rPr lang="en-US" sz="1500" dirty="0">
+              <a:rPr lang="en-US" sz="1500" b="1" dirty="0">
                 <a:solidFill>
                   <a:srgbClr val="444444"/>
                 </a:solidFill>
@@ -3929,7 +4057,49 @@
                 <a:ea typeface="Calibri" pitchFamily="34" charset="-122"/>
                 <a:cs typeface="Calibri" pitchFamily="34" charset="-120"/>
               </a:rPr>
-              <a:t>Accepter une demande : choisissez la classe d'affectation — l'élève, son dossier et la facture des frais d'inscription sont créés automatiquement (facture immédiatement soldée).</a:t>
+              <a:t>Deux façons de recevoir une demande :</a:t>
+            </a:r>
+            <a:endParaRPr lang="en-US" sz="1500" dirty="0"/>
+          </a:p>
+          <a:p>
+            <a:pPr marL="406400" indent="-406400">
+              <a:spcAft>
+                <a:spcPts val="600"/>
+              </a:spcAft>
+              <a:buSzPct val="100000"/>
+              <a:buChar char="–"/>
+            </a:pPr>
+            <a:r>
+              <a:rPr lang="en-US" sz="1300" dirty="0">
+                <a:solidFill>
+                  <a:srgbClr val="6B6B6B"/>
+                </a:solidFill>
+                <a:latin typeface="Calibri" pitchFamily="34" charset="0"/>
+                <a:ea typeface="Calibri" pitchFamily="34" charset="-122"/>
+                <a:cs typeface="Calibri" pitchFamily="34" charset="-120"/>
+              </a:rPr>
+              <a:t>Formulaire public en ligne : un lien unique par école, à partager aux parents (réseaux sociaux, affichage).</a:t>
+            </a:r>
+            <a:endParaRPr lang="en-US" sz="1500" dirty="0"/>
+          </a:p>
+          <a:p>
+            <a:pPr marL="406400" indent="-406400">
+              <a:spcAft>
+                <a:spcPts val="600"/>
+              </a:spcAft>
+              <a:buSzPct val="100000"/>
+              <a:buChar char="–"/>
+            </a:pPr>
+            <a:r>
+              <a:rPr lang="en-US" sz="1300" dirty="0">
+                <a:solidFill>
+                  <a:srgbClr val="6B6B6B"/>
+                </a:solidFill>
+                <a:latin typeface="Calibri" pitchFamily="34" charset="0"/>
+                <a:ea typeface="Calibri" pitchFamily="34" charset="-122"/>
+                <a:cs typeface="Calibri" pitchFamily="34" charset="-120"/>
+              </a:rPr>
+              <a:t>« Inscription sur place » : le secrétariat saisit lui-même les informations d'un élève reçu au bureau.</a:t>
             </a:r>
             <a:endParaRPr lang="en-US" sz="1500" dirty="0"/>
           </a:p>
@@ -3950,7 +4120,7 @@
                 <a:ea typeface="Calibri" pitchFamily="34" charset="-122"/>
                 <a:cs typeface="Calibri" pitchFamily="34" charset="-120"/>
               </a:rPr>
-              <a:t>Refuser une demande : un motif de refus est demandé, conservé dans l'historique.</a:t>
+              <a:t>Chaque demande peut être accompagnée de pièces jointes (photo, acte de naissance, bulletin précédent...).</a:t>
             </a:r>
             <a:endParaRPr lang="en-US" sz="1500" dirty="0"/>
           </a:p>
@@ -3971,7 +4141,7 @@
                 <a:ea typeface="Calibri" pitchFamily="34" charset="-122"/>
                 <a:cs typeface="Calibri" pitchFamily="34" charset="-120"/>
               </a:rPr>
-              <a:t>Dès l'acceptation, l'élève apparaît dans le module Élèves et devient visible partout dans l'application (classe, finances, absences...).</a:t>
+              <a:t>Les demandes apparaissent dans l'onglet « En attente », classées ensuite en « Acceptées » ou « Refusées ».</a:t>
             </a:r>
             <a:endParaRPr lang="en-US" sz="1500" dirty="0"/>
           </a:p>
@@ -3979,14 +4149,14 @@
       </p:sp>
       <p:sp>
         <p:nvSpPr>
-          <p:cNvPr id="6" name="Shape 4"/>
-          <p:cNvSpPr/>
-          <p:nvPr/>
-        </p:nvSpPr>
-        <p:spPr>
-          <a:xfrm>
-            <a:off x="457200" y="5897880"/>
-            <a:ext cx="11277295" cy="502920"/>
+          <p:cNvPr id="7" name="Shape 5"/>
+          <p:cNvSpPr/>
+          <p:nvPr/>
+        </p:nvSpPr>
+        <p:spPr>
+          <a:xfrm>
+            <a:off x="0" y="6537960"/>
+            <a:ext cx="12191695" cy="320040"/>
           </a:xfrm>
           <a:prstGeom prst="rect">
             <a:avLst/>
@@ -3994,90 +4164,12 @@
           <a:solidFill>
             <a:srgbClr val="EAFBF6"/>
           </a:solidFill>
-          <a:ln w="9525">
-            <a:solidFill>
-              <a:srgbClr val="17AE89"/>
-            </a:solidFill>
-            <a:prstDash val="solid"/>
-          </a:ln>
-        </p:spPr>
-      </p:sp>
-      <p:sp>
-        <p:nvSpPr>
-          <p:cNvPr id="7" name="Text 5"/>
-          <p:cNvSpPr/>
-          <p:nvPr/>
-        </p:nvSpPr>
-        <p:spPr>
-          <a:xfrm>
-            <a:off x="640080" y="5897880"/>
-            <a:ext cx="10911535" cy="502920"/>
-          </a:xfrm>
-          <a:prstGeom prst="rect">
-            <a:avLst/>
-          </a:prstGeom>
-          <a:noFill/>
-          <a:ln/>
-        </p:spPr>
-        <p:txBody>
-          <a:bodyPr wrap="square" rtlCol="0" anchor="ctr"/>
-          <a:lstStyle/>
-          <a:p>
-            <a:pPr indent="0" marL="0">
-              <a:buNone/>
-            </a:pPr>
-            <a:r>
-              <a:rPr lang="en-US" sz="1200" dirty="0">
-                <a:solidFill>
-                  <a:srgbClr val="0A7C63"/>
-                </a:solidFill>
-                <a:latin typeface="Calibri" pitchFamily="34" charset="0"/>
-                <a:ea typeface="Calibri" pitchFamily="34" charset="-122"/>
-                <a:cs typeface="Calibri" pitchFamily="34" charset="-120"/>
-              </a:rPr>
-              <a:t>💡 </a:t>
-            </a:r>
-            <a:pPr indent="0" marL="0">
-              <a:buNone/>
-            </a:pPr>
-            <a:r>
-              <a:rPr lang="en-US" sz="1200" i="1" dirty="0">
-                <a:solidFill>
-                  <a:srgbClr val="0A7C63"/>
-                </a:solidFill>
-                <a:latin typeface="Calibri" pitchFamily="34" charset="0"/>
-                <a:ea typeface="Calibri" pitchFamily="34" charset="-122"/>
-                <a:cs typeface="Calibri" pitchFamily="34" charset="-120"/>
-              </a:rPr>
-              <a:t>Cette étape est le seul point d'entrée d'un nouvel élève dans Kalanso — elle garantit qu'aucune inscription n'est créée sans dossier ni décision explicite.</a:t>
-            </a:r>
-            <a:endParaRPr lang="en-US" sz="1200" dirty="0"/>
-          </a:p>
-        </p:txBody>
-      </p:sp>
-      <p:sp>
-        <p:nvSpPr>
-          <p:cNvPr id="8" name="Shape 6"/>
-          <p:cNvSpPr/>
-          <p:nvPr/>
-        </p:nvSpPr>
-        <p:spPr>
-          <a:xfrm>
-            <a:off x="0" y="6537960"/>
-            <a:ext cx="12191695" cy="320040"/>
-          </a:xfrm>
-          <a:prstGeom prst="rect">
-            <a:avLst/>
-          </a:prstGeom>
-          <a:solidFill>
-            <a:srgbClr val="EAFBF6"/>
-          </a:solidFill>
-          <a:ln/>
-        </p:spPr>
-      </p:sp>
-      <p:sp>
-        <p:nvSpPr>
-          <p:cNvPr id="9" name="Text 7"/>
+          <a:ln/>
+        </p:spPr>
+      </p:sp>
+      <p:sp>
+        <p:nvSpPr>
+          <p:cNvPr id="8" name="Text 6"/>
           <p:cNvSpPr/>
           <p:nvPr/>
         </p:nvSpPr>
@@ -4116,7 +4208,7 @@
       </p:sp>
       <p:sp>
         <p:nvSpPr>
-          <p:cNvPr id="10" name="Text 8"/>
+          <p:cNvPr id="9" name="Text 7"/>
           <p:cNvSpPr/>
           <p:nvPr/>
         </p:nvSpPr>
@@ -4231,7 +4323,7 @@
                 <a:ea typeface="Calibri" pitchFamily="34" charset="-122"/>
                 <a:cs typeface="Calibri" pitchFamily="34" charset="-120"/>
               </a:rPr>
-              <a:t>Fiche élève</a:t>
+              <a:t>Admissions — Traitement</a:t>
             </a:r>
             <a:endParaRPr lang="en-US" sz="2600" dirty="0"/>
           </a:p>
@@ -4246,7 +4338,7 @@
         <p:spPr>
           <a:xfrm>
             <a:off x="457200" y="1051560"/>
-            <a:ext cx="11277295" cy="457200"/>
+            <a:ext cx="11277295" cy="365760"/>
           </a:xfrm>
           <a:prstGeom prst="rect">
             <a:avLst/>
@@ -4262,17 +4354,31 @@
               <a:buNone/>
             </a:pPr>
             <a:r>
-              <a:rPr lang="en-US" sz="1500" i="1" dirty="0">
-                <a:solidFill>
-                  <a:srgbClr val="6B6B6B"/>
-                </a:solidFill>
-                <a:latin typeface="Calibri" pitchFamily="34" charset="0"/>
-                <a:ea typeface="Calibri" pitchFamily="34" charset="-122"/>
-                <a:cs typeface="Calibri" pitchFamily="34" charset="-120"/>
-              </a:rPr>
-              <a:t>Élèves → cliquer sur un élève</a:t>
-            </a:r>
-            <a:endParaRPr lang="en-US" sz="1500" dirty="0"/>
+              <a:rPr lang="en-US" sz="1300" b="1" dirty="0">
+                <a:solidFill>
+                  <a:srgbClr val="0A7C63"/>
+                </a:solidFill>
+                <a:latin typeface="Calibri" pitchFamily="34" charset="0"/>
+                <a:ea typeface="Calibri" pitchFamily="34" charset="-122"/>
+                <a:cs typeface="Calibri" pitchFamily="34" charset="-120"/>
+              </a:rPr>
+              <a:t>Accès : </a:t>
+            </a:r>
+            <a:pPr indent="0" marL="0">
+              <a:buNone/>
+            </a:pPr>
+            <a:r>
+              <a:rPr lang="en-US" sz="1300" dirty="0">
+                <a:solidFill>
+                  <a:srgbClr val="444444"/>
+                </a:solidFill>
+                <a:latin typeface="Calibri" pitchFamily="34" charset="0"/>
+                <a:ea typeface="Calibri" pitchFamily="34" charset="-122"/>
+                <a:cs typeface="Calibri" pitchFamily="34" charset="-120"/>
+              </a:rPr>
+              <a:t>Fondateur, Chef d'établissement, Secrétaire</a:t>
+            </a:r>
+            <a:endParaRPr lang="en-US" sz="1300" dirty="0"/>
           </a:p>
         </p:txBody>
       </p:sp>
@@ -4284,8 +4390,8 @@
         </p:nvSpPr>
         <p:spPr>
           <a:xfrm>
-            <a:off x="457200" y="1600200"/>
-            <a:ext cx="11277295" cy="4709160"/>
+            <a:off x="457200" y="1554480"/>
+            <a:ext cx="11277295" cy="4297680"/>
           </a:xfrm>
           <a:prstGeom prst="rect">
             <a:avLst/>
@@ -4313,7 +4419,7 @@
                 <a:ea typeface="Calibri" pitchFamily="34" charset="-122"/>
                 <a:cs typeface="Calibri" pitchFamily="34" charset="-120"/>
               </a:rPr>
-              <a:t>Informations générales : identité, matricule, genre, classe actuelle, coordonnées du ou des parents/tuteurs.</a:t>
+              <a:t>Vérifier les pièces jointes : chaque document reçu peut être ouvert, puis marqué « Vérifié » ou « Rejeté ».</a:t>
             </a:r>
             <a:endParaRPr lang="en-US" sz="1500" dirty="0"/>
           </a:p>
@@ -4334,7 +4440,7 @@
                 <a:ea typeface="Calibri" pitchFamily="34" charset="-122"/>
                 <a:cs typeface="Calibri" pitchFamily="34" charset="-120"/>
               </a:rPr>
-              <a:t>Absences / retards (année en cours) : compteur direct sur la fiche.</a:t>
+              <a:t>Accepter une demande : choisissez la classe d'affectation — l'élève, son dossier et la facture des frais d'inscription sont créés automatiquement (facture immédiatement soldée).</a:t>
             </a:r>
             <a:endParaRPr lang="en-US" sz="1500" dirty="0"/>
           </a:p>
@@ -4355,7 +4461,7 @@
                 <a:ea typeface="Calibri" pitchFamily="34" charset="-122"/>
                 <a:cs typeface="Calibri" pitchFamily="34" charset="-120"/>
               </a:rPr>
-              <a:t>Accès rapide au bulletin de notes (téléchargement) et à la situation financière de l'élève (factures, solde).</a:t>
+              <a:t>Refuser une demande : un motif de refus est demandé, conservé dans l'historique.</a:t>
             </a:r>
             <a:endParaRPr lang="en-US" sz="1500" dirty="0"/>
           </a:p>
@@ -4376,7 +4482,7 @@
                 <a:ea typeface="Calibri" pitchFamily="34" charset="-122"/>
                 <a:cs typeface="Calibri" pitchFamily="34" charset="-120"/>
               </a:rPr>
-              <a:t>Barre de recherche sur la liste des élèves : par nom, prénom ou matricule.</a:t>
+              <a:t>Dès l'acceptation, l'élève apparaît dans le module Élèves et devient visible partout dans l'application (classe, finances, absences...).</a:t>
             </a:r>
             <a:endParaRPr lang="en-US" sz="1500" dirty="0"/>
           </a:p>
@@ -4390,8 +4496,8 @@
         </p:nvSpPr>
         <p:spPr>
           <a:xfrm>
-            <a:off x="0" y="6537960"/>
-            <a:ext cx="12191695" cy="320040"/>
+            <a:off x="457200" y="5897880"/>
+            <a:ext cx="11277295" cy="502920"/>
           </a:xfrm>
           <a:prstGeom prst="rect">
             <a:avLst/>
@@ -4399,12 +4505,90 @@
           <a:solidFill>
             <a:srgbClr val="EAFBF6"/>
           </a:solidFill>
-          <a:ln/>
+          <a:ln w="9525">
+            <a:solidFill>
+              <a:srgbClr val="17AE89"/>
+            </a:solidFill>
+            <a:prstDash val="solid"/>
+          </a:ln>
         </p:spPr>
       </p:sp>
       <p:sp>
         <p:nvSpPr>
           <p:cNvPr id="7" name="Text 5"/>
+          <p:cNvSpPr/>
+          <p:nvPr/>
+        </p:nvSpPr>
+        <p:spPr>
+          <a:xfrm>
+            <a:off x="640080" y="5897880"/>
+            <a:ext cx="10911535" cy="502920"/>
+          </a:xfrm>
+          <a:prstGeom prst="rect">
+            <a:avLst/>
+          </a:prstGeom>
+          <a:noFill/>
+          <a:ln/>
+        </p:spPr>
+        <p:txBody>
+          <a:bodyPr wrap="square" rtlCol="0" anchor="ctr"/>
+          <a:lstStyle/>
+          <a:p>
+            <a:pPr indent="0" marL="0">
+              <a:buNone/>
+            </a:pPr>
+            <a:r>
+              <a:rPr lang="en-US" sz="1200" dirty="0">
+                <a:solidFill>
+                  <a:srgbClr val="0A7C63"/>
+                </a:solidFill>
+                <a:latin typeface="Calibri" pitchFamily="34" charset="0"/>
+                <a:ea typeface="Calibri" pitchFamily="34" charset="-122"/>
+                <a:cs typeface="Calibri" pitchFamily="34" charset="-120"/>
+              </a:rPr>
+              <a:t>💡 </a:t>
+            </a:r>
+            <a:pPr indent="0" marL="0">
+              <a:buNone/>
+            </a:pPr>
+            <a:r>
+              <a:rPr lang="en-US" sz="1200" i="1" dirty="0">
+                <a:solidFill>
+                  <a:srgbClr val="0A7C63"/>
+                </a:solidFill>
+                <a:latin typeface="Calibri" pitchFamily="34" charset="0"/>
+                <a:ea typeface="Calibri" pitchFamily="34" charset="-122"/>
+                <a:cs typeface="Calibri" pitchFamily="34" charset="-120"/>
+              </a:rPr>
+              <a:t>Cette étape est le seul point d'entrée d'un nouvel élève dans Kalanso — elle garantit qu'aucune inscription n'est créée sans dossier ni décision explicite.</a:t>
+            </a:r>
+            <a:endParaRPr lang="en-US" sz="1200" dirty="0"/>
+          </a:p>
+        </p:txBody>
+      </p:sp>
+      <p:sp>
+        <p:nvSpPr>
+          <p:cNvPr id="8" name="Shape 6"/>
+          <p:cNvSpPr/>
+          <p:nvPr/>
+        </p:nvSpPr>
+        <p:spPr>
+          <a:xfrm>
+            <a:off x="0" y="6537960"/>
+            <a:ext cx="12191695" cy="320040"/>
+          </a:xfrm>
+          <a:prstGeom prst="rect">
+            <a:avLst/>
+          </a:prstGeom>
+          <a:solidFill>
+            <a:srgbClr val="EAFBF6"/>
+          </a:solidFill>
+          <a:ln/>
+        </p:spPr>
+      </p:sp>
+      <p:sp>
+        <p:nvSpPr>
+          <p:cNvPr id="9" name="Text 7"/>
           <p:cNvSpPr/>
           <p:nvPr/>
         </p:nvSpPr>
@@ -4443,7 +4627,7 @@
       </p:sp>
       <p:sp>
         <p:nvSpPr>
-          <p:cNvPr id="8" name="Text 6"/>
+          <p:cNvPr id="10" name="Text 8"/>
           <p:cNvSpPr/>
           <p:nvPr/>
         </p:nvSpPr>
@@ -4558,7 +4742,7 @@
                 <a:ea typeface="Calibri" pitchFamily="34" charset="-122"/>
                 <a:cs typeface="Calibri" pitchFamily="34" charset="-120"/>
               </a:rPr>
-              <a:t>Notes</a:t>
+              <a:t>Fiche élève</a:t>
             </a:r>
             <a:endParaRPr lang="en-US" sz="2600" dirty="0"/>
           </a:p>
@@ -4597,7 +4781,7 @@
                 <a:ea typeface="Calibri" pitchFamily="34" charset="-122"/>
                 <a:cs typeface="Calibri" pitchFamily="34" charset="-120"/>
               </a:rPr>
-              <a:t>Élèves → Notes</a:t>
+              <a:t>Élèves → cliquer sur un élève</a:t>
             </a:r>
             <a:endParaRPr lang="en-US" sz="1500" dirty="0"/>
           </a:p>
@@ -4612,60 +4796,7 @@
         <p:spPr>
           <a:xfrm>
             <a:off x="457200" y="1600200"/>
-            <a:ext cx="11277295" cy="365760"/>
-          </a:xfrm>
-          <a:prstGeom prst="rect">
-            <a:avLst/>
-          </a:prstGeom>
-          <a:noFill/>
-          <a:ln/>
-        </p:spPr>
-        <p:txBody>
-          <a:bodyPr wrap="square" rtlCol="0" anchor="ctr"/>
-          <a:lstStyle/>
-          <a:p>
-            <a:pPr indent="0" marL="0">
-              <a:buNone/>
-            </a:pPr>
-            <a:r>
-              <a:rPr lang="en-US" sz="1300" b="1" dirty="0">
-                <a:solidFill>
-                  <a:srgbClr val="0A7C63"/>
-                </a:solidFill>
-                <a:latin typeface="Calibri" pitchFamily="34" charset="0"/>
-                <a:ea typeface="Calibri" pitchFamily="34" charset="-122"/>
-                <a:cs typeface="Calibri" pitchFamily="34" charset="-120"/>
-              </a:rPr>
-              <a:t>Accès : </a:t>
-            </a:r>
-            <a:pPr indent="0" marL="0">
-              <a:buNone/>
-            </a:pPr>
-            <a:r>
-              <a:rPr lang="en-US" sz="1300" dirty="0">
-                <a:solidFill>
-                  <a:srgbClr val="444444"/>
-                </a:solidFill>
-                <a:latin typeface="Calibri" pitchFamily="34" charset="0"/>
-                <a:ea typeface="Calibri" pitchFamily="34" charset="-122"/>
-                <a:cs typeface="Calibri" pitchFamily="34" charset="-120"/>
-              </a:rPr>
-              <a:t>Fondateur, Chef d'établissement, Enseignant</a:t>
-            </a:r>
-            <a:endParaRPr lang="en-US" sz="1300" dirty="0"/>
-          </a:p>
-        </p:txBody>
-      </p:sp>
-      <p:sp>
-        <p:nvSpPr>
-          <p:cNvPr id="6" name="Text 4"/>
-          <p:cNvSpPr/>
-          <p:nvPr/>
-        </p:nvSpPr>
-        <p:spPr>
-          <a:xfrm>
-            <a:off x="457200" y="2103120"/>
-            <a:ext cx="11277295" cy="4206240"/>
+            <a:ext cx="11277295" cy="4709160"/>
           </a:xfrm>
           <a:prstGeom prst="rect">
             <a:avLst/>
@@ -4693,7 +4824,7 @@
                 <a:ea typeface="Calibri" pitchFamily="34" charset="-122"/>
                 <a:cs typeface="Calibri" pitchFamily="34" charset="-120"/>
               </a:rPr>
-              <a:t>Un enseignant saisit les notes de ses propres classes et matières, trimestre par trimestre.</a:t>
+              <a:t>Informations générales : identité, matricule, genre, classe actuelle, coordonnées du ou des parents/tuteurs.</a:t>
             </a:r>
             <a:endParaRPr lang="en-US" sz="1500" dirty="0"/>
           </a:p>
@@ -4714,7 +4845,7 @@
                 <a:ea typeface="Calibri" pitchFamily="34" charset="-122"/>
                 <a:cs typeface="Calibri" pitchFamily="34" charset="-120"/>
               </a:rPr>
-              <a:t>Sélectionnez la classe, la matière et le trimestre : la liste des élèves inscrits apparaît automatiquement.</a:t>
+              <a:t>Absences / retards (année en cours) : compteur direct sur la fiche.</a:t>
             </a:r>
             <a:endParaRPr lang="en-US" sz="1500" dirty="0"/>
           </a:p>
@@ -4735,7 +4866,7 @@
                 <a:ea typeface="Calibri" pitchFamily="34" charset="-122"/>
                 <a:cs typeface="Calibri" pitchFamily="34" charset="-120"/>
               </a:rPr>
-              <a:t>Saisissez une note par élève puis enregistrez — Kalanso vérifie que chaque élève appartient bien à la classe choisie avant d'accepter la saisie.</a:t>
+              <a:t>Accès rapide au bulletin de notes (téléchargement) et à la situation financière de l'élève (factures, solde).</a:t>
             </a:r>
             <a:endParaRPr lang="en-US" sz="1500" dirty="0"/>
           </a:p>
@@ -4756,7 +4887,7 @@
                 <a:ea typeface="Calibri" pitchFamily="34" charset="-122"/>
                 <a:cs typeface="Calibri" pitchFamily="34" charset="-120"/>
               </a:rPr>
-              <a:t>Les notes déjà saisies peuvent être corrigées en resoumettant le formulaire pour la même classe/matière/trimestre.</a:t>
+              <a:t>Barre de recherche sur la liste des élèves : par nom, prénom ou matricule.</a:t>
             </a:r>
             <a:endParaRPr lang="en-US" sz="1500" dirty="0"/>
           </a:p>
@@ -4764,7 +4895,7 @@
       </p:sp>
       <p:sp>
         <p:nvSpPr>
-          <p:cNvPr id="7" name="Shape 5"/>
+          <p:cNvPr id="6" name="Shape 4"/>
           <p:cNvSpPr/>
           <p:nvPr/>
         </p:nvSpPr>
@@ -4784,7 +4915,7 @@
       </p:sp>
       <p:sp>
         <p:nvSpPr>
-          <p:cNvPr id="8" name="Text 6"/>
+          <p:cNvPr id="7" name="Text 5"/>
           <p:cNvSpPr/>
           <p:nvPr/>
         </p:nvSpPr>
@@ -4823,7 +4954,7 @@
       </p:sp>
       <p:sp>
         <p:nvSpPr>
-          <p:cNvPr id="9" name="Text 7"/>
+          <p:cNvPr id="8" name="Text 6"/>
           <p:cNvSpPr/>
           <p:nvPr/>
         </p:nvSpPr>
@@ -4938,7 +5069,7 @@
                 <a:ea typeface="Calibri" pitchFamily="34" charset="-122"/>
                 <a:cs typeface="Calibri" pitchFamily="34" charset="-120"/>
               </a:rPr>
-              <a:t>Bulletins</a:t>
+              <a:t>Notes</a:t>
             </a:r>
             <a:endParaRPr lang="en-US" sz="2600" dirty="0"/>
           </a:p>
@@ -4953,7 +5084,99 @@
         <p:spPr>
           <a:xfrm>
             <a:off x="457200" y="1051560"/>
-            <a:ext cx="11277295" cy="5257800"/>
+            <a:ext cx="11277295" cy="457200"/>
+          </a:xfrm>
+          <a:prstGeom prst="rect">
+            <a:avLst/>
+          </a:prstGeom>
+          <a:noFill/>
+          <a:ln/>
+        </p:spPr>
+        <p:txBody>
+          <a:bodyPr wrap="square" rtlCol="0" anchor="ctr"/>
+          <a:lstStyle/>
+          <a:p>
+            <a:pPr indent="0" marL="0">
+              <a:buNone/>
+            </a:pPr>
+            <a:r>
+              <a:rPr lang="en-US" sz="1500" i="1" dirty="0">
+                <a:solidFill>
+                  <a:srgbClr val="6B6B6B"/>
+                </a:solidFill>
+                <a:latin typeface="Calibri" pitchFamily="34" charset="0"/>
+                <a:ea typeface="Calibri" pitchFamily="34" charset="-122"/>
+                <a:cs typeface="Calibri" pitchFamily="34" charset="-120"/>
+              </a:rPr>
+              <a:t>Élèves → Notes</a:t>
+            </a:r>
+            <a:endParaRPr lang="en-US" sz="1500" dirty="0"/>
+          </a:p>
+        </p:txBody>
+      </p:sp>
+      <p:sp>
+        <p:nvSpPr>
+          <p:cNvPr id="5" name="Text 3"/>
+          <p:cNvSpPr/>
+          <p:nvPr/>
+        </p:nvSpPr>
+        <p:spPr>
+          <a:xfrm>
+            <a:off x="457200" y="1600200"/>
+            <a:ext cx="11277295" cy="365760"/>
+          </a:xfrm>
+          <a:prstGeom prst="rect">
+            <a:avLst/>
+          </a:prstGeom>
+          <a:noFill/>
+          <a:ln/>
+        </p:spPr>
+        <p:txBody>
+          <a:bodyPr wrap="square" rtlCol="0" anchor="ctr"/>
+          <a:lstStyle/>
+          <a:p>
+            <a:pPr indent="0" marL="0">
+              <a:buNone/>
+            </a:pPr>
+            <a:r>
+              <a:rPr lang="en-US" sz="1300" b="1" dirty="0">
+                <a:solidFill>
+                  <a:srgbClr val="0A7C63"/>
+                </a:solidFill>
+                <a:latin typeface="Calibri" pitchFamily="34" charset="0"/>
+                <a:ea typeface="Calibri" pitchFamily="34" charset="-122"/>
+                <a:cs typeface="Calibri" pitchFamily="34" charset="-120"/>
+              </a:rPr>
+              <a:t>Accès : </a:t>
+            </a:r>
+            <a:pPr indent="0" marL="0">
+              <a:buNone/>
+            </a:pPr>
+            <a:r>
+              <a:rPr lang="en-US" sz="1300" dirty="0">
+                <a:solidFill>
+                  <a:srgbClr val="444444"/>
+                </a:solidFill>
+                <a:latin typeface="Calibri" pitchFamily="34" charset="0"/>
+                <a:ea typeface="Calibri" pitchFamily="34" charset="-122"/>
+                <a:cs typeface="Calibri" pitchFamily="34" charset="-120"/>
+              </a:rPr>
+              <a:t>Fondateur, Chef d'établissement, Enseignant</a:t>
+            </a:r>
+            <a:endParaRPr lang="en-US" sz="1300" dirty="0"/>
+          </a:p>
+        </p:txBody>
+      </p:sp>
+      <p:sp>
+        <p:nvSpPr>
+          <p:cNvPr id="6" name="Text 4"/>
+          <p:cNvSpPr/>
+          <p:nvPr/>
+        </p:nvSpPr>
+        <p:spPr>
+          <a:xfrm>
+            <a:off x="457200" y="2103120"/>
+            <a:ext cx="11277295" cy="4206240"/>
           </a:xfrm>
           <a:prstGeom prst="rect">
             <a:avLst/>
@@ -4981,7 +5204,7 @@
                 <a:ea typeface="Calibri" pitchFamily="34" charset="-122"/>
                 <a:cs typeface="Calibri" pitchFamily="34" charset="-120"/>
               </a:rPr>
-              <a:t>Chaque bulletin rassemble les notes d'un élève sur les trois trimestres d'une matière, avec calcul automatique des moyennes.</a:t>
+              <a:t>Un enseignant saisit les notes de ses propres classes et matières, trimestre par trimestre.</a:t>
             </a:r>
             <a:endParaRPr lang="en-US" sz="1500" dirty="0"/>
           </a:p>
@@ -5002,7 +5225,7 @@
                 <a:ea typeface="Calibri" pitchFamily="34" charset="-122"/>
                 <a:cs typeface="Calibri" pitchFamily="34" charset="-120"/>
               </a:rPr>
-              <a:t>Téléchargeable en Excel depuis la fiche de l'élève ou la page Notes, pour archivage ou impression.</a:t>
+              <a:t>Sélectionnez la classe, la matière et le trimestre : la liste des élèves inscrits apparaît automatiquement.</a:t>
             </a:r>
             <a:endParaRPr lang="en-US" sz="1500" dirty="0"/>
           </a:p>
@@ -5023,15 +5246,36 @@
                 <a:ea typeface="Calibri" pitchFamily="34" charset="-122"/>
                 <a:cs typeface="Calibri" pitchFamily="34" charset="-120"/>
               </a:rPr>
-              <a:t>Un export « Notes de la classe » (Excel) permet de sortir en une fois toutes les notes d'une classe pour un trimestre donné.</a:t>
+              <a:t>Saisissez une note par élève puis enregistrez — Kalanso vérifie que chaque élève appartient bien à la classe choisie avant d'accepter la saisie.</a:t>
             </a:r>
             <a:endParaRPr lang="en-US" sz="1500" dirty="0"/>
           </a:p>
-        </p:txBody>
-      </p:sp>
-      <p:sp>
-        <p:nvSpPr>
-          <p:cNvPr id="5" name="Shape 3"/>
+          <a:p>
+            <a:pPr marL="254000" indent="-254000">
+              <a:spcAft>
+                <a:spcPts val="1000"/>
+              </a:spcAft>
+              <a:buSzPct val="100000"/>
+              <a:buChar char="▸"/>
+            </a:pPr>
+            <a:r>
+              <a:rPr lang="en-US" sz="1500" dirty="0">
+                <a:solidFill>
+                  <a:srgbClr val="444444"/>
+                </a:solidFill>
+                <a:latin typeface="Calibri" pitchFamily="34" charset="0"/>
+                <a:ea typeface="Calibri" pitchFamily="34" charset="-122"/>
+                <a:cs typeface="Calibri" pitchFamily="34" charset="-120"/>
+              </a:rPr>
+              <a:t>Les notes déjà saisies peuvent être corrigées en resoumettant le formulaire pour la même classe/matière/trimestre.</a:t>
+            </a:r>
+            <a:endParaRPr lang="en-US" sz="1500" dirty="0"/>
+          </a:p>
+        </p:txBody>
+      </p:sp>
+      <p:sp>
+        <p:nvSpPr>
+          <p:cNvPr id="7" name="Shape 5"/>
           <p:cNvSpPr/>
           <p:nvPr/>
         </p:nvSpPr>
@@ -5051,7 +5295,7 @@
       </p:sp>
       <p:sp>
         <p:nvSpPr>
-          <p:cNvPr id="6" name="Text 4"/>
+          <p:cNvPr id="8" name="Text 6"/>
           <p:cNvSpPr/>
           <p:nvPr/>
         </p:nvSpPr>
@@ -5090,7 +5334,7 @@
       </p:sp>
       <p:sp>
         <p:nvSpPr>
-          <p:cNvPr id="7" name="Text 5"/>
+          <p:cNvPr id="9" name="Text 7"/>
           <p:cNvSpPr/>
           <p:nvPr/>
         </p:nvSpPr>
@@ -5205,7 +5449,7 @@
                 <a:ea typeface="Calibri" pitchFamily="34" charset="-122"/>
                 <a:cs typeface="Calibri" pitchFamily="34" charset="-120"/>
               </a:rPr>
-              <a:t>Suivi de parcours</a:t>
+              <a:t>Bulletins</a:t>
             </a:r>
             <a:endParaRPr lang="en-US" sz="2600" dirty="0"/>
           </a:p>
@@ -5220,99 +5464,7 @@
         <p:spPr>
           <a:xfrm>
             <a:off x="457200" y="1051560"/>
-            <a:ext cx="11277295" cy="457200"/>
-          </a:xfrm>
-          <a:prstGeom prst="rect">
-            <a:avLst/>
-          </a:prstGeom>
-          <a:noFill/>
-          <a:ln/>
-        </p:spPr>
-        <p:txBody>
-          <a:bodyPr wrap="square" rtlCol="0" anchor="ctr"/>
-          <a:lstStyle/>
-          <a:p>
-            <a:pPr indent="0" marL="0">
-              <a:buNone/>
-            </a:pPr>
-            <a:r>
-              <a:rPr lang="en-US" sz="1500" i="1" dirty="0">
-                <a:solidFill>
-                  <a:srgbClr val="6B6B6B"/>
-                </a:solidFill>
-                <a:latin typeface="Calibri" pitchFamily="34" charset="0"/>
-                <a:ea typeface="Calibri" pitchFamily="34" charset="-122"/>
-                <a:cs typeface="Calibri" pitchFamily="34" charset="-120"/>
-              </a:rPr>
-              <a:t>Élèves → Suivi de parcours</a:t>
-            </a:r>
-            <a:endParaRPr lang="en-US" sz="1500" dirty="0"/>
-          </a:p>
-        </p:txBody>
-      </p:sp>
-      <p:sp>
-        <p:nvSpPr>
-          <p:cNvPr id="5" name="Text 3"/>
-          <p:cNvSpPr/>
-          <p:nvPr/>
-        </p:nvSpPr>
-        <p:spPr>
-          <a:xfrm>
-            <a:off x="457200" y="1600200"/>
-            <a:ext cx="11277295" cy="365760"/>
-          </a:xfrm>
-          <a:prstGeom prst="rect">
-            <a:avLst/>
-          </a:prstGeom>
-          <a:noFill/>
-          <a:ln/>
-        </p:spPr>
-        <p:txBody>
-          <a:bodyPr wrap="square" rtlCol="0" anchor="ctr"/>
-          <a:lstStyle/>
-          <a:p>
-            <a:pPr indent="0" marL="0">
-              <a:buNone/>
-            </a:pPr>
-            <a:r>
-              <a:rPr lang="en-US" sz="1300" b="1" dirty="0">
-                <a:solidFill>
-                  <a:srgbClr val="0A7C63"/>
-                </a:solidFill>
-                <a:latin typeface="Calibri" pitchFamily="34" charset="0"/>
-                <a:ea typeface="Calibri" pitchFamily="34" charset="-122"/>
-                <a:cs typeface="Calibri" pitchFamily="34" charset="-120"/>
-              </a:rPr>
-              <a:t>Accès : </a:t>
-            </a:r>
-            <a:pPr indent="0" marL="0">
-              <a:buNone/>
-            </a:pPr>
-            <a:r>
-              <a:rPr lang="en-US" sz="1300" dirty="0">
-                <a:solidFill>
-                  <a:srgbClr val="444444"/>
-                </a:solidFill>
-                <a:latin typeface="Calibri" pitchFamily="34" charset="0"/>
-                <a:ea typeface="Calibri" pitchFamily="34" charset="-122"/>
-                <a:cs typeface="Calibri" pitchFamily="34" charset="-120"/>
-              </a:rPr>
-              <a:t>Fondateur, Chef d'établissement</a:t>
-            </a:r>
-            <a:endParaRPr lang="en-US" sz="1300" dirty="0"/>
-          </a:p>
-        </p:txBody>
-      </p:sp>
-      <p:sp>
-        <p:nvSpPr>
-          <p:cNvPr id="6" name="Text 4"/>
-          <p:cNvSpPr/>
-          <p:nvPr/>
-        </p:nvSpPr>
-        <p:spPr>
-          <a:xfrm>
-            <a:off x="457200" y="2103120"/>
-            <a:ext cx="11277295" cy="3749040"/>
+            <a:ext cx="11277295" cy="5257800"/>
           </a:xfrm>
           <a:prstGeom prst="rect">
             <a:avLst/>
@@ -5340,7 +5492,7 @@
                 <a:ea typeface="Calibri" pitchFamily="34" charset="-122"/>
                 <a:cs typeface="Calibri" pitchFamily="34" charset="-120"/>
               </a:rPr>
-              <a:t>Décide du passage en classe supérieure à partir de la moyenne annuelle (moyenne des 3 trimestres). Seuil de passage : 5/10.</a:t>
+              <a:t>Chaque bulletin rassemble les notes d'un élève sur les trois trimestres d'une matière, avec calcul automatique des moyennes.</a:t>
             </a:r>
             <a:endParaRPr lang="en-US" sz="1500" dirty="0"/>
           </a:p>
@@ -5361,7 +5513,7 @@
                 <a:ea typeface="Calibri" pitchFamily="34" charset="-122"/>
                 <a:cs typeface="Calibri" pitchFamily="34" charset="-120"/>
               </a:rPr>
-              <a:t>Choisissez une classe : Kalanso calcule automatiquement, pour chaque élève, ses moyennes trimestrielles, sa moyenne annuelle et une proposition de décision (passage ou redoublement).</a:t>
+              <a:t>Téléchargeable en Excel depuis la fiche de l'élève ou la page Notes, pour archivage ou impression.</a:t>
             </a:r>
             <a:endParaRPr lang="en-US" sz="1500" dirty="0"/>
           </a:p>
@@ -5382,43 +5534,22 @@
                 <a:ea typeface="Calibri" pitchFamily="34" charset="-122"/>
                 <a:cs typeface="Calibri" pitchFamily="34" charset="-120"/>
               </a:rPr>
-              <a:t>Pour chaque élève admis, une classe de destination est proposée (niveau supérieur, année scolaire suivante) — modifiable au cas par cas.</a:t>
+              <a:t>Un export « Notes de la classe » (Excel) permet de sortir en une fois toutes les notes d'une classe pour un trimestre donné.</a:t>
             </a:r>
             <a:endParaRPr lang="en-US" sz="1500" dirty="0"/>
           </a:p>
-          <a:p>
-            <a:pPr marL="254000" indent="-254000">
-              <a:spcAft>
-                <a:spcPts val="1000"/>
-              </a:spcAft>
-              <a:buSzPct val="100000"/>
-              <a:buChar char="▸"/>
-            </a:pPr>
-            <a:r>
-              <a:rPr lang="en-US" sz="1500" dirty="0">
-                <a:solidFill>
-                  <a:srgbClr val="444444"/>
-                </a:solidFill>
-                <a:latin typeface="Calibri" pitchFamily="34" charset="0"/>
-                <a:ea typeface="Calibri" pitchFamily="34" charset="-122"/>
-                <a:cs typeface="Calibri" pitchFamily="34" charset="-120"/>
-              </a:rPr>
-              <a:t>Validez le passage : les élèves sélectionnés sont automatiquement réinscrits dans leur nouvelle classe.</a:t>
-            </a:r>
-            <a:endParaRPr lang="en-US" sz="1500" dirty="0"/>
-          </a:p>
-        </p:txBody>
-      </p:sp>
-      <p:sp>
-        <p:nvSpPr>
-          <p:cNvPr id="7" name="Shape 5"/>
-          <p:cNvSpPr/>
-          <p:nvPr/>
-        </p:nvSpPr>
-        <p:spPr>
-          <a:xfrm>
-            <a:off x="457200" y="5897880"/>
-            <a:ext cx="11277295" cy="502920"/>
+        </p:txBody>
+      </p:sp>
+      <p:sp>
+        <p:nvSpPr>
+          <p:cNvPr id="5" name="Shape 3"/>
+          <p:cNvSpPr/>
+          <p:nvPr/>
+        </p:nvSpPr>
+        <p:spPr>
+          <a:xfrm>
+            <a:off x="0" y="6537960"/>
+            <a:ext cx="12191695" cy="320040"/>
           </a:xfrm>
           <a:prstGeom prst="rect">
             <a:avLst/>
@@ -5426,90 +5557,12 @@
           <a:solidFill>
             <a:srgbClr val="EAFBF6"/>
           </a:solidFill>
-          <a:ln w="9525">
-            <a:solidFill>
-              <a:srgbClr val="17AE89"/>
-            </a:solidFill>
-            <a:prstDash val="solid"/>
-          </a:ln>
-        </p:spPr>
-      </p:sp>
-      <p:sp>
-        <p:nvSpPr>
-          <p:cNvPr id="8" name="Text 6"/>
-          <p:cNvSpPr/>
-          <p:nvPr/>
-        </p:nvSpPr>
-        <p:spPr>
-          <a:xfrm>
-            <a:off x="640080" y="5897880"/>
-            <a:ext cx="10911535" cy="502920"/>
-          </a:xfrm>
-          <a:prstGeom prst="rect">
-            <a:avLst/>
-          </a:prstGeom>
-          <a:noFill/>
-          <a:ln/>
-        </p:spPr>
-        <p:txBody>
-          <a:bodyPr wrap="square" rtlCol="0" anchor="ctr"/>
-          <a:lstStyle/>
-          <a:p>
-            <a:pPr indent="0" marL="0">
-              <a:buNone/>
-            </a:pPr>
-            <a:r>
-              <a:rPr lang="en-US" sz="1200" dirty="0">
-                <a:solidFill>
-                  <a:srgbClr val="0A7C63"/>
-                </a:solidFill>
-                <a:latin typeface="Calibri" pitchFamily="34" charset="0"/>
-                <a:ea typeface="Calibri" pitchFamily="34" charset="-122"/>
-                <a:cs typeface="Calibri" pitchFamily="34" charset="-120"/>
-              </a:rPr>
-              <a:t>💡 </a:t>
-            </a:r>
-            <a:pPr indent="0" marL="0">
-              <a:buNone/>
-            </a:pPr>
-            <a:r>
-              <a:rPr lang="en-US" sz="1200" i="1" dirty="0">
-                <a:solidFill>
-                  <a:srgbClr val="0A7C63"/>
-                </a:solidFill>
-                <a:latin typeface="Calibri" pitchFamily="34" charset="0"/>
-                <a:ea typeface="Calibri" pitchFamily="34" charset="-122"/>
-                <a:cs typeface="Calibri" pitchFamily="34" charset="-120"/>
-              </a:rPr>
-              <a:t>La classe et l'année scolaire de destination doivent déjà exister — créez-les depuis la page Classes avant de lancer les passages.</a:t>
-            </a:r>
-            <a:endParaRPr lang="en-US" sz="1200" dirty="0"/>
-          </a:p>
-        </p:txBody>
-      </p:sp>
-      <p:sp>
-        <p:nvSpPr>
-          <p:cNvPr id="9" name="Shape 7"/>
-          <p:cNvSpPr/>
-          <p:nvPr/>
-        </p:nvSpPr>
-        <p:spPr>
-          <a:xfrm>
-            <a:off x="0" y="6537960"/>
-            <a:ext cx="12191695" cy="320040"/>
-          </a:xfrm>
-          <a:prstGeom prst="rect">
-            <a:avLst/>
-          </a:prstGeom>
-          <a:solidFill>
-            <a:srgbClr val="EAFBF6"/>
-          </a:solidFill>
-          <a:ln/>
-        </p:spPr>
-      </p:sp>
-      <p:sp>
-        <p:nvSpPr>
-          <p:cNvPr id="10" name="Text 8"/>
+          <a:ln/>
+        </p:spPr>
+      </p:sp>
+      <p:sp>
+        <p:nvSpPr>
+          <p:cNvPr id="6" name="Text 4"/>
           <p:cNvSpPr/>
           <p:nvPr/>
         </p:nvSpPr>
@@ -5548,7 +5601,7 @@
       </p:sp>
       <p:sp>
         <p:nvSpPr>
-          <p:cNvPr id="11" name="Text 9"/>
+          <p:cNvPr id="7" name="Text 5"/>
           <p:cNvSpPr/>
           <p:nvPr/>
         </p:nvSpPr>
@@ -5663,7 +5716,7 @@
                 <a:ea typeface="Calibri" pitchFamily="34" charset="-122"/>
                 <a:cs typeface="Calibri" pitchFamily="34" charset="-120"/>
               </a:rPr>
-              <a:t>Emploi du temps</a:t>
+              <a:t>Suivi de parcours</a:t>
             </a:r>
             <a:endParaRPr lang="en-US" sz="2600" dirty="0"/>
           </a:p>
@@ -5702,7 +5755,7 @@
                 <a:ea typeface="Calibri" pitchFamily="34" charset="-122"/>
                 <a:cs typeface="Calibri" pitchFamily="34" charset="-120"/>
               </a:rPr>
-              <a:t>Élèves → Emplois du temps</a:t>
+              <a:t>Élèves → Suivi de parcours</a:t>
             </a:r>
             <a:endParaRPr lang="en-US" sz="1500" dirty="0"/>
           </a:p>
@@ -5717,7 +5770,60 @@
         <p:spPr>
           <a:xfrm>
             <a:off x="457200" y="1600200"/>
-            <a:ext cx="11277295" cy="4709160"/>
+            <a:ext cx="11277295" cy="365760"/>
+          </a:xfrm>
+          <a:prstGeom prst="rect">
+            <a:avLst/>
+          </a:prstGeom>
+          <a:noFill/>
+          <a:ln/>
+        </p:spPr>
+        <p:txBody>
+          <a:bodyPr wrap="square" rtlCol="0" anchor="ctr"/>
+          <a:lstStyle/>
+          <a:p>
+            <a:pPr indent="0" marL="0">
+              <a:buNone/>
+            </a:pPr>
+            <a:r>
+              <a:rPr lang="en-US" sz="1300" b="1" dirty="0">
+                <a:solidFill>
+                  <a:srgbClr val="0A7C63"/>
+                </a:solidFill>
+                <a:latin typeface="Calibri" pitchFamily="34" charset="0"/>
+                <a:ea typeface="Calibri" pitchFamily="34" charset="-122"/>
+                <a:cs typeface="Calibri" pitchFamily="34" charset="-120"/>
+              </a:rPr>
+              <a:t>Accès : </a:t>
+            </a:r>
+            <a:pPr indent="0" marL="0">
+              <a:buNone/>
+            </a:pPr>
+            <a:r>
+              <a:rPr lang="en-US" sz="1300" dirty="0">
+                <a:solidFill>
+                  <a:srgbClr val="444444"/>
+                </a:solidFill>
+                <a:latin typeface="Calibri" pitchFamily="34" charset="0"/>
+                <a:ea typeface="Calibri" pitchFamily="34" charset="-122"/>
+                <a:cs typeface="Calibri" pitchFamily="34" charset="-120"/>
+              </a:rPr>
+              <a:t>Fondateur, Chef d'établissement</a:t>
+            </a:r>
+            <a:endParaRPr lang="en-US" sz="1300" dirty="0"/>
+          </a:p>
+        </p:txBody>
+      </p:sp>
+      <p:sp>
+        <p:nvSpPr>
+          <p:cNvPr id="6" name="Text 4"/>
+          <p:cNvSpPr/>
+          <p:nvPr/>
+        </p:nvSpPr>
+        <p:spPr>
+          <a:xfrm>
+            <a:off x="457200" y="2103120"/>
+            <a:ext cx="11277295" cy="3749040"/>
           </a:xfrm>
           <a:prstGeom prst="rect">
             <a:avLst/>
@@ -5745,7 +5851,7 @@
                 <a:ea typeface="Calibri" pitchFamily="34" charset="-122"/>
                 <a:cs typeface="Calibri" pitchFamily="34" charset="-120"/>
               </a:rPr>
-              <a:t>Chaque créneau associe une classe, une matière, un enseignant, une salle, un jour et une plage horaire, avec un taux horaire (utilisé ensuite pour le calcul du salaire de l'enseignant).</a:t>
+              <a:t>Décide du passage en classe supérieure à partir de la moyenne annuelle (moyenne des 3 trimestres). Seuil de passage : 5/10.</a:t>
             </a:r>
             <a:endParaRPr lang="en-US" sz="1500" dirty="0"/>
           </a:p>
@@ -5766,7 +5872,7 @@
                 <a:ea typeface="Calibri" pitchFamily="34" charset="-122"/>
                 <a:cs typeface="Calibri" pitchFamily="34" charset="-120"/>
               </a:rPr>
-              <a:t>Kalanso empêche la création d'un créneau en conflit : même salle ou même enseignant déjà occupé sur le même horaire.</a:t>
+              <a:t>Choisissez une classe : Kalanso calcule automatiquement, pour chaque élève, ses moyennes trimestrielles, sa moyenne annuelle et une proposition de décision (passage ou redoublement).</a:t>
             </a:r>
             <a:endParaRPr lang="en-US" sz="1500" dirty="0"/>
           </a:p>
@@ -5787,7 +5893,7 @@
                 <a:ea typeface="Calibri" pitchFamily="34" charset="-122"/>
                 <a:cs typeface="Calibri" pitchFamily="34" charset="-120"/>
               </a:rPr>
-              <a:t>Les salles sont gérées directement depuis cette page (création à la volée).</a:t>
+              <a:t>Pour chaque élève admis, une classe de destination est proposée (niveau supérieur, année scolaire suivante) — modifiable au cas par cas.</a:t>
             </a:r>
             <a:endParaRPr lang="en-US" sz="1500" dirty="0"/>
           </a:p>
@@ -5808,7 +5914,7 @@
                 <a:ea typeface="Calibri" pitchFamily="34" charset="-122"/>
                 <a:cs typeface="Calibri" pitchFamily="34" charset="-120"/>
               </a:rPr>
-              <a:t>Export possible en Excel ou en PDF, par classe, pour affichage ou distribution.</a:t>
+              <a:t>Validez le passage : les élèves sélectionnés sont automatiquement réinscrits dans leur nouvelle classe.</a:t>
             </a:r>
             <a:endParaRPr lang="en-US" sz="1500" dirty="0"/>
           </a:p>
@@ -5816,14 +5922,14 @@
       </p:sp>
       <p:sp>
         <p:nvSpPr>
-          <p:cNvPr id="6" name="Shape 4"/>
-          <p:cNvSpPr/>
-          <p:nvPr/>
-        </p:nvSpPr>
-        <p:spPr>
-          <a:xfrm>
-            <a:off x="0" y="6537960"/>
-            <a:ext cx="12191695" cy="320040"/>
+          <p:cNvPr id="7" name="Shape 5"/>
+          <p:cNvSpPr/>
+          <p:nvPr/>
+        </p:nvSpPr>
+        <p:spPr>
+          <a:xfrm>
+            <a:off x="457200" y="5897880"/>
+            <a:ext cx="11277295" cy="502920"/>
           </a:xfrm>
           <a:prstGeom prst="rect">
             <a:avLst/>
@@ -5831,12 +5937,90 @@
           <a:solidFill>
             <a:srgbClr val="EAFBF6"/>
           </a:solidFill>
-          <a:ln/>
-        </p:spPr>
-      </p:sp>
-      <p:sp>
-        <p:nvSpPr>
-          <p:cNvPr id="7" name="Text 5"/>
+          <a:ln w="9525">
+            <a:solidFill>
+              <a:srgbClr val="17AE89"/>
+            </a:solidFill>
+            <a:prstDash val="solid"/>
+          </a:ln>
+        </p:spPr>
+      </p:sp>
+      <p:sp>
+        <p:nvSpPr>
+          <p:cNvPr id="8" name="Text 6"/>
+          <p:cNvSpPr/>
+          <p:nvPr/>
+        </p:nvSpPr>
+        <p:spPr>
+          <a:xfrm>
+            <a:off x="640080" y="5897880"/>
+            <a:ext cx="10911535" cy="502920"/>
+          </a:xfrm>
+          <a:prstGeom prst="rect">
+            <a:avLst/>
+          </a:prstGeom>
+          <a:noFill/>
+          <a:ln/>
+        </p:spPr>
+        <p:txBody>
+          <a:bodyPr wrap="square" rtlCol="0" anchor="ctr"/>
+          <a:lstStyle/>
+          <a:p>
+            <a:pPr indent="0" marL="0">
+              <a:buNone/>
+            </a:pPr>
+            <a:r>
+              <a:rPr lang="en-US" sz="1200" dirty="0">
+                <a:solidFill>
+                  <a:srgbClr val="0A7C63"/>
+                </a:solidFill>
+                <a:latin typeface="Calibri" pitchFamily="34" charset="0"/>
+                <a:ea typeface="Calibri" pitchFamily="34" charset="-122"/>
+                <a:cs typeface="Calibri" pitchFamily="34" charset="-120"/>
+              </a:rPr>
+              <a:t>💡 </a:t>
+            </a:r>
+            <a:pPr indent="0" marL="0">
+              <a:buNone/>
+            </a:pPr>
+            <a:r>
+              <a:rPr lang="en-US" sz="1200" i="1" dirty="0">
+                <a:solidFill>
+                  <a:srgbClr val="0A7C63"/>
+                </a:solidFill>
+                <a:latin typeface="Calibri" pitchFamily="34" charset="0"/>
+                <a:ea typeface="Calibri" pitchFamily="34" charset="-122"/>
+                <a:cs typeface="Calibri" pitchFamily="34" charset="-120"/>
+              </a:rPr>
+              <a:t>La classe et l'année scolaire de destination doivent déjà exister — créez-les depuis la page Classes avant de lancer les passages.</a:t>
+            </a:r>
+            <a:endParaRPr lang="en-US" sz="1200" dirty="0"/>
+          </a:p>
+        </p:txBody>
+      </p:sp>
+      <p:sp>
+        <p:nvSpPr>
+          <p:cNvPr id="9" name="Shape 7"/>
+          <p:cNvSpPr/>
+          <p:nvPr/>
+        </p:nvSpPr>
+        <p:spPr>
+          <a:xfrm>
+            <a:off x="0" y="6537960"/>
+            <a:ext cx="12191695" cy="320040"/>
+          </a:xfrm>
+          <a:prstGeom prst="rect">
+            <a:avLst/>
+          </a:prstGeom>
+          <a:solidFill>
+            <a:srgbClr val="EAFBF6"/>
+          </a:solidFill>
+          <a:ln/>
+        </p:spPr>
+      </p:sp>
+      <p:sp>
+        <p:nvSpPr>
+          <p:cNvPr id="10" name="Text 8"/>
           <p:cNvSpPr/>
           <p:nvPr/>
         </p:nvSpPr>
@@ -5875,7 +6059,7 @@
       </p:sp>
       <p:sp>
         <p:nvSpPr>
-          <p:cNvPr id="8" name="Text 6"/>
+          <p:cNvPr id="11" name="Text 9"/>
           <p:cNvSpPr/>
           <p:nvPr/>
         </p:nvSpPr>
@@ -5990,7 +6174,7 @@
                 <a:ea typeface="Calibri" pitchFamily="34" charset="-122"/>
                 <a:cs typeface="Calibri" pitchFamily="34" charset="-120"/>
               </a:rPr>
-              <a:t>Appel du jour</a:t>
+              <a:t>Emploi du temps</a:t>
             </a:r>
             <a:endParaRPr lang="en-US" sz="2600" dirty="0"/>
           </a:p>
@@ -6029,7 +6213,7 @@
                 <a:ea typeface="Calibri" pitchFamily="34" charset="-122"/>
                 <a:cs typeface="Calibri" pitchFamily="34" charset="-120"/>
               </a:rPr>
-              <a:t>Vie scolaire → Appel du jour</a:t>
+              <a:t>Élèves → Emplois du temps</a:t>
             </a:r>
             <a:endParaRPr lang="en-US" sz="1500" dirty="0"/>
           </a:p>
@@ -6072,7 +6256,7 @@
                 <a:ea typeface="Calibri" pitchFamily="34" charset="-122"/>
                 <a:cs typeface="Calibri" pitchFamily="34" charset="-120"/>
               </a:rPr>
-              <a:t>Sélectionnez une classe et une date : la liste des élèves inscrits s'affiche, chacun marqué par défaut « Présent ».</a:t>
+              <a:t>Chaque créneau associe une classe, une matière, un enseignant, une salle, un jour et une plage horaire, avec un taux horaire (utilisé ensuite pour le calcul du salaire de l'enseignant).</a:t>
             </a:r>
             <a:endParaRPr lang="en-US" sz="1500" dirty="0"/>
           </a:p>
@@ -6093,7 +6277,7 @@
                 <a:ea typeface="Calibri" pitchFamily="34" charset="-122"/>
                 <a:cs typeface="Calibri" pitchFamily="34" charset="-120"/>
               </a:rPr>
-              <a:t>Basculez un élève en « Absent » ou « Retard » selon la situation réelle, puis enregistrez.</a:t>
+              <a:t>Kalanso empêche la création d'un créneau en conflit : même salle ou même enseignant déjà occupé sur le même horaire.</a:t>
             </a:r>
             <a:endParaRPr lang="en-US" sz="1500" dirty="0"/>
           </a:p>
@@ -6114,7 +6298,7 @@
                 <a:ea typeface="Calibri" pitchFamily="34" charset="-122"/>
                 <a:cs typeface="Calibri" pitchFamily="34" charset="-120"/>
               </a:rPr>
-              <a:t>L'appel peut être corrigé plus tard en le resoumettant pour la même classe et la même date — la correction remplace bien l'appel précédent.</a:t>
+              <a:t>Les salles sont gérées directement depuis cette page (création à la volée).</a:t>
             </a:r>
             <a:endParaRPr lang="en-US" sz="1500" dirty="0"/>
           </a:p>
@@ -6135,7 +6319,7 @@
                 <a:ea typeface="Calibri" pitchFamily="34" charset="-122"/>
                 <a:cs typeface="Calibri" pitchFamily="34" charset="-120"/>
               </a:rPr>
-              <a:t>Un export Excel de l'appel est disponible pour archivage.</a:t>
+              <a:t>Export possible en Excel ou en PDF, par classe, pour affichage ou distribution.</a:t>
             </a:r>
             <a:endParaRPr lang="en-US" sz="1500" dirty="0"/>
           </a:p>
@@ -6317,7 +6501,7 @@
                 <a:ea typeface="Calibri" pitchFamily="34" charset="-122"/>
                 <a:cs typeface="Calibri" pitchFamily="34" charset="-120"/>
               </a:rPr>
-              <a:t>Historique d'absences</a:t>
+              <a:t>Appel du jour</a:t>
             </a:r>
             <a:endParaRPr lang="en-US" sz="2600" dirty="0"/>
           </a:p>
@@ -6356,7 +6540,7 @@
                 <a:ea typeface="Calibri" pitchFamily="34" charset="-122"/>
                 <a:cs typeface="Calibri" pitchFamily="34" charset="-120"/>
               </a:rPr>
-              <a:t>Vie scolaire → Historique d'absences</a:t>
+              <a:t>Vie scolaire → Appel du jour</a:t>
             </a:r>
             <a:endParaRPr lang="en-US" sz="1500" dirty="0"/>
           </a:p>
@@ -6399,7 +6583,7 @@
                 <a:ea typeface="Calibri" pitchFamily="34" charset="-122"/>
                 <a:cs typeface="Calibri" pitchFamily="34" charset="-120"/>
               </a:rPr>
-              <a:t>Vue consolidée de toutes les absences et retards enregistrés, filtrable par classe et par période.</a:t>
+              <a:t>Sélectionnez une classe et une date : la liste des élèves inscrits s'affiche, chacun marqué par défaut « Présent ».</a:t>
             </a:r>
             <a:endParaRPr lang="en-US" sz="1500" dirty="0"/>
           </a:p>
@@ -6420,7 +6604,7 @@
                 <a:ea typeface="Calibri" pitchFamily="34" charset="-122"/>
                 <a:cs typeface="Calibri" pitchFamily="34" charset="-120"/>
               </a:rPr>
-              <a:t>Sert de base à l'indicateur « Absences aujourd'hui » du tableau de bord.</a:t>
+              <a:t>Basculez un élève en « Absent » ou « Retard » selon la situation réelle, puis enregistrez.</a:t>
             </a:r>
             <a:endParaRPr lang="en-US" sz="1500" dirty="0"/>
           </a:p>
@@ -6441,7 +6625,28 @@
                 <a:ea typeface="Calibri" pitchFamily="34" charset="-122"/>
                 <a:cs typeface="Calibri" pitchFamily="34" charset="-120"/>
               </a:rPr>
-              <a:t>Complète l'appel du jour pour un suivi dans la durée (élèves à absentéisme répété, par exemple).</a:t>
+              <a:t>L'appel peut être corrigé plus tard en le resoumettant pour la même classe et la même date — la correction remplace bien l'appel précédent.</a:t>
+            </a:r>
+            <a:endParaRPr lang="en-US" sz="1500" dirty="0"/>
+          </a:p>
+          <a:p>
+            <a:pPr marL="254000" indent="-254000">
+              <a:spcAft>
+                <a:spcPts val="1000"/>
+              </a:spcAft>
+              <a:buSzPct val="100000"/>
+              <a:buChar char="▸"/>
+            </a:pPr>
+            <a:r>
+              <a:rPr lang="en-US" sz="1500" dirty="0">
+                <a:solidFill>
+                  <a:srgbClr val="444444"/>
+                </a:solidFill>
+                <a:latin typeface="Calibri" pitchFamily="34" charset="0"/>
+                <a:ea typeface="Calibri" pitchFamily="34" charset="-122"/>
+                <a:cs typeface="Calibri" pitchFamily="34" charset="-120"/>
+              </a:rPr>
+              <a:t>Un export Excel de l'appel est disponible pour archivage.</a:t>
             </a:r>
             <a:endParaRPr lang="en-US" sz="1500" dirty="0"/>
           </a:p>
@@ -6623,7 +6828,7 @@
                 <a:ea typeface="Calibri" pitchFamily="34" charset="-122"/>
                 <a:cs typeface="Calibri" pitchFamily="34" charset="-120"/>
               </a:rPr>
-              <a:t>Communication</a:t>
+              <a:t>Historique d'absences</a:t>
             </a:r>
             <a:endParaRPr lang="en-US" sz="2600" dirty="0"/>
           </a:p>
@@ -6662,7 +6867,7 @@
                 <a:ea typeface="Calibri" pitchFamily="34" charset="-122"/>
                 <a:cs typeface="Calibri" pitchFamily="34" charset="-120"/>
               </a:rPr>
-              <a:t>Vie scolaire → Communication</a:t>
+              <a:t>Vie scolaire → Historique d'absences</a:t>
             </a:r>
             <a:endParaRPr lang="en-US" sz="1500" dirty="0"/>
           </a:p>
@@ -6677,60 +6882,7 @@
         <p:spPr>
           <a:xfrm>
             <a:off x="457200" y="1600200"/>
-            <a:ext cx="11277295" cy="365760"/>
-          </a:xfrm>
-          <a:prstGeom prst="rect">
-            <a:avLst/>
-          </a:prstGeom>
-          <a:noFill/>
-          <a:ln/>
-        </p:spPr>
-        <p:txBody>
-          <a:bodyPr wrap="square" rtlCol="0" anchor="ctr"/>
-          <a:lstStyle/>
-          <a:p>
-            <a:pPr indent="0" marL="0">
-              <a:buNone/>
-            </a:pPr>
-            <a:r>
-              <a:rPr lang="en-US" sz="1300" b="1" dirty="0">
-                <a:solidFill>
-                  <a:srgbClr val="0A7C63"/>
-                </a:solidFill>
-                <a:latin typeface="Calibri" pitchFamily="34" charset="0"/>
-                <a:ea typeface="Calibri" pitchFamily="34" charset="-122"/>
-                <a:cs typeface="Calibri" pitchFamily="34" charset="-120"/>
-              </a:rPr>
-              <a:t>Accès : </a:t>
-            </a:r>
-            <a:pPr indent="0" marL="0">
-              <a:buNone/>
-            </a:pPr>
-            <a:r>
-              <a:rPr lang="en-US" sz="1300" dirty="0">
-                <a:solidFill>
-                  <a:srgbClr val="444444"/>
-                </a:solidFill>
-                <a:latin typeface="Calibri" pitchFamily="34" charset="0"/>
-                <a:ea typeface="Calibri" pitchFamily="34" charset="-122"/>
-                <a:cs typeface="Calibri" pitchFamily="34" charset="-120"/>
-              </a:rPr>
-              <a:t>Envoi : Fondateur, Chef d'établissement, Secrétaire, Comptable — lecture : tous</a:t>
-            </a:r>
-            <a:endParaRPr lang="en-US" sz="1300" dirty="0"/>
-          </a:p>
-        </p:txBody>
-      </p:sp>
-      <p:sp>
-        <p:nvSpPr>
-          <p:cNvPr id="6" name="Text 4"/>
-          <p:cNvSpPr/>
-          <p:nvPr/>
-        </p:nvSpPr>
-        <p:spPr>
-          <a:xfrm>
-            <a:off x="457200" y="2103120"/>
-            <a:ext cx="11277295" cy="4206240"/>
+            <a:ext cx="11277295" cy="4709160"/>
           </a:xfrm>
           <a:prstGeom prst="rect">
             <a:avLst/>
@@ -6758,7 +6910,7 @@
                 <a:ea typeface="Calibri" pitchFamily="34" charset="-122"/>
                 <a:cs typeface="Calibri" pitchFamily="34" charset="-120"/>
               </a:rPr>
-              <a:t>Envoie un message (SMS) aux parents, soit à toute une classe, soit à un élève précis.</a:t>
+              <a:t>Vue consolidée de toutes les absences et retards enregistrés, filtrable par classe et par période.</a:t>
             </a:r>
             <a:endParaRPr lang="en-US" sz="1500" dirty="0"/>
           </a:p>
@@ -6779,7 +6931,7 @@
                 <a:ea typeface="Calibri" pitchFamily="34" charset="-122"/>
                 <a:cs typeface="Calibri" pitchFamily="34" charset="-120"/>
               </a:rPr>
-              <a:t>Rédigez le contenu du message puis cliquez sur « Envoyer aux parents ».</a:t>
+              <a:t>Sert de base à l'indicateur « Absences aujourd'hui » du tableau de bord.</a:t>
             </a:r>
             <a:endParaRPr lang="en-US" sz="1500" dirty="0"/>
           </a:p>
@@ -6800,36 +6952,15 @@
                 <a:ea typeface="Calibri" pitchFamily="34" charset="-122"/>
                 <a:cs typeface="Calibri" pitchFamily="34" charset="-120"/>
               </a:rPr>
-              <a:t>Le « Journal des messages » conserve l'historique complet : date, élève, parent, téléphone, type de message (manuel, absence, rappel d'impayé), statut d'envoi.</a:t>
+              <a:t>Complète l'appel du jour pour un suivi dans la durée (élèves à absentéisme répété, par exemple).</a:t>
             </a:r>
             <a:endParaRPr lang="en-US" sz="1500" dirty="0"/>
           </a:p>
-          <a:p>
-            <a:pPr marL="254000" indent="-254000">
-              <a:spcAft>
-                <a:spcPts val="1000"/>
-              </a:spcAft>
-              <a:buSzPct val="100000"/>
-              <a:buChar char="▸"/>
-            </a:pPr>
-            <a:r>
-              <a:rPr lang="en-US" sz="1500" dirty="0">
-                <a:solidFill>
-                  <a:srgbClr val="444444"/>
-                </a:solidFill>
-                <a:latin typeface="Calibri" pitchFamily="34" charset="0"/>
-                <a:ea typeface="Calibri" pitchFamily="34" charset="-122"/>
-                <a:cs typeface="Calibri" pitchFamily="34" charset="-120"/>
-              </a:rPr>
-              <a:t>Certains messages sont générés automatiquement par Kalanso (ex. rappel d'impayé) et apparaissent dans le même journal.</a:t>
-            </a:r>
-            <a:endParaRPr lang="en-US" sz="1500" dirty="0"/>
-          </a:p>
-        </p:txBody>
-      </p:sp>
-      <p:sp>
-        <p:nvSpPr>
-          <p:cNvPr id="7" name="Shape 5"/>
+        </p:txBody>
+      </p:sp>
+      <p:sp>
+        <p:nvSpPr>
+          <p:cNvPr id="6" name="Shape 4"/>
           <p:cNvSpPr/>
           <p:nvPr/>
         </p:nvSpPr>
@@ -6849,7 +6980,7 @@
       </p:sp>
       <p:sp>
         <p:nvSpPr>
-          <p:cNvPr id="8" name="Text 6"/>
+          <p:cNvPr id="7" name="Text 5"/>
           <p:cNvSpPr/>
           <p:nvPr/>
         </p:nvSpPr>
@@ -6888,7 +7019,7 @@
       </p:sp>
       <p:sp>
         <p:nvSpPr>
-          <p:cNvPr id="9" name="Text 7"/>
+          <p:cNvPr id="8" name="Text 6"/>
           <p:cNvSpPr/>
           <p:nvPr/>
         </p:nvSpPr>
@@ -7003,7 +7134,7 @@
                 <a:ea typeface="Calibri" pitchFamily="34" charset="-122"/>
                 <a:cs typeface="Calibri" pitchFamily="34" charset="-120"/>
               </a:rPr>
-              <a:t>Tarifs d'écolage</a:t>
+              <a:t>Communication</a:t>
             </a:r>
             <a:endParaRPr lang="en-US" sz="2600" dirty="0"/>
           </a:p>
@@ -7042,7 +7173,7 @@
                 <a:ea typeface="Calibri" pitchFamily="34" charset="-122"/>
                 <a:cs typeface="Calibri" pitchFamily="34" charset="-120"/>
               </a:rPr>
-              <a:t>Finances → Tarifs</a:t>
+              <a:t>Vie scolaire → Communication</a:t>
             </a:r>
             <a:endParaRPr lang="en-US" sz="1500" dirty="0"/>
           </a:p>
@@ -7095,7 +7226,7 @@
                 <a:ea typeface="Calibri" pitchFamily="34" charset="-122"/>
                 <a:cs typeface="Calibri" pitchFamily="34" charset="-120"/>
               </a:rPr>
-              <a:t>Fondateur, Chef d'établissement, Comptable</a:t>
+              <a:t>Envoi : Fondateur, Chef d'établissement, Secrétaire, Comptable — lecture : tous</a:t>
             </a:r>
             <a:endParaRPr lang="en-US" sz="1300" dirty="0"/>
           </a:p>
@@ -7138,7 +7269,7 @@
                 <a:ea typeface="Calibri" pitchFamily="34" charset="-122"/>
                 <a:cs typeface="Calibri" pitchFamily="34" charset="-120"/>
               </a:rPr>
-              <a:t>Un tarif est défini par niveau (pas par classe) : tout élève inscrit dans une classe de ce niveau reçoit automatiquement la facture correspondante.</a:t>
+              <a:t>Envoie un message (SMS) aux parents, soit à toute une classe, soit à un élève précis.</a:t>
             </a:r>
             <a:endParaRPr lang="en-US" sz="1500" dirty="0"/>
           </a:p>
@@ -7159,7 +7290,7 @@
                 <a:ea typeface="Calibri" pitchFamily="34" charset="-122"/>
                 <a:cs typeface="Calibri" pitchFamily="34" charset="-120"/>
               </a:rPr>
-              <a:t>Plusieurs tarifs possibles sur un même niveau (ex. « Écolage annuel », « Trimestre 1 », « Trimestre 2 ») : chacun génère sa propre facture.</a:t>
+              <a:t>Rédigez le contenu du message puis cliquez sur « Envoyer aux parents ».</a:t>
             </a:r>
             <a:endParaRPr lang="en-US" sz="1500" dirty="0"/>
           </a:p>
@@ -7180,7 +7311,28 @@
                 <a:ea typeface="Calibri" pitchFamily="34" charset="-122"/>
                 <a:cs typeface="Calibri" pitchFamily="34" charset="-120"/>
               </a:rPr>
-              <a:t>Créer un tarif : libellé, niveau, montant. Modifier : lien « Modifier » sur la ligne du tarif concerné.</a:t>
+              <a:t>Le « Journal des messages » conserve l'historique complet : date, élève, parent, téléphone, type de message (manuel, absence, rappel d'impayé), statut d'envoi.</a:t>
+            </a:r>
+            <a:endParaRPr lang="en-US" sz="1500" dirty="0"/>
+          </a:p>
+          <a:p>
+            <a:pPr marL="254000" indent="-254000">
+              <a:spcAft>
+                <a:spcPts val="1000"/>
+              </a:spcAft>
+              <a:buSzPct val="100000"/>
+              <a:buChar char="▸"/>
+            </a:pPr>
+            <a:r>
+              <a:rPr lang="en-US" sz="1500" dirty="0">
+                <a:solidFill>
+                  <a:srgbClr val="444444"/>
+                </a:solidFill>
+                <a:latin typeface="Calibri" pitchFamily="34" charset="0"/>
+                <a:ea typeface="Calibri" pitchFamily="34" charset="-122"/>
+                <a:cs typeface="Calibri" pitchFamily="34" charset="-120"/>
+              </a:rPr>
+              <a:t>Certains messages sont générés automatiquement par Kalanso (ex. rappel d'impayé) et apparaissent dans le même journal.</a:t>
             </a:r>
             <a:endParaRPr lang="en-US" sz="1500" dirty="0"/>
           </a:p>
@@ -8128,7 +8280,7 @@
                 <a:ea typeface="Calibri" pitchFamily="34" charset="-122"/>
                 <a:cs typeface="Calibri" pitchFamily="34" charset="-120"/>
               </a:rPr>
-              <a:t>Frais d'inscription</a:t>
+              <a:t>Tarifs d'écolage</a:t>
             </a:r>
             <a:endParaRPr lang="en-US" sz="2600" dirty="0"/>
           </a:p>
@@ -8167,7 +8319,7 @@
                 <a:ea typeface="Calibri" pitchFamily="34" charset="-122"/>
                 <a:cs typeface="Calibri" pitchFamily="34" charset="-120"/>
               </a:rPr>
-              <a:t>Finances → Tarifs — section « Frais d'inscription par niveau »</a:t>
+              <a:t>Finances → Tarifs</a:t>
             </a:r>
             <a:endParaRPr lang="en-US" sz="1500" dirty="0"/>
           </a:p>
@@ -8263,7 +8415,7 @@
                 <a:ea typeface="Calibri" pitchFamily="34" charset="-122"/>
                 <a:cs typeface="Calibri" pitchFamily="34" charset="-120"/>
               </a:rPr>
-              <a:t>Montant facturé automatiquement à l'inscription de tout élève admis dans une classe de ce niveau.</a:t>
+              <a:t>Un tarif est défini par niveau (pas par classe) : tout élève inscrit dans une classe de ce niveau reçoit automatiquement la facture correspondante.</a:t>
             </a:r>
             <a:endParaRPr lang="en-US" sz="1500" dirty="0"/>
           </a:p>
@@ -8284,7 +8436,7 @@
                 <a:ea typeface="Calibri" pitchFamily="34" charset="-122"/>
                 <a:cs typeface="Calibri" pitchFamily="34" charset="-120"/>
               </a:rPr>
-              <a:t>Un seul montant par niveau et par année scolaire (contrairement à l'écolage, qui peut avoir plusieurs tarifs).</a:t>
+              <a:t>Plusieurs tarifs possibles sur un même niveau (ex. « Écolage annuel », « Trimestre 1 », « Trimestre 2 ») : chacun génère sa propre facture.</a:t>
             </a:r>
             <a:endParaRPr lang="en-US" sz="1500" dirty="0"/>
           </a:p>
@@ -8305,28 +8457,7 @@
                 <a:ea typeface="Calibri" pitchFamily="34" charset="-122"/>
                 <a:cs typeface="Calibri" pitchFamily="34" charset="-120"/>
               </a:rPr>
-              <a:t>La facture d'inscription est générée et soldée automatiquement au moment de l'acceptation d'une admission — aucune action manuelle nécessaire.</a:t>
-            </a:r>
-            <a:endParaRPr lang="en-US" sz="1500" dirty="0"/>
-          </a:p>
-          <a:p>
-            <a:pPr marL="254000" indent="-254000">
-              <a:spcAft>
-                <a:spcPts val="1000"/>
-              </a:spcAft>
-              <a:buSzPct val="100000"/>
-              <a:buChar char="▸"/>
-            </a:pPr>
-            <a:r>
-              <a:rPr lang="en-US" sz="1500" dirty="0">
-                <a:solidFill>
-                  <a:srgbClr val="444444"/>
-                </a:solidFill>
-                <a:latin typeface="Calibri" pitchFamily="34" charset="0"/>
-                <a:ea typeface="Calibri" pitchFamily="34" charset="-122"/>
-                <a:cs typeface="Calibri" pitchFamily="34" charset="-120"/>
-              </a:rPr>
-              <a:t>Modifiable à tout moment via le lien « Modifier » de la ligne concernée.</a:t>
+              <a:t>Créer un tarif : libellé, niveau, montant. Modifier : lien « Modifier » sur la ligne du tarif concerné.</a:t>
             </a:r>
             <a:endParaRPr lang="en-US" sz="1500" dirty="0"/>
           </a:p>
@@ -8508,7 +8639,7 @@
                 <a:ea typeface="Calibri" pitchFamily="34" charset="-122"/>
                 <a:cs typeface="Calibri" pitchFamily="34" charset="-120"/>
               </a:rPr>
-              <a:t>Factures</a:t>
+              <a:t>Frais d'inscription</a:t>
             </a:r>
             <a:endParaRPr lang="en-US" sz="2600" dirty="0"/>
           </a:p>
@@ -8547,7 +8678,7 @@
                 <a:ea typeface="Calibri" pitchFamily="34" charset="-122"/>
                 <a:cs typeface="Calibri" pitchFamily="34" charset="-120"/>
               </a:rPr>
-              <a:t>Finances → Factures</a:t>
+              <a:t>Finances → Tarifs — section « Frais d'inscription par niveau »</a:t>
             </a:r>
             <a:endParaRPr lang="en-US" sz="1500" dirty="0"/>
           </a:p>
@@ -8643,7 +8774,7 @@
                 <a:ea typeface="Calibri" pitchFamily="34" charset="-122"/>
                 <a:cs typeface="Calibri" pitchFamily="34" charset="-120"/>
               </a:rPr>
-              <a:t>Liste des impayés : élèves, montant total, montant payé, statut (impayée, partielle, payée, annulée).</a:t>
+              <a:t>Montant facturé automatiquement à l'inscription de tout élève admis dans une classe de ce niveau.</a:t>
             </a:r>
             <a:endParaRPr lang="en-US" sz="1500" dirty="0"/>
           </a:p>
@@ -8664,7 +8795,7 @@
                 <a:ea typeface="Calibri" pitchFamily="34" charset="-122"/>
                 <a:cs typeface="Calibri" pitchFamily="34" charset="-120"/>
               </a:rPr>
-              <a:t>Enregistrer un paiement : espèces, virement, chèque ou Mobile Money — met immédiatement à jour le solde de l'élève.</a:t>
+              <a:t>Un seul montant par niveau et par année scolaire (contrairement à l'écolage, qui peut avoir plusieurs tarifs).</a:t>
             </a:r>
             <a:endParaRPr lang="en-US" sz="1500" dirty="0"/>
           </a:p>
@@ -8685,7 +8816,7 @@
                 <a:ea typeface="Calibri" pitchFamily="34" charset="-122"/>
                 <a:cs typeface="Calibri" pitchFamily="34" charset="-120"/>
               </a:rPr>
-              <a:t>Import Excel de factures en masse (utile lors de la mise en place initiale) et export de la liste complète des factures.</a:t>
+              <a:t>La facture d'inscription est générée et soldée automatiquement au moment de l'acceptation d'une admission — aucune action manuelle nécessaire.</a:t>
             </a:r>
             <a:endParaRPr lang="en-US" sz="1500" dirty="0"/>
           </a:p>
@@ -8706,7 +8837,7 @@
                 <a:ea typeface="Calibri" pitchFamily="34" charset="-122"/>
                 <a:cs typeface="Calibri" pitchFamily="34" charset="-120"/>
               </a:rPr>
-              <a:t>Un modèle Excel téléchargeable guide la préparation d'un import.</a:t>
+              <a:t>Modifiable à tout moment via le lien « Modifier » de la ligne concernée.</a:t>
             </a:r>
             <a:endParaRPr lang="en-US" sz="1500" dirty="0"/>
           </a:p>
@@ -8888,7 +9019,7 @@
                 <a:ea typeface="Calibri" pitchFamily="34" charset="-122"/>
                 <a:cs typeface="Calibri" pitchFamily="34" charset="-120"/>
               </a:rPr>
-              <a:t>Paiement Mobile Money</a:t>
+              <a:t>Factures</a:t>
             </a:r>
             <a:endParaRPr lang="en-US" sz="2600" dirty="0"/>
           </a:p>
@@ -8927,7 +9058,7 @@
                 <a:ea typeface="Calibri" pitchFamily="34" charset="-122"/>
                 <a:cs typeface="Calibri" pitchFamily="34" charset="-120"/>
               </a:rPr>
-              <a:t>Finances → Factures — bouton « Mobile Money »</a:t>
+              <a:t>Finances → Factures</a:t>
             </a:r>
             <a:endParaRPr lang="en-US" sz="1500" dirty="0"/>
           </a:p>
@@ -8942,7 +9073,60 @@
         <p:spPr>
           <a:xfrm>
             <a:off x="457200" y="1600200"/>
-            <a:ext cx="11277295" cy="4709160"/>
+            <a:ext cx="11277295" cy="365760"/>
+          </a:xfrm>
+          <a:prstGeom prst="rect">
+            <a:avLst/>
+          </a:prstGeom>
+          <a:noFill/>
+          <a:ln/>
+        </p:spPr>
+        <p:txBody>
+          <a:bodyPr wrap="square" rtlCol="0" anchor="ctr"/>
+          <a:lstStyle/>
+          <a:p>
+            <a:pPr indent="0" marL="0">
+              <a:buNone/>
+            </a:pPr>
+            <a:r>
+              <a:rPr lang="en-US" sz="1300" b="1" dirty="0">
+                <a:solidFill>
+                  <a:srgbClr val="0A7C63"/>
+                </a:solidFill>
+                <a:latin typeface="Calibri" pitchFamily="34" charset="0"/>
+                <a:ea typeface="Calibri" pitchFamily="34" charset="-122"/>
+                <a:cs typeface="Calibri" pitchFamily="34" charset="-120"/>
+              </a:rPr>
+              <a:t>Accès : </a:t>
+            </a:r>
+            <a:pPr indent="0" marL="0">
+              <a:buNone/>
+            </a:pPr>
+            <a:r>
+              <a:rPr lang="en-US" sz="1300" dirty="0">
+                <a:solidFill>
+                  <a:srgbClr val="444444"/>
+                </a:solidFill>
+                <a:latin typeface="Calibri" pitchFamily="34" charset="0"/>
+                <a:ea typeface="Calibri" pitchFamily="34" charset="-122"/>
+                <a:cs typeface="Calibri" pitchFamily="34" charset="-120"/>
+              </a:rPr>
+              <a:t>Fondateur, Chef d'établissement, Comptable</a:t>
+            </a:r>
+            <a:endParaRPr lang="en-US" sz="1300" dirty="0"/>
+          </a:p>
+        </p:txBody>
+      </p:sp>
+      <p:sp>
+        <p:nvSpPr>
+          <p:cNvPr id="6" name="Text 4"/>
+          <p:cNvSpPr/>
+          <p:nvPr/>
+        </p:nvSpPr>
+        <p:spPr>
+          <a:xfrm>
+            <a:off x="457200" y="2103120"/>
+            <a:ext cx="11277295" cy="4206240"/>
           </a:xfrm>
           <a:prstGeom prst="rect">
             <a:avLst/>
@@ -8970,7 +9154,7 @@
                 <a:ea typeface="Calibri" pitchFamily="34" charset="-122"/>
                 <a:cs typeface="Calibri" pitchFamily="34" charset="-120"/>
               </a:rPr>
-              <a:t>Initier une transaction : choisissez l'opérateur (Orange Money, MTN Mobile Money...), le montant, le numéro du payeur.</a:t>
+              <a:t>Liste des impayés : élèves, montant total, montant payé, statut (impayée, partielle, payée, annulée).</a:t>
             </a:r>
             <a:endParaRPr lang="en-US" sz="1500" dirty="0"/>
           </a:p>
@@ -8991,7 +9175,7 @@
                 <a:ea typeface="Calibri" pitchFamily="34" charset="-122"/>
                 <a:cs typeface="Calibri" pitchFamily="34" charset="-120"/>
               </a:rPr>
-              <a:t>La transaction est d'abord « en attente », puis confirmée ou marquée en échec selon la réponse effective de l'opérateur.</a:t>
+              <a:t>Enregistrer un paiement : espèces, virement, chèque ou Mobile Money — met immédiatement à jour le solde de l'élève.</a:t>
             </a:r>
             <a:endParaRPr lang="en-US" sz="1500" dirty="0"/>
           </a:p>
@@ -9012,15 +9196,36 @@
                 <a:ea typeface="Calibri" pitchFamily="34" charset="-122"/>
                 <a:cs typeface="Calibri" pitchFamily="34" charset="-120"/>
               </a:rPr>
-              <a:t>Une fois confirmée, le paiement est automatiquement rattaché à la facture et le solde de l'élève est mis à jour comme pour tout autre mode de paiement.</a:t>
+              <a:t>Import Excel de factures en masse (utile lors de la mise en place initiale) et export de la liste complète des factures.</a:t>
             </a:r>
             <a:endParaRPr lang="en-US" sz="1500" dirty="0"/>
           </a:p>
-        </p:txBody>
-      </p:sp>
-      <p:sp>
-        <p:nvSpPr>
-          <p:cNvPr id="6" name="Shape 4"/>
+          <a:p>
+            <a:pPr marL="254000" indent="-254000">
+              <a:spcAft>
+                <a:spcPts val="1000"/>
+              </a:spcAft>
+              <a:buSzPct val="100000"/>
+              <a:buChar char="▸"/>
+            </a:pPr>
+            <a:r>
+              <a:rPr lang="en-US" sz="1500" dirty="0">
+                <a:solidFill>
+                  <a:srgbClr val="444444"/>
+                </a:solidFill>
+                <a:latin typeface="Calibri" pitchFamily="34" charset="0"/>
+                <a:ea typeface="Calibri" pitchFamily="34" charset="-122"/>
+                <a:cs typeface="Calibri" pitchFamily="34" charset="-120"/>
+              </a:rPr>
+              <a:t>Un modèle Excel téléchargeable guide la préparation d'un import.</a:t>
+            </a:r>
+            <a:endParaRPr lang="en-US" sz="1500" dirty="0"/>
+          </a:p>
+        </p:txBody>
+      </p:sp>
+      <p:sp>
+        <p:nvSpPr>
+          <p:cNvPr id="7" name="Shape 5"/>
           <p:cNvSpPr/>
           <p:nvPr/>
         </p:nvSpPr>
@@ -9040,7 +9245,7 @@
       </p:sp>
       <p:sp>
         <p:nvSpPr>
-          <p:cNvPr id="7" name="Text 5"/>
+          <p:cNvPr id="8" name="Text 6"/>
           <p:cNvSpPr/>
           <p:nvPr/>
         </p:nvSpPr>
@@ -9079,7 +9284,7 @@
       </p:sp>
       <p:sp>
         <p:nvSpPr>
-          <p:cNvPr id="8" name="Text 6"/>
+          <p:cNvPr id="9" name="Text 7"/>
           <p:cNvSpPr/>
           <p:nvPr/>
         </p:nvSpPr>
@@ -9194,7 +9399,7 @@
                 <a:ea typeface="Calibri" pitchFamily="34" charset="-122"/>
                 <a:cs typeface="Calibri" pitchFamily="34" charset="-120"/>
               </a:rPr>
-              <a:t>Reçus et factures PDF</a:t>
+              <a:t>Paiement Mobile Money</a:t>
             </a:r>
             <a:endParaRPr lang="en-US" sz="2600" dirty="0"/>
           </a:p>
@@ -9209,7 +9414,46 @@
         <p:spPr>
           <a:xfrm>
             <a:off x="457200" y="1051560"/>
-            <a:ext cx="11277295" cy="5257800"/>
+            <a:ext cx="11277295" cy="457200"/>
+          </a:xfrm>
+          <a:prstGeom prst="rect">
+            <a:avLst/>
+          </a:prstGeom>
+          <a:noFill/>
+          <a:ln/>
+        </p:spPr>
+        <p:txBody>
+          <a:bodyPr wrap="square" rtlCol="0" anchor="ctr"/>
+          <a:lstStyle/>
+          <a:p>
+            <a:pPr indent="0" marL="0">
+              <a:buNone/>
+            </a:pPr>
+            <a:r>
+              <a:rPr lang="en-US" sz="1500" i="1" dirty="0">
+                <a:solidFill>
+                  <a:srgbClr val="6B6B6B"/>
+                </a:solidFill>
+                <a:latin typeface="Calibri" pitchFamily="34" charset="0"/>
+                <a:ea typeface="Calibri" pitchFamily="34" charset="-122"/>
+                <a:cs typeface="Calibri" pitchFamily="34" charset="-120"/>
+              </a:rPr>
+              <a:t>Finances → Factures — bouton « Mobile Money »</a:t>
+            </a:r>
+            <a:endParaRPr lang="en-US" sz="1500" dirty="0"/>
+          </a:p>
+        </p:txBody>
+      </p:sp>
+      <p:sp>
+        <p:nvSpPr>
+          <p:cNvPr id="5" name="Text 3"/>
+          <p:cNvSpPr/>
+          <p:nvPr/>
+        </p:nvSpPr>
+        <p:spPr>
+          <a:xfrm>
+            <a:off x="457200" y="1600200"/>
+            <a:ext cx="11277295" cy="4709160"/>
           </a:xfrm>
           <a:prstGeom prst="rect">
             <a:avLst/>
@@ -9237,7 +9481,7 @@
                 <a:ea typeface="Calibri" pitchFamily="34" charset="-122"/>
                 <a:cs typeface="Calibri" pitchFamily="34" charset="-120"/>
               </a:rPr>
-              <a:t>Chaque paiement enregistré génère un reçu PDF téléchargeable ou imprimable (« Voir le reçu du dernier paiement »).</a:t>
+              <a:t>Initier une transaction : choisissez l'opérateur (Orange Money, MTN Mobile Money...), le montant, le numéro du payeur.</a:t>
             </a:r>
             <a:endParaRPr lang="en-US" sz="1500" dirty="0"/>
           </a:p>
@@ -9258,7 +9502,7 @@
                 <a:ea typeface="Calibri" pitchFamily="34" charset="-122"/>
                 <a:cs typeface="Calibri" pitchFamily="34" charset="-120"/>
               </a:rPr>
-              <a:t>Chaque facture peut être visualisée et téléchargée en PDF (bouton « œil » sur la ligne de la facture) : détail des lignes, montant total, montant payé, solde restant.</a:t>
+              <a:t>La transaction est d'abord « en attente », puis confirmée ou marquée en échec selon la réponse effective de l'opérateur.</a:t>
             </a:r>
             <a:endParaRPr lang="en-US" sz="1500" dirty="0"/>
           </a:p>
@@ -9279,7 +9523,7 @@
                 <a:ea typeface="Calibri" pitchFamily="34" charset="-122"/>
                 <a:cs typeface="Calibri" pitchFamily="34" charset="-120"/>
               </a:rPr>
-              <a:t>Ces documents sont conçus pour être remis directement aux parents comme justificatif de paiement.</a:t>
+              <a:t>Une fois confirmée, le paiement est automatiquement rattaché à la facture et le solde de l'élève est mis à jour comme pour tout autre mode de paiement.</a:t>
             </a:r>
             <a:endParaRPr lang="en-US" sz="1500" dirty="0"/>
           </a:p>
@@ -9287,7 +9531,7 @@
       </p:sp>
       <p:sp>
         <p:nvSpPr>
-          <p:cNvPr id="5" name="Shape 3"/>
+          <p:cNvPr id="6" name="Shape 4"/>
           <p:cNvSpPr/>
           <p:nvPr/>
         </p:nvSpPr>
@@ -9307,7 +9551,7 @@
       </p:sp>
       <p:sp>
         <p:nvSpPr>
-          <p:cNvPr id="6" name="Text 4"/>
+          <p:cNvPr id="7" name="Text 5"/>
           <p:cNvSpPr/>
           <p:nvPr/>
         </p:nvSpPr>
@@ -9346,7 +9590,7 @@
       </p:sp>
       <p:sp>
         <p:nvSpPr>
-          <p:cNvPr id="7" name="Text 5"/>
+          <p:cNvPr id="8" name="Text 6"/>
           <p:cNvSpPr/>
           <p:nvPr/>
         </p:nvSpPr>
@@ -9461,7 +9705,7 @@
                 <a:ea typeface="Calibri" pitchFamily="34" charset="-122"/>
                 <a:cs typeface="Calibri" pitchFamily="34" charset="-120"/>
               </a:rPr>
-              <a:t>Personnel</a:t>
+              <a:t>Reçus et factures PDF</a:t>
             </a:r>
             <a:endParaRPr lang="en-US" sz="2600" dirty="0"/>
           </a:p>
@@ -9476,99 +9720,7 @@
         <p:spPr>
           <a:xfrm>
             <a:off x="457200" y="1051560"/>
-            <a:ext cx="11277295" cy="457200"/>
-          </a:xfrm>
-          <a:prstGeom prst="rect">
-            <a:avLst/>
-          </a:prstGeom>
-          <a:noFill/>
-          <a:ln/>
-        </p:spPr>
-        <p:txBody>
-          <a:bodyPr wrap="square" rtlCol="0" anchor="ctr"/>
-          <a:lstStyle/>
-          <a:p>
-            <a:pPr indent="0" marL="0">
-              <a:buNone/>
-            </a:pPr>
-            <a:r>
-              <a:rPr lang="en-US" sz="1500" i="1" dirty="0">
-                <a:solidFill>
-                  <a:srgbClr val="6B6B6B"/>
-                </a:solidFill>
-                <a:latin typeface="Calibri" pitchFamily="34" charset="0"/>
-                <a:ea typeface="Calibri" pitchFamily="34" charset="-122"/>
-                <a:cs typeface="Calibri" pitchFamily="34" charset="-120"/>
-              </a:rPr>
-              <a:t>Établissement → Personnel</a:t>
-            </a:r>
-            <a:endParaRPr lang="en-US" sz="1500" dirty="0"/>
-          </a:p>
-        </p:txBody>
-      </p:sp>
-      <p:sp>
-        <p:nvSpPr>
-          <p:cNvPr id="5" name="Text 3"/>
-          <p:cNvSpPr/>
-          <p:nvPr/>
-        </p:nvSpPr>
-        <p:spPr>
-          <a:xfrm>
-            <a:off x="457200" y="1600200"/>
-            <a:ext cx="11277295" cy="365760"/>
-          </a:xfrm>
-          <a:prstGeom prst="rect">
-            <a:avLst/>
-          </a:prstGeom>
-          <a:noFill/>
-          <a:ln/>
-        </p:spPr>
-        <p:txBody>
-          <a:bodyPr wrap="square" rtlCol="0" anchor="ctr"/>
-          <a:lstStyle/>
-          <a:p>
-            <a:pPr indent="0" marL="0">
-              <a:buNone/>
-            </a:pPr>
-            <a:r>
-              <a:rPr lang="en-US" sz="1300" b="1" dirty="0">
-                <a:solidFill>
-                  <a:srgbClr val="0A7C63"/>
-                </a:solidFill>
-                <a:latin typeface="Calibri" pitchFamily="34" charset="0"/>
-                <a:ea typeface="Calibri" pitchFamily="34" charset="-122"/>
-                <a:cs typeface="Calibri" pitchFamily="34" charset="-120"/>
-              </a:rPr>
-              <a:t>Accès : </a:t>
-            </a:r>
-            <a:pPr indent="0" marL="0">
-              <a:buNone/>
-            </a:pPr>
-            <a:r>
-              <a:rPr lang="en-US" sz="1300" dirty="0">
-                <a:solidFill>
-                  <a:srgbClr val="444444"/>
-                </a:solidFill>
-                <a:latin typeface="Calibri" pitchFamily="34" charset="0"/>
-                <a:ea typeface="Calibri" pitchFamily="34" charset="-122"/>
-                <a:cs typeface="Calibri" pitchFamily="34" charset="-120"/>
-              </a:rPr>
-              <a:t>Fondateur, Chef d'établissement</a:t>
-            </a:r>
-            <a:endParaRPr lang="en-US" sz="1300" dirty="0"/>
-          </a:p>
-        </p:txBody>
-      </p:sp>
-      <p:sp>
-        <p:nvSpPr>
-          <p:cNvPr id="6" name="Text 4"/>
-          <p:cNvSpPr/>
-          <p:nvPr/>
-        </p:nvSpPr>
-        <p:spPr>
-          <a:xfrm>
-            <a:off x="457200" y="2103120"/>
-            <a:ext cx="11277295" cy="4206240"/>
+            <a:ext cx="11277295" cy="5257800"/>
           </a:xfrm>
           <a:prstGeom prst="rect">
             <a:avLst/>
@@ -9596,7 +9748,7 @@
                 <a:ea typeface="Calibri" pitchFamily="34" charset="-122"/>
                 <a:cs typeface="Calibri" pitchFamily="34" charset="-120"/>
               </a:rPr>
-              <a:t>Fiche de chaque membre du personnel : identité, matricule, fonction, type (Enseignant ou Administratif), date d'embauche.</a:t>
+              <a:t>Chaque paiement enregistré génère un reçu PDF téléchargeable ou imprimable (« Voir le reçu du dernier paiement »).</a:t>
             </a:r>
             <a:endParaRPr lang="en-US" sz="1500" dirty="0"/>
           </a:p>
@@ -9617,7 +9769,7 @@
                 <a:ea typeface="Calibri" pitchFamily="34" charset="-122"/>
                 <a:cs typeface="Calibri" pitchFamily="34" charset="-120"/>
               </a:rPr>
-              <a:t>Pour un enseignant : les affectations (classe, matière, taux horaire) sont gérées depuis l'Emploi du temps — son salaire de base en découle automatiquement.</a:t>
+              <a:t>Chaque facture peut être visualisée et téléchargée en PDF (bouton « œil » sur la ligne de la facture) : détail des lignes, montant total, montant payé, solde restant.</a:t>
             </a:r>
             <a:endParaRPr lang="en-US" sz="1500" dirty="0"/>
           </a:p>
@@ -9638,36 +9790,15 @@
                 <a:ea typeface="Calibri" pitchFamily="34" charset="-122"/>
                 <a:cs typeface="Calibri" pitchFamily="34" charset="-120"/>
               </a:rPr>
-              <a:t>Pour un profil administratif : un salaire de base fixe est renseigné directement sur sa fiche.</a:t>
+              <a:t>Ces documents sont conçus pour être remis directement aux parents comme justificatif de paiement.</a:t>
             </a:r>
             <a:endParaRPr lang="en-US" sz="1500" dirty="0"/>
           </a:p>
-          <a:p>
-            <a:pPr marL="254000" indent="-254000">
-              <a:spcAft>
-                <a:spcPts val="1000"/>
-              </a:spcAft>
-              <a:buSzPct val="100000"/>
-              <a:buChar char="▸"/>
-            </a:pPr>
-            <a:r>
-              <a:rPr lang="en-US" sz="1500" dirty="0">
-                <a:solidFill>
-                  <a:srgbClr val="444444"/>
-                </a:solidFill>
-                <a:latin typeface="Calibri" pitchFamily="34" charset="0"/>
-                <a:ea typeface="Calibri" pitchFamily="34" charset="-122"/>
-                <a:cs typeface="Calibri" pitchFamily="34" charset="-120"/>
-              </a:rPr>
-              <a:t>Recherche rapide par nom ou fonction sur la liste du personnel.</a:t>
-            </a:r>
-            <a:endParaRPr lang="en-US" sz="1500" dirty="0"/>
-          </a:p>
-        </p:txBody>
-      </p:sp>
-      <p:sp>
-        <p:nvSpPr>
-          <p:cNvPr id="7" name="Shape 5"/>
+        </p:txBody>
+      </p:sp>
+      <p:sp>
+        <p:nvSpPr>
+          <p:cNvPr id="5" name="Shape 3"/>
           <p:cNvSpPr/>
           <p:nvPr/>
         </p:nvSpPr>
@@ -9687,7 +9818,7 @@
       </p:sp>
       <p:sp>
         <p:nvSpPr>
-          <p:cNvPr id="8" name="Text 6"/>
+          <p:cNvPr id="6" name="Text 4"/>
           <p:cNvSpPr/>
           <p:nvPr/>
         </p:nvSpPr>
@@ -9726,7 +9857,7 @@
       </p:sp>
       <p:sp>
         <p:nvSpPr>
-          <p:cNvPr id="9" name="Text 7"/>
+          <p:cNvPr id="7" name="Text 5"/>
           <p:cNvSpPr/>
           <p:nvPr/>
         </p:nvSpPr>
@@ -9841,7 +9972,7 @@
                 <a:ea typeface="Calibri" pitchFamily="34" charset="-122"/>
                 <a:cs typeface="Calibri" pitchFamily="34" charset="-120"/>
               </a:rPr>
-              <a:t>Paie du personnel</a:t>
+              <a:t>Personnel</a:t>
             </a:r>
             <a:endParaRPr lang="en-US" sz="2600" dirty="0"/>
           </a:p>
@@ -9880,7 +10011,7 @@
                 <a:ea typeface="Calibri" pitchFamily="34" charset="-122"/>
                 <a:cs typeface="Calibri" pitchFamily="34" charset="-120"/>
               </a:rPr>
-              <a:t>Finances → Paie</a:t>
+              <a:t>Établissement → Personnel</a:t>
             </a:r>
             <a:endParaRPr lang="en-US" sz="1500" dirty="0"/>
           </a:p>
@@ -9933,7 +10064,7 @@
                 <a:ea typeface="Calibri" pitchFamily="34" charset="-122"/>
                 <a:cs typeface="Calibri" pitchFamily="34" charset="-120"/>
               </a:rPr>
-              <a:t>Fondateur, Chef d'établissement, Comptable</a:t>
+              <a:t>Fondateur, Chef d'établissement</a:t>
             </a:r>
             <a:endParaRPr lang="en-US" sz="1300" dirty="0"/>
           </a:p>
@@ -9976,7 +10107,7 @@
                 <a:ea typeface="Calibri" pitchFamily="34" charset="-122"/>
                 <a:cs typeface="Calibri" pitchFamily="34" charset="-120"/>
               </a:rPr>
-              <a:t>Un bulletin par employé et par mois : le salaire de base est calculé automatiquement (heures réellement dispensées × taux horaire pour un enseignant, montant fixe pour un administratif).</a:t>
+              <a:t>Fiche de chaque membre du personnel : identité, matricule, fonction, type (Enseignant ou Administratif), date d'embauche.</a:t>
             </a:r>
             <a:endParaRPr lang="en-US" sz="1500" dirty="0"/>
           </a:p>
@@ -9997,7 +10128,7 @@
                 <a:ea typeface="Calibri" pitchFamily="34" charset="-122"/>
                 <a:cs typeface="Calibri" pitchFamily="34" charset="-120"/>
               </a:rPr>
-              <a:t>Pour un enseignant : les heures de chaque classe sont pré-remplies depuis l'emploi du temps, ajustables au cas par cas (maladie, absence...) via un total global réparti automatiquement.</a:t>
+              <a:t>Pour un enseignant : les affectations (classe, matière, taux horaire) sont gérées depuis l'Emploi du temps — son salaire de base en découle automatiquement.</a:t>
             </a:r>
             <a:endParaRPr lang="en-US" sz="1500" dirty="0"/>
           </a:p>
@@ -10018,7 +10149,7 @@
                 <a:ea typeface="Calibri" pitchFamily="34" charset="-122"/>
                 <a:cs typeface="Calibri" pitchFamily="34" charset="-120"/>
               </a:rPr>
-              <a:t>Lignes additionnelles libres : primes, indemnités, retenues (écolage du personnel, cotisation sociale, avance sur salaire...).</a:t>
+              <a:t>Pour un profil administratif : un salaire de base fixe est renseigné directement sur sa fiche.</a:t>
             </a:r>
             <a:endParaRPr lang="en-US" sz="1500" dirty="0"/>
           </a:p>
@@ -10039,28 +10170,7 @@
                 <a:ea typeface="Calibri" pitchFamily="34" charset="-122"/>
                 <a:cs typeface="Calibri" pitchFamily="34" charset="-120"/>
               </a:rPr>
-              <a:t>Statuts : Brouillon → Validé → Payé. Seuls les bulletins validés comptent dans la masse salariale du module Finance.</a:t>
-            </a:r>
-            <a:endParaRPr lang="en-US" sz="1500" dirty="0"/>
-          </a:p>
-          <a:p>
-            <a:pPr marL="254000" indent="-254000">
-              <a:spcAft>
-                <a:spcPts val="1000"/>
-              </a:spcAft>
-              <a:buSzPct val="100000"/>
-              <a:buChar char="▸"/>
-            </a:pPr>
-            <a:r>
-              <a:rPr lang="en-US" sz="1500" dirty="0">
-                <a:solidFill>
-                  <a:srgbClr val="444444"/>
-                </a:solidFill>
-                <a:latin typeface="Calibri" pitchFamily="34" charset="0"/>
-                <a:ea typeface="Calibri" pitchFamily="34" charset="-122"/>
-                <a:cs typeface="Calibri" pitchFamily="34" charset="-120"/>
-              </a:rPr>
-              <a:t>Le bulletin PDF est téléchargeable individuellement ; le « cahier de paie » (Excel) regroupe tous les bulletins du mois ; import Excel en masse également disponible.</a:t>
+              <a:t>Recherche rapide par nom ou fonction sur la liste du personnel.</a:t>
             </a:r>
             <a:endParaRPr lang="en-US" sz="1500" dirty="0"/>
           </a:p>
@@ -10242,7 +10352,7 @@
                 <a:ea typeface="Calibri" pitchFamily="34" charset="-122"/>
                 <a:cs typeface="Calibri" pitchFamily="34" charset="-120"/>
               </a:rPr>
-              <a:t>Bilan financier</a:t>
+              <a:t>Paie du personnel</a:t>
             </a:r>
             <a:endParaRPr lang="en-US" sz="2600" dirty="0"/>
           </a:p>
@@ -10281,7 +10391,7 @@
                 <a:ea typeface="Calibri" pitchFamily="34" charset="-122"/>
                 <a:cs typeface="Calibri" pitchFamily="34" charset="-120"/>
               </a:rPr>
-              <a:t>Finances → Bilan financier</a:t>
+              <a:t>Finances → Paie</a:t>
             </a:r>
             <a:endParaRPr lang="en-US" sz="1500" dirty="0"/>
           </a:p>
@@ -10377,7 +10487,7 @@
                 <a:ea typeface="Calibri" pitchFamily="34" charset="-122"/>
                 <a:cs typeface="Calibri" pitchFamily="34" charset="-120"/>
               </a:rPr>
-              <a:t>Vue consolidée : écolage facturé/encaissé, frais d'inscription, masse salariale, solde net, taux de recouvrement.</a:t>
+              <a:t>Un bulletin par employé et par mois : le salaire de base est calculé automatiquement (heures réellement dispensées × taux horaire pour un enseignant, montant fixe pour un administratif).</a:t>
             </a:r>
             <a:endParaRPr lang="en-US" sz="1500" dirty="0"/>
           </a:p>
@@ -10398,7 +10508,7 @@
                 <a:ea typeface="Calibri" pitchFamily="34" charset="-122"/>
                 <a:cs typeface="Calibri" pitchFamily="34" charset="-120"/>
               </a:rPr>
-              <a:t>Compte de résultat mensuel : recettes totales (écolage + inscription + autres recettes), dépenses totales (salaires + autres dépenses), résultat net.</a:t>
+              <a:t>Pour un enseignant : les heures de chaque classe sont pré-remplies depuis l'emploi du temps, ajustables au cas par cas (maladie, absence...) via un total global réparti automatiquement.</a:t>
             </a:r>
             <a:endParaRPr lang="en-US" sz="1500" dirty="0"/>
           </a:p>
@@ -10419,7 +10529,7 @@
                 <a:ea typeface="Calibri" pitchFamily="34" charset="-122"/>
                 <a:cs typeface="Calibri" pitchFamily="34" charset="-120"/>
               </a:rPr>
-              <a:t>Enregistrement libre de mouvements financiers hors écolage/salaires : dépenses (loyer, fournitures, maintenance...) et autres recettes (cantine, transport, dons...).</a:t>
+              <a:t>Lignes additionnelles libres : primes, indemnités, retenues (écolage du personnel, cotisation sociale, avance sur salaire...).</a:t>
             </a:r>
             <a:endParaRPr lang="en-US" sz="1500" dirty="0"/>
           </a:p>
@@ -10440,7 +10550,7 @@
                 <a:ea typeface="Calibri" pitchFamily="34" charset="-122"/>
                 <a:cs typeface="Calibri" pitchFamily="34" charset="-120"/>
               </a:rPr>
-              <a:t>Recouvrement par classe : identifie rapidement les classes en retard de paiement.</a:t>
+              <a:t>Statuts : Brouillon → Validé → Payé. Seuls les bulletins validés comptent dans la masse salariale du module Finance.</a:t>
             </a:r>
             <a:endParaRPr lang="en-US" sz="1500" dirty="0"/>
           </a:p>
@@ -10461,28 +10571,7 @@
                 <a:ea typeface="Calibri" pitchFamily="34" charset="-122"/>
                 <a:cs typeface="Calibri" pitchFamily="34" charset="-120"/>
               </a:rPr>
-              <a:t>Bouton « Régénérer les factures manquantes » : vérifie que chaque élève inscrit a bien toutes ses factures et complète les manquantes.</a:t>
-            </a:r>
-            <a:endParaRPr lang="en-US" sz="1500" dirty="0"/>
-          </a:p>
-          <a:p>
-            <a:pPr marL="254000" indent="-254000">
-              <a:spcAft>
-                <a:spcPts val="1000"/>
-              </a:spcAft>
-              <a:buSzPct val="100000"/>
-              <a:buChar char="▸"/>
-            </a:pPr>
-            <a:r>
-              <a:rPr lang="en-US" sz="1500" dirty="0">
-                <a:solidFill>
-                  <a:srgbClr val="444444"/>
-                </a:solidFill>
-                <a:latin typeface="Calibri" pitchFamily="34" charset="0"/>
-                <a:ea typeface="Calibri" pitchFamily="34" charset="-122"/>
-                <a:cs typeface="Calibri" pitchFamily="34" charset="-120"/>
-              </a:rPr>
-              <a:t>Export Excel complet du bilan financier de l'année.</a:t>
+              <a:t>Le bulletin PDF est téléchargeable individuellement ; le « cahier de paie » (Excel) regroupe tous les bulletins du mois ; import Excel en masse également disponible.</a:t>
             </a:r>
             <a:endParaRPr lang="en-US" sz="1500" dirty="0"/>
           </a:p>
@@ -10664,7 +10753,7 @@
                 <a:ea typeface="Calibri" pitchFamily="34" charset="-122"/>
                 <a:cs typeface="Calibri" pitchFamily="34" charset="-120"/>
               </a:rPr>
-              <a:t>Logistique</a:t>
+              <a:t>Bilan financier</a:t>
             </a:r>
             <a:endParaRPr lang="en-US" sz="2600" dirty="0"/>
           </a:p>
@@ -10703,7 +10792,7 @@
                 <a:ea typeface="Calibri" pitchFamily="34" charset="-122"/>
                 <a:cs typeface="Calibri" pitchFamily="34" charset="-120"/>
               </a:rPr>
-              <a:t>Établissement → Logistique</a:t>
+              <a:t>Finances → Bilan financier</a:t>
             </a:r>
             <a:endParaRPr lang="en-US" sz="1500" dirty="0"/>
           </a:p>
@@ -10756,7 +10845,7 @@
                 <a:ea typeface="Calibri" pitchFamily="34" charset="-122"/>
                 <a:cs typeface="Calibri" pitchFamily="34" charset="-120"/>
               </a:rPr>
-              <a:t>Fondateur, Chef d'établissement</a:t>
+              <a:t>Fondateur, Chef d'établissement, Comptable</a:t>
             </a:r>
             <a:endParaRPr lang="en-US" sz="1300" dirty="0"/>
           </a:p>
@@ -10799,7 +10888,7 @@
                 <a:ea typeface="Calibri" pitchFamily="34" charset="-122"/>
                 <a:cs typeface="Calibri" pitchFamily="34" charset="-120"/>
               </a:rPr>
-              <a:t>Inventaire du matériel de l'école : catégorie (Mobilier, Informatique, Pédagogique, Autre), désignation, quantité, état, salle de localisation.</a:t>
+              <a:t>Vue consolidée : écolage facturé/encaissé, frais d'inscription, masse salariale, solde net, taux de recouvrement.</a:t>
             </a:r>
             <a:endParaRPr lang="en-US" sz="1500" dirty="0"/>
           </a:p>
@@ -10820,7 +10909,7 @@
                 <a:ea typeface="Calibri" pitchFamily="34" charset="-122"/>
                 <a:cs typeface="Calibri" pitchFamily="34" charset="-120"/>
               </a:rPr>
-              <a:t>États suivis : Bon, Moyen, À réparer, Hors service — un indicateur signale le nombre d'articles à surveiller.</a:t>
+              <a:t>Compte de résultat mensuel : recettes totales (écolage + inscription + autres recettes), dépenses totales (salaires + autres dépenses), résultat net.</a:t>
             </a:r>
             <a:endParaRPr lang="en-US" sz="1500" dirty="0"/>
           </a:p>
@@ -10841,7 +10930,7 @@
                 <a:ea typeface="Calibri" pitchFamily="34" charset="-122"/>
                 <a:cs typeface="Calibri" pitchFamily="34" charset="-120"/>
               </a:rPr>
-              <a:t>Filtrage par catégorie ou par état pour cibler rapidement un inventaire (ex. tout le matériel « à réparer »).</a:t>
+              <a:t>Enregistrement libre de mouvements financiers hors écolage/salaires : dépenses (loyer, fournitures, maintenance...) et autres recettes (cantine, transport, dons...).</a:t>
             </a:r>
             <a:endParaRPr lang="en-US" sz="1500" dirty="0"/>
           </a:p>
@@ -10862,7 +10951,49 @@
                 <a:ea typeface="Calibri" pitchFamily="34" charset="-122"/>
                 <a:cs typeface="Calibri" pitchFamily="34" charset="-120"/>
               </a:rPr>
-              <a:t>Export Excel de l'inventaire complet.</a:t>
+              <a:t>Recouvrement par classe : identifie rapidement les classes en retard de paiement.</a:t>
+            </a:r>
+            <a:endParaRPr lang="en-US" sz="1500" dirty="0"/>
+          </a:p>
+          <a:p>
+            <a:pPr marL="254000" indent="-254000">
+              <a:spcAft>
+                <a:spcPts val="1000"/>
+              </a:spcAft>
+              <a:buSzPct val="100000"/>
+              <a:buChar char="▸"/>
+            </a:pPr>
+            <a:r>
+              <a:rPr lang="en-US" sz="1500" dirty="0">
+                <a:solidFill>
+                  <a:srgbClr val="444444"/>
+                </a:solidFill>
+                <a:latin typeface="Calibri" pitchFamily="34" charset="0"/>
+                <a:ea typeface="Calibri" pitchFamily="34" charset="-122"/>
+                <a:cs typeface="Calibri" pitchFamily="34" charset="-120"/>
+              </a:rPr>
+              <a:t>Bouton « Régénérer les factures manquantes » : vérifie que chaque élève inscrit a bien toutes ses factures et complète les manquantes.</a:t>
+            </a:r>
+            <a:endParaRPr lang="en-US" sz="1500" dirty="0"/>
+          </a:p>
+          <a:p>
+            <a:pPr marL="254000" indent="-254000">
+              <a:spcAft>
+                <a:spcPts val="1000"/>
+              </a:spcAft>
+              <a:buSzPct val="100000"/>
+              <a:buChar char="▸"/>
+            </a:pPr>
+            <a:r>
+              <a:rPr lang="en-US" sz="1500" dirty="0">
+                <a:solidFill>
+                  <a:srgbClr val="444444"/>
+                </a:solidFill>
+                <a:latin typeface="Calibri" pitchFamily="34" charset="0"/>
+                <a:ea typeface="Calibri" pitchFamily="34" charset="-122"/>
+                <a:cs typeface="Calibri" pitchFamily="34" charset="-120"/>
+              </a:rPr>
+              <a:t>Export Excel complet du bilan financier de l'année.</a:t>
             </a:r>
             <a:endParaRPr lang="en-US" sz="1500" dirty="0"/>
           </a:p>
@@ -11044,7 +11175,7 @@
                 <a:ea typeface="Calibri" pitchFamily="34" charset="-122"/>
                 <a:cs typeface="Calibri" pitchFamily="34" charset="-120"/>
               </a:rPr>
-              <a:t>Bibliothèque</a:t>
+              <a:t>Logistique</a:t>
             </a:r>
             <a:endParaRPr lang="en-US" sz="2600" dirty="0"/>
           </a:p>
@@ -11083,7 +11214,7 @@
                 <a:ea typeface="Calibri" pitchFamily="34" charset="-122"/>
                 <a:cs typeface="Calibri" pitchFamily="34" charset="-120"/>
               </a:rPr>
-              <a:t>Établissement → Bibliothèque</a:t>
+              <a:t>Établissement → Logistique</a:t>
             </a:r>
             <a:endParaRPr lang="en-US" sz="1500" dirty="0"/>
           </a:p>
@@ -11136,7 +11267,7 @@
                 <a:ea typeface="Calibri" pitchFamily="34" charset="-122"/>
                 <a:cs typeface="Calibri" pitchFamily="34" charset="-120"/>
               </a:rPr>
-              <a:t>Fondateur, Chef d'établissement, Secrétaire</a:t>
+              <a:t>Fondateur, Chef d'établissement</a:t>
             </a:r>
             <a:endParaRPr lang="en-US" sz="1300" dirty="0"/>
           </a:p>
@@ -11179,7 +11310,7 @@
                 <a:ea typeface="Calibri" pitchFamily="34" charset="-122"/>
                 <a:cs typeface="Calibri" pitchFamily="34" charset="-120"/>
               </a:rPr>
-              <a:t>Catalogue des livres : titre, auteur, catégorie, ISBN, nombre d'exemplaires (total / disponibles).</a:t>
+              <a:t>Inventaire du matériel de l'école : catégorie (Mobilier, Informatique, Pédagogique, Autre), désignation, quantité, état, salle de localisation.</a:t>
             </a:r>
             <a:endParaRPr lang="en-US" sz="1500" dirty="0"/>
           </a:p>
@@ -11200,7 +11331,7 @@
                 <a:ea typeface="Calibri" pitchFamily="34" charset="-122"/>
                 <a:cs typeface="Calibri" pitchFamily="34" charset="-120"/>
               </a:rPr>
-              <a:t>Enregistrer un emprunt : choisissez un livre disponible et un élève — une date de retour prévue est proposée (14 jours par défaut).</a:t>
+              <a:t>États suivis : Bon, Moyen, À réparer, Hors service — un indicateur signale le nombre d'articles à surveiller.</a:t>
             </a:r>
             <a:endParaRPr lang="en-US" sz="1500" dirty="0"/>
           </a:p>
@@ -11221,7 +11352,7 @@
                 <a:ea typeface="Calibri" pitchFamily="34" charset="-122"/>
                 <a:cs typeface="Calibri" pitchFamily="34" charset="-120"/>
               </a:rPr>
-              <a:t>Suivi des emprunts : en cours, en retard (signalé automatiquement), retournés.</a:t>
+              <a:t>Filtrage par catégorie ou par état pour cibler rapidement un inventaire (ex. tout le matériel « à réparer »).</a:t>
             </a:r>
             <a:endParaRPr lang="en-US" sz="1500" dirty="0"/>
           </a:p>
@@ -11242,7 +11373,7 @@
                 <a:ea typeface="Calibri" pitchFamily="34" charset="-122"/>
                 <a:cs typeface="Calibri" pitchFamily="34" charset="-120"/>
               </a:rPr>
-              <a:t>Marquer un retour libère immédiatement un exemplaire pour un nouvel emprunt.</a:t>
+              <a:t>Export Excel de l'inventaire complet.</a:t>
             </a:r>
             <a:endParaRPr lang="en-US" sz="1500" dirty="0"/>
           </a:p>
@@ -11424,7 +11555,7 @@
                 <a:ea typeface="Calibri" pitchFamily="34" charset="-122"/>
                 <a:cs typeface="Calibri" pitchFamily="34" charset="-120"/>
               </a:rPr>
-              <a:t>Exports disponibles</a:t>
+              <a:t>Bibliothèque</a:t>
             </a:r>
             <a:endParaRPr lang="en-US" sz="2600" dirty="0"/>
           </a:p>
@@ -11439,7 +11570,99 @@
         <p:spPr>
           <a:xfrm>
             <a:off x="457200" y="1051560"/>
-            <a:ext cx="11277295" cy="5257800"/>
+            <a:ext cx="11277295" cy="457200"/>
+          </a:xfrm>
+          <a:prstGeom prst="rect">
+            <a:avLst/>
+          </a:prstGeom>
+          <a:noFill/>
+          <a:ln/>
+        </p:spPr>
+        <p:txBody>
+          <a:bodyPr wrap="square" rtlCol="0" anchor="ctr"/>
+          <a:lstStyle/>
+          <a:p>
+            <a:pPr indent="0" marL="0">
+              <a:buNone/>
+            </a:pPr>
+            <a:r>
+              <a:rPr lang="en-US" sz="1500" i="1" dirty="0">
+                <a:solidFill>
+                  <a:srgbClr val="6B6B6B"/>
+                </a:solidFill>
+                <a:latin typeface="Calibri" pitchFamily="34" charset="0"/>
+                <a:ea typeface="Calibri" pitchFamily="34" charset="-122"/>
+                <a:cs typeface="Calibri" pitchFamily="34" charset="-120"/>
+              </a:rPr>
+              <a:t>Établissement → Bibliothèque</a:t>
+            </a:r>
+            <a:endParaRPr lang="en-US" sz="1500" dirty="0"/>
+          </a:p>
+        </p:txBody>
+      </p:sp>
+      <p:sp>
+        <p:nvSpPr>
+          <p:cNvPr id="5" name="Text 3"/>
+          <p:cNvSpPr/>
+          <p:nvPr/>
+        </p:nvSpPr>
+        <p:spPr>
+          <a:xfrm>
+            <a:off x="457200" y="1600200"/>
+            <a:ext cx="11277295" cy="365760"/>
+          </a:xfrm>
+          <a:prstGeom prst="rect">
+            <a:avLst/>
+          </a:prstGeom>
+          <a:noFill/>
+          <a:ln/>
+        </p:spPr>
+        <p:txBody>
+          <a:bodyPr wrap="square" rtlCol="0" anchor="ctr"/>
+          <a:lstStyle/>
+          <a:p>
+            <a:pPr indent="0" marL="0">
+              <a:buNone/>
+            </a:pPr>
+            <a:r>
+              <a:rPr lang="en-US" sz="1300" b="1" dirty="0">
+                <a:solidFill>
+                  <a:srgbClr val="0A7C63"/>
+                </a:solidFill>
+                <a:latin typeface="Calibri" pitchFamily="34" charset="0"/>
+                <a:ea typeface="Calibri" pitchFamily="34" charset="-122"/>
+                <a:cs typeface="Calibri" pitchFamily="34" charset="-120"/>
+              </a:rPr>
+              <a:t>Accès : </a:t>
+            </a:r>
+            <a:pPr indent="0" marL="0">
+              <a:buNone/>
+            </a:pPr>
+            <a:r>
+              <a:rPr lang="en-US" sz="1300" dirty="0">
+                <a:solidFill>
+                  <a:srgbClr val="444444"/>
+                </a:solidFill>
+                <a:latin typeface="Calibri" pitchFamily="34" charset="0"/>
+                <a:ea typeface="Calibri" pitchFamily="34" charset="-122"/>
+                <a:cs typeface="Calibri" pitchFamily="34" charset="-120"/>
+              </a:rPr>
+              <a:t>Fondateur, Chef d'établissement, Secrétaire</a:t>
+            </a:r>
+            <a:endParaRPr lang="en-US" sz="1300" dirty="0"/>
+          </a:p>
+        </p:txBody>
+      </p:sp>
+      <p:sp>
+        <p:nvSpPr>
+          <p:cNvPr id="6" name="Text 4"/>
+          <p:cNvSpPr/>
+          <p:nvPr/>
+        </p:nvSpPr>
+        <p:spPr>
+          <a:xfrm>
+            <a:off x="457200" y="2103120"/>
+            <a:ext cx="11277295" cy="4206240"/>
           </a:xfrm>
           <a:prstGeom prst="rect">
             <a:avLst/>
@@ -11467,7 +11690,7 @@
                 <a:ea typeface="Calibri" pitchFamily="34" charset="-122"/>
                 <a:cs typeface="Calibri" pitchFamily="34" charset="-120"/>
               </a:rPr>
-              <a:t>La plupart des modules proposent un export Excel ou PDF, reconnaissable au bouton avec une icône de téléchargement.</a:t>
+              <a:t>Catalogue des livres : titre, auteur, catégorie, ISBN, nombre d'exemplaires (total / disponibles).</a:t>
             </a:r>
             <a:endParaRPr lang="en-US" sz="1500" dirty="0"/>
           </a:p>
@@ -11480,7 +11703,7 @@
               <a:buChar char="▸"/>
             </a:pPr>
             <a:r>
-              <a:rPr lang="en-US" sz="1500" b="1" dirty="0">
+              <a:rPr lang="en-US" sz="1500" dirty="0">
                 <a:solidFill>
                   <a:srgbClr val="444444"/>
                 </a:solidFill>
@@ -11488,183 +11711,57 @@
                 <a:ea typeface="Calibri" pitchFamily="34" charset="-122"/>
                 <a:cs typeface="Calibri" pitchFamily="34" charset="-120"/>
               </a:rPr>
-              <a:t>Récapitulatif :</a:t>
+              <a:t>Enregistrer un emprunt : choisissez un livre disponible et un élève — une date de retour prévue est proposée (14 jours par défaut).</a:t>
             </a:r>
             <a:endParaRPr lang="en-US" sz="1500" dirty="0"/>
           </a:p>
           <a:p>
-            <a:pPr marL="406400" indent="-406400">
+            <a:pPr marL="254000" indent="-254000">
               <a:spcAft>
-                <a:spcPts val="600"/>
+                <a:spcPts val="1000"/>
               </a:spcAft>
               <a:buSzPct val="100000"/>
-              <a:buChar char="–"/>
-            </a:pPr>
-            <a:r>
-              <a:rPr lang="en-US" sz="1300" dirty="0">
-                <a:solidFill>
-                  <a:srgbClr val="6B6B6B"/>
-                </a:solidFill>
-                <a:latin typeface="Calibri" pitchFamily="34" charset="0"/>
-                <a:ea typeface="Calibri" pitchFamily="34" charset="-122"/>
-                <a:cs typeface="Calibri" pitchFamily="34" charset="-120"/>
-              </a:rPr>
-              <a:t>Liste des élèves, liste des impayés (Tableau de bord)</a:t>
+              <a:buChar char="▸"/>
+            </a:pPr>
+            <a:r>
+              <a:rPr lang="en-US" sz="1500" dirty="0">
+                <a:solidFill>
+                  <a:srgbClr val="444444"/>
+                </a:solidFill>
+                <a:latin typeface="Calibri" pitchFamily="34" charset="0"/>
+                <a:ea typeface="Calibri" pitchFamily="34" charset="-122"/>
+                <a:cs typeface="Calibri" pitchFamily="34" charset="-120"/>
+              </a:rPr>
+              <a:t>Suivi des emprunts : en cours, en retard (signalé automatiquement), retournés.</a:t>
             </a:r>
             <a:endParaRPr lang="en-US" sz="1500" dirty="0"/>
           </a:p>
           <a:p>
-            <a:pPr marL="406400" indent="-406400">
+            <a:pPr marL="254000" indent="-254000">
               <a:spcAft>
-                <a:spcPts val="600"/>
+                <a:spcPts val="1000"/>
               </a:spcAft>
               <a:buSzPct val="100000"/>
-              <a:buChar char="–"/>
-            </a:pPr>
-            <a:r>
-              <a:rPr lang="en-US" sz="1300" dirty="0">
-                <a:solidFill>
-                  <a:srgbClr val="6B6B6B"/>
-                </a:solidFill>
-                <a:latin typeface="Calibri" pitchFamily="34" charset="0"/>
-                <a:ea typeface="Calibri" pitchFamily="34" charset="-122"/>
-                <a:cs typeface="Calibri" pitchFamily="34" charset="-120"/>
-              </a:rPr>
-              <a:t>Bulletin de notes, notes de la classe (Notes)</a:t>
+              <a:buChar char="▸"/>
+            </a:pPr>
+            <a:r>
+              <a:rPr lang="en-US" sz="1500" dirty="0">
+                <a:solidFill>
+                  <a:srgbClr val="444444"/>
+                </a:solidFill>
+                <a:latin typeface="Calibri" pitchFamily="34" charset="0"/>
+                <a:ea typeface="Calibri" pitchFamily="34" charset="-122"/>
+                <a:cs typeface="Calibri" pitchFamily="34" charset="-120"/>
+              </a:rPr>
+              <a:t>Marquer un retour libère immédiatement un exemplaire pour un nouvel emprunt.</a:t>
             </a:r>
             <a:endParaRPr lang="en-US" sz="1500" dirty="0"/>
           </a:p>
-          <a:p>
-            <a:pPr marL="406400" indent="-406400">
-              <a:spcAft>
-                <a:spcPts val="600"/>
-              </a:spcAft>
-              <a:buSzPct val="100000"/>
-              <a:buChar char="–"/>
-            </a:pPr>
-            <a:r>
-              <a:rPr lang="en-US" sz="1300" dirty="0">
-                <a:solidFill>
-                  <a:srgbClr val="6B6B6B"/>
-                </a:solidFill>
-                <a:latin typeface="Calibri" pitchFamily="34" charset="0"/>
-                <a:ea typeface="Calibri" pitchFamily="34" charset="-122"/>
-                <a:cs typeface="Calibri" pitchFamily="34" charset="-120"/>
-              </a:rPr>
-              <a:t>Appel du jour, emploi du temps classe (Excel + PDF) (Vie scolaire / Emploi du temps)</a:t>
-            </a:r>
-            <a:endParaRPr lang="en-US" sz="1500" dirty="0"/>
-          </a:p>
-          <a:p>
-            <a:pPr marL="406400" indent="-406400">
-              <a:spcAft>
-                <a:spcPts val="600"/>
-              </a:spcAft>
-              <a:buSzPct val="100000"/>
-              <a:buChar char="–"/>
-            </a:pPr>
-            <a:r>
-              <a:rPr lang="en-US" sz="1300" dirty="0">
-                <a:solidFill>
-                  <a:srgbClr val="6B6B6B"/>
-                </a:solidFill>
-                <a:latin typeface="Calibri" pitchFamily="34" charset="0"/>
-                <a:ea typeface="Calibri" pitchFamily="34" charset="-122"/>
-                <a:cs typeface="Calibri" pitchFamily="34" charset="-120"/>
-              </a:rPr>
-              <a:t>Factures, modèle d'import de factures (Finances)</a:t>
-            </a:r>
-            <a:endParaRPr lang="en-US" sz="1500" dirty="0"/>
-          </a:p>
-          <a:p>
-            <a:pPr marL="406400" indent="-406400">
-              <a:spcAft>
-                <a:spcPts val="600"/>
-              </a:spcAft>
-              <a:buSzPct val="100000"/>
-              <a:buChar char="–"/>
-            </a:pPr>
-            <a:r>
-              <a:rPr lang="en-US" sz="1300" dirty="0">
-                <a:solidFill>
-                  <a:srgbClr val="6B6B6B"/>
-                </a:solidFill>
-                <a:latin typeface="Calibri" pitchFamily="34" charset="0"/>
-                <a:ea typeface="Calibri" pitchFamily="34" charset="-122"/>
-                <a:cs typeface="Calibri" pitchFamily="34" charset="-120"/>
-              </a:rPr>
-              <a:t>Bulletin de paie (PDF), cahier de paie, modèle d'import de paie (Paie)</a:t>
-            </a:r>
-            <a:endParaRPr lang="en-US" sz="1500" dirty="0"/>
-          </a:p>
-          <a:p>
-            <a:pPr marL="406400" indent="-406400">
-              <a:spcAft>
-                <a:spcPts val="600"/>
-              </a:spcAft>
-              <a:buSzPct val="100000"/>
-              <a:buChar char="–"/>
-            </a:pPr>
-            <a:r>
-              <a:rPr lang="en-US" sz="1300" dirty="0">
-                <a:solidFill>
-                  <a:srgbClr val="6B6B6B"/>
-                </a:solidFill>
-                <a:latin typeface="Calibri" pitchFamily="34" charset="0"/>
-                <a:ea typeface="Calibri" pitchFamily="34" charset="-122"/>
-                <a:cs typeface="Calibri" pitchFamily="34" charset="-120"/>
-              </a:rPr>
-              <a:t>Bilan financier complet (Finance)</a:t>
-            </a:r>
-            <a:endParaRPr lang="en-US" sz="1500" dirty="0"/>
-          </a:p>
-          <a:p>
-            <a:pPr marL="406400" indent="-406400">
-              <a:spcAft>
-                <a:spcPts val="600"/>
-              </a:spcAft>
-              <a:buSzPct val="100000"/>
-              <a:buChar char="–"/>
-            </a:pPr>
-            <a:r>
-              <a:rPr lang="en-US" sz="1300" dirty="0">
-                <a:solidFill>
-                  <a:srgbClr val="6B6B6B"/>
-                </a:solidFill>
-                <a:latin typeface="Calibri" pitchFamily="34" charset="0"/>
-                <a:ea typeface="Calibri" pitchFamily="34" charset="-122"/>
-                <a:cs typeface="Calibri" pitchFamily="34" charset="-120"/>
-              </a:rPr>
-              <a:t>Inventaire du matériel (Logistique)</a:t>
-            </a:r>
-            <a:endParaRPr lang="en-US" sz="1500" dirty="0"/>
-          </a:p>
-          <a:p>
-            <a:pPr marL="406400" indent="-406400">
-              <a:spcAft>
-                <a:spcPts val="600"/>
-              </a:spcAft>
-              <a:buSzPct val="100000"/>
-              <a:buChar char="–"/>
-            </a:pPr>
-            <a:r>
-              <a:rPr lang="en-US" sz="1300" dirty="0">
-                <a:solidFill>
-                  <a:srgbClr val="6B6B6B"/>
-                </a:solidFill>
-                <a:latin typeface="Calibri" pitchFamily="34" charset="0"/>
-                <a:ea typeface="Calibri" pitchFamily="34" charset="-122"/>
-                <a:cs typeface="Calibri" pitchFamily="34" charset="-120"/>
-              </a:rPr>
-              <a:t>Reçu de paiement, facture (PDF) (Finances)</a:t>
-            </a:r>
-            <a:endParaRPr lang="en-US" sz="1500" dirty="0"/>
-          </a:p>
-        </p:txBody>
-      </p:sp>
-      <p:sp>
-        <p:nvSpPr>
-          <p:cNvPr id="5" name="Shape 3"/>
+        </p:txBody>
+      </p:sp>
+      <p:sp>
+        <p:nvSpPr>
+          <p:cNvPr id="7" name="Shape 5"/>
           <p:cNvSpPr/>
           <p:nvPr/>
         </p:nvSpPr>
@@ -11684,7 +11781,7 @@
       </p:sp>
       <p:sp>
         <p:nvSpPr>
-          <p:cNvPr id="6" name="Text 4"/>
+          <p:cNvPr id="8" name="Text 6"/>
           <p:cNvSpPr/>
           <p:nvPr/>
         </p:nvSpPr>
@@ -11723,7 +11820,7 @@
       </p:sp>
       <p:sp>
         <p:nvSpPr>
-          <p:cNvPr id="7" name="Text 5"/>
+          <p:cNvPr id="9" name="Text 7"/>
           <p:cNvSpPr/>
           <p:nvPr/>
         </p:nvSpPr>
@@ -12210,7 +12307,7 @@
                 <a:ea typeface="Calibri" pitchFamily="34" charset="-122"/>
                 <a:cs typeface="Calibri" pitchFamily="34" charset="-120"/>
               </a:rPr>
-              <a:t>Bonnes pratiques</a:t>
+              <a:t>Exports disponibles</a:t>
             </a:r>
             <a:endParaRPr lang="en-US" sz="2600" dirty="0"/>
           </a:p>
@@ -12253,7 +12350,7 @@
                 <a:ea typeface="Calibri" pitchFamily="34" charset="-122"/>
                 <a:cs typeface="Calibri" pitchFamily="34" charset="-120"/>
               </a:rPr>
-              <a:t>Commencez toujours par configurer Niveaux → Classes → Tarifs avant d'ouvrir les admissions.</a:t>
+              <a:t>La plupart des modules proposent un export Excel ou PDF, reconnaissable au bouton avec une icône de téléchargement.</a:t>
             </a:r>
             <a:endParaRPr lang="en-US" sz="1500" dirty="0"/>
           </a:p>
@@ -12266,7 +12363,7 @@
               <a:buChar char="▸"/>
             </a:pPr>
             <a:r>
-              <a:rPr lang="en-US" sz="1500" dirty="0">
+              <a:rPr lang="en-US" sz="1500" b="1" dirty="0">
                 <a:solidFill>
                   <a:srgbClr val="444444"/>
                 </a:solidFill>
@@ -12274,70 +12371,175 @@
                 <a:ea typeface="Calibri" pitchFamily="34" charset="-122"/>
                 <a:cs typeface="Calibri" pitchFamily="34" charset="-120"/>
               </a:rPr>
-              <a:t>Faites l'appel du jour et la saisie des notes le plus tôt possible : plus la saisie est régulière, plus les indicateurs (absences, moyennes, recouvrement) restent fiables.</a:t>
+              <a:t>Récapitulatif :</a:t>
             </a:r>
             <a:endParaRPr lang="en-US" sz="1500" dirty="0"/>
           </a:p>
           <a:p>
-            <a:pPr marL="254000" indent="-254000">
+            <a:pPr marL="406400" indent="-406400">
               <a:spcAft>
-                <a:spcPts val="1000"/>
+                <a:spcPts val="600"/>
               </a:spcAft>
               <a:buSzPct val="100000"/>
-              <a:buChar char="▸"/>
-            </a:pPr>
-            <a:r>
-              <a:rPr lang="en-US" sz="1500" dirty="0">
-                <a:solidFill>
-                  <a:srgbClr val="444444"/>
-                </a:solidFill>
-                <a:latin typeface="Calibri" pitchFamily="34" charset="0"/>
-                <a:ea typeface="Calibri" pitchFamily="34" charset="-122"/>
-                <a:cs typeface="Calibri" pitchFamily="34" charset="-120"/>
-              </a:rPr>
-              <a:t>Ne partagez jamais votre mot de passe : chaque action est associée à l'utilisateur connecté.</a:t>
+              <a:buChar char="–"/>
+            </a:pPr>
+            <a:r>
+              <a:rPr lang="en-US" sz="1300" dirty="0">
+                <a:solidFill>
+                  <a:srgbClr val="6B6B6B"/>
+                </a:solidFill>
+                <a:latin typeface="Calibri" pitchFamily="34" charset="0"/>
+                <a:ea typeface="Calibri" pitchFamily="34" charset="-122"/>
+                <a:cs typeface="Calibri" pitchFamily="34" charset="-120"/>
+              </a:rPr>
+              <a:t>Liste des élèves, liste des impayés (Tableau de bord)</a:t>
             </a:r>
             <a:endParaRPr lang="en-US" sz="1500" dirty="0"/>
           </a:p>
           <a:p>
-            <a:pPr marL="254000" indent="-254000">
+            <a:pPr marL="406400" indent="-406400">
               <a:spcAft>
-                <a:spcPts val="1000"/>
+                <a:spcPts val="600"/>
               </a:spcAft>
               <a:buSzPct val="100000"/>
-              <a:buChar char="▸"/>
-            </a:pPr>
-            <a:r>
-              <a:rPr lang="en-US" sz="1500" dirty="0">
-                <a:solidFill>
-                  <a:srgbClr val="444444"/>
-                </a:solidFill>
-                <a:latin typeface="Calibri" pitchFamily="34" charset="0"/>
-                <a:ea typeface="Calibri" pitchFamily="34" charset="-122"/>
-                <a:cs typeface="Calibri" pitchFamily="34" charset="-120"/>
-              </a:rPr>
-              <a:t>En cas de doute sur un montant ou une décision (passage de classe, suppression), vérifiez toujours l'aperçu ou la confirmation affichée avant de valider.</a:t>
+              <a:buChar char="–"/>
+            </a:pPr>
+            <a:r>
+              <a:rPr lang="en-US" sz="1300" dirty="0">
+                <a:solidFill>
+                  <a:srgbClr val="6B6B6B"/>
+                </a:solidFill>
+                <a:latin typeface="Calibri" pitchFamily="34" charset="0"/>
+                <a:ea typeface="Calibri" pitchFamily="34" charset="-122"/>
+                <a:cs typeface="Calibri" pitchFamily="34" charset="-120"/>
+              </a:rPr>
+              <a:t>Bulletin de notes, notes de la classe (Notes)</a:t>
             </a:r>
             <a:endParaRPr lang="en-US" sz="1500" dirty="0"/>
           </a:p>
           <a:p>
-            <a:pPr marL="254000" indent="-254000">
+            <a:pPr marL="406400" indent="-406400">
               <a:spcAft>
-                <a:spcPts val="1000"/>
+                <a:spcPts val="600"/>
               </a:spcAft>
               <a:buSzPct val="100000"/>
-              <a:buChar char="▸"/>
-            </a:pPr>
-            <a:r>
-              <a:rPr lang="en-US" sz="1500" dirty="0">
-                <a:solidFill>
-                  <a:srgbClr val="444444"/>
-                </a:solidFill>
-                <a:latin typeface="Calibri" pitchFamily="34" charset="0"/>
-                <a:ea typeface="Calibri" pitchFamily="34" charset="-122"/>
-                <a:cs typeface="Calibri" pitchFamily="34" charset="-120"/>
-              </a:rPr>
-              <a:t>Utilisez les exports régulièrement comme sauvegarde de secours des données clés (élèves, factures, paie).</a:t>
+              <a:buChar char="–"/>
+            </a:pPr>
+            <a:r>
+              <a:rPr lang="en-US" sz="1300" dirty="0">
+                <a:solidFill>
+                  <a:srgbClr val="6B6B6B"/>
+                </a:solidFill>
+                <a:latin typeface="Calibri" pitchFamily="34" charset="0"/>
+                <a:ea typeface="Calibri" pitchFamily="34" charset="-122"/>
+                <a:cs typeface="Calibri" pitchFamily="34" charset="-120"/>
+              </a:rPr>
+              <a:t>Appel du jour, emploi du temps classe (Excel + PDF) (Vie scolaire / Emploi du temps)</a:t>
+            </a:r>
+            <a:endParaRPr lang="en-US" sz="1500" dirty="0"/>
+          </a:p>
+          <a:p>
+            <a:pPr marL="406400" indent="-406400">
+              <a:spcAft>
+                <a:spcPts val="600"/>
+              </a:spcAft>
+              <a:buSzPct val="100000"/>
+              <a:buChar char="–"/>
+            </a:pPr>
+            <a:r>
+              <a:rPr lang="en-US" sz="1300" dirty="0">
+                <a:solidFill>
+                  <a:srgbClr val="6B6B6B"/>
+                </a:solidFill>
+                <a:latin typeface="Calibri" pitchFamily="34" charset="0"/>
+                <a:ea typeface="Calibri" pitchFamily="34" charset="-122"/>
+                <a:cs typeface="Calibri" pitchFamily="34" charset="-120"/>
+              </a:rPr>
+              <a:t>Factures, modèle d'import de factures (Finances)</a:t>
+            </a:r>
+            <a:endParaRPr lang="en-US" sz="1500" dirty="0"/>
+          </a:p>
+          <a:p>
+            <a:pPr marL="406400" indent="-406400">
+              <a:spcAft>
+                <a:spcPts val="600"/>
+              </a:spcAft>
+              <a:buSzPct val="100000"/>
+              <a:buChar char="–"/>
+            </a:pPr>
+            <a:r>
+              <a:rPr lang="en-US" sz="1300" dirty="0">
+                <a:solidFill>
+                  <a:srgbClr val="6B6B6B"/>
+                </a:solidFill>
+                <a:latin typeface="Calibri" pitchFamily="34" charset="0"/>
+                <a:ea typeface="Calibri" pitchFamily="34" charset="-122"/>
+                <a:cs typeface="Calibri" pitchFamily="34" charset="-120"/>
+              </a:rPr>
+              <a:t>Bulletin de paie (PDF), cahier de paie, modèle d'import de paie (Paie)</a:t>
+            </a:r>
+            <a:endParaRPr lang="en-US" sz="1500" dirty="0"/>
+          </a:p>
+          <a:p>
+            <a:pPr marL="406400" indent="-406400">
+              <a:spcAft>
+                <a:spcPts val="600"/>
+              </a:spcAft>
+              <a:buSzPct val="100000"/>
+              <a:buChar char="–"/>
+            </a:pPr>
+            <a:r>
+              <a:rPr lang="en-US" sz="1300" dirty="0">
+                <a:solidFill>
+                  <a:srgbClr val="6B6B6B"/>
+                </a:solidFill>
+                <a:latin typeface="Calibri" pitchFamily="34" charset="0"/>
+                <a:ea typeface="Calibri" pitchFamily="34" charset="-122"/>
+                <a:cs typeface="Calibri" pitchFamily="34" charset="-120"/>
+              </a:rPr>
+              <a:t>Bilan financier complet (Finance)</a:t>
+            </a:r>
+            <a:endParaRPr lang="en-US" sz="1500" dirty="0"/>
+          </a:p>
+          <a:p>
+            <a:pPr marL="406400" indent="-406400">
+              <a:spcAft>
+                <a:spcPts val="600"/>
+              </a:spcAft>
+              <a:buSzPct val="100000"/>
+              <a:buChar char="–"/>
+            </a:pPr>
+            <a:r>
+              <a:rPr lang="en-US" sz="1300" dirty="0">
+                <a:solidFill>
+                  <a:srgbClr val="6B6B6B"/>
+                </a:solidFill>
+                <a:latin typeface="Calibri" pitchFamily="34" charset="0"/>
+                <a:ea typeface="Calibri" pitchFamily="34" charset="-122"/>
+                <a:cs typeface="Calibri" pitchFamily="34" charset="-120"/>
+              </a:rPr>
+              <a:t>Inventaire du matériel (Logistique)</a:t>
+            </a:r>
+            <a:endParaRPr lang="en-US" sz="1500" dirty="0"/>
+          </a:p>
+          <a:p>
+            <a:pPr marL="406400" indent="-406400">
+              <a:spcAft>
+                <a:spcPts val="600"/>
+              </a:spcAft>
+              <a:buSzPct val="100000"/>
+              <a:buChar char="–"/>
+            </a:pPr>
+            <a:r>
+              <a:rPr lang="en-US" sz="1300" dirty="0">
+                <a:solidFill>
+                  <a:srgbClr val="6B6B6B"/>
+                </a:solidFill>
+                <a:latin typeface="Calibri" pitchFamily="34" charset="0"/>
+                <a:ea typeface="Calibri" pitchFamily="34" charset="-122"/>
+                <a:cs typeface="Calibri" pitchFamily="34" charset="-120"/>
+              </a:rPr>
+              <a:t>Reçu de paiement, facture (PDF) (Finances)</a:t>
             </a:r>
             <a:endParaRPr lang="en-US" sz="1500" dirty="0"/>
           </a:p>
@@ -12475,6 +12677,315 @@
         <p:spPr>
           <a:xfrm>
             <a:off x="0" y="0"/>
+            <a:ext cx="12191695" cy="822960"/>
+          </a:xfrm>
+          <a:prstGeom prst="rect">
+            <a:avLst/>
+          </a:prstGeom>
+          <a:solidFill>
+            <a:srgbClr val="17AE89"/>
+          </a:solidFill>
+          <a:ln/>
+        </p:spPr>
+      </p:sp>
+      <p:sp>
+        <p:nvSpPr>
+          <p:cNvPr id="3" name="Text 1"/>
+          <p:cNvSpPr/>
+          <p:nvPr/>
+        </p:nvSpPr>
+        <p:spPr>
+          <a:xfrm>
+            <a:off x="457200" y="0"/>
+            <a:ext cx="11277295" cy="822960"/>
+          </a:xfrm>
+          <a:prstGeom prst="rect">
+            <a:avLst/>
+          </a:prstGeom>
+          <a:noFill/>
+          <a:ln/>
+        </p:spPr>
+        <p:txBody>
+          <a:bodyPr wrap="square" rtlCol="0" anchor="ctr"/>
+          <a:lstStyle/>
+          <a:p>
+            <a:pPr indent="0" marL="0">
+              <a:buNone/>
+            </a:pPr>
+            <a:r>
+              <a:rPr lang="en-US" sz="2600" b="1" dirty="0">
+                <a:solidFill>
+                  <a:srgbClr val="FFFFFF"/>
+                </a:solidFill>
+                <a:latin typeface="Calibri" pitchFamily="34" charset="0"/>
+                <a:ea typeface="Calibri" pitchFamily="34" charset="-122"/>
+                <a:cs typeface="Calibri" pitchFamily="34" charset="-120"/>
+              </a:rPr>
+              <a:t>Bonnes pratiques</a:t>
+            </a:r>
+            <a:endParaRPr lang="en-US" sz="2600" dirty="0"/>
+          </a:p>
+        </p:txBody>
+      </p:sp>
+      <p:sp>
+        <p:nvSpPr>
+          <p:cNvPr id="4" name="Text 2"/>
+          <p:cNvSpPr/>
+          <p:nvPr/>
+        </p:nvSpPr>
+        <p:spPr>
+          <a:xfrm>
+            <a:off x="457200" y="1051560"/>
+            <a:ext cx="11277295" cy="5257800"/>
+          </a:xfrm>
+          <a:prstGeom prst="rect">
+            <a:avLst/>
+          </a:prstGeom>
+          <a:noFill/>
+          <a:ln/>
+        </p:spPr>
+        <p:txBody>
+          <a:bodyPr wrap="square" rtlCol="0" anchor="t"/>
+          <a:lstStyle/>
+          <a:p>
+            <a:pPr marL="254000" indent="-254000">
+              <a:spcAft>
+                <a:spcPts val="1000"/>
+              </a:spcAft>
+              <a:buSzPct val="100000"/>
+              <a:buChar char="▸"/>
+            </a:pPr>
+            <a:r>
+              <a:rPr lang="en-US" sz="1500" dirty="0">
+                <a:solidFill>
+                  <a:srgbClr val="444444"/>
+                </a:solidFill>
+                <a:latin typeface="Calibri" pitchFamily="34" charset="0"/>
+                <a:ea typeface="Calibri" pitchFamily="34" charset="-122"/>
+                <a:cs typeface="Calibri" pitchFamily="34" charset="-120"/>
+              </a:rPr>
+              <a:t>Commencez toujours par configurer Niveaux → Classes → Tarifs avant d'ouvrir les admissions.</a:t>
+            </a:r>
+            <a:endParaRPr lang="en-US" sz="1500" dirty="0"/>
+          </a:p>
+          <a:p>
+            <a:pPr marL="254000" indent="-254000">
+              <a:spcAft>
+                <a:spcPts val="1000"/>
+              </a:spcAft>
+              <a:buSzPct val="100000"/>
+              <a:buChar char="▸"/>
+            </a:pPr>
+            <a:r>
+              <a:rPr lang="en-US" sz="1500" dirty="0">
+                <a:solidFill>
+                  <a:srgbClr val="444444"/>
+                </a:solidFill>
+                <a:latin typeface="Calibri" pitchFamily="34" charset="0"/>
+                <a:ea typeface="Calibri" pitchFamily="34" charset="-122"/>
+                <a:cs typeface="Calibri" pitchFamily="34" charset="-120"/>
+              </a:rPr>
+              <a:t>Faites l'appel du jour et la saisie des notes le plus tôt possible : plus la saisie est régulière, plus les indicateurs (absences, moyennes, recouvrement) restent fiables.</a:t>
+            </a:r>
+            <a:endParaRPr lang="en-US" sz="1500" dirty="0"/>
+          </a:p>
+          <a:p>
+            <a:pPr marL="254000" indent="-254000">
+              <a:spcAft>
+                <a:spcPts val="1000"/>
+              </a:spcAft>
+              <a:buSzPct val="100000"/>
+              <a:buChar char="▸"/>
+            </a:pPr>
+            <a:r>
+              <a:rPr lang="en-US" sz="1500" dirty="0">
+                <a:solidFill>
+                  <a:srgbClr val="444444"/>
+                </a:solidFill>
+                <a:latin typeface="Calibri" pitchFamily="34" charset="0"/>
+                <a:ea typeface="Calibri" pitchFamily="34" charset="-122"/>
+                <a:cs typeface="Calibri" pitchFamily="34" charset="-120"/>
+              </a:rPr>
+              <a:t>Ne partagez jamais votre mot de passe : chaque action est associée à l'utilisateur connecté.</a:t>
+            </a:r>
+            <a:endParaRPr lang="en-US" sz="1500" dirty="0"/>
+          </a:p>
+          <a:p>
+            <a:pPr marL="254000" indent="-254000">
+              <a:spcAft>
+                <a:spcPts val="1000"/>
+              </a:spcAft>
+              <a:buSzPct val="100000"/>
+              <a:buChar char="▸"/>
+            </a:pPr>
+            <a:r>
+              <a:rPr lang="en-US" sz="1500" dirty="0">
+                <a:solidFill>
+                  <a:srgbClr val="444444"/>
+                </a:solidFill>
+                <a:latin typeface="Calibri" pitchFamily="34" charset="0"/>
+                <a:ea typeface="Calibri" pitchFamily="34" charset="-122"/>
+                <a:cs typeface="Calibri" pitchFamily="34" charset="-120"/>
+              </a:rPr>
+              <a:t>En cas de doute sur un montant ou une décision (passage de classe, suppression), vérifiez toujours l'aperçu ou la confirmation affichée avant de valider.</a:t>
+            </a:r>
+            <a:endParaRPr lang="en-US" sz="1500" dirty="0"/>
+          </a:p>
+          <a:p>
+            <a:pPr marL="254000" indent="-254000">
+              <a:spcAft>
+                <a:spcPts val="1000"/>
+              </a:spcAft>
+              <a:buSzPct val="100000"/>
+              <a:buChar char="▸"/>
+            </a:pPr>
+            <a:r>
+              <a:rPr lang="en-US" sz="1500" dirty="0">
+                <a:solidFill>
+                  <a:srgbClr val="444444"/>
+                </a:solidFill>
+                <a:latin typeface="Calibri" pitchFamily="34" charset="0"/>
+                <a:ea typeface="Calibri" pitchFamily="34" charset="-122"/>
+                <a:cs typeface="Calibri" pitchFamily="34" charset="-120"/>
+              </a:rPr>
+              <a:t>Utilisez les exports régulièrement comme sauvegarde de secours des données clés (élèves, factures, paie).</a:t>
+            </a:r>
+            <a:endParaRPr lang="en-US" sz="1500" dirty="0"/>
+          </a:p>
+        </p:txBody>
+      </p:sp>
+      <p:sp>
+        <p:nvSpPr>
+          <p:cNvPr id="5" name="Shape 3"/>
+          <p:cNvSpPr/>
+          <p:nvPr/>
+        </p:nvSpPr>
+        <p:spPr>
+          <a:xfrm>
+            <a:off x="0" y="6537960"/>
+            <a:ext cx="12191695" cy="320040"/>
+          </a:xfrm>
+          <a:prstGeom prst="rect">
+            <a:avLst/>
+          </a:prstGeom>
+          <a:solidFill>
+            <a:srgbClr val="EAFBF6"/>
+          </a:solidFill>
+          <a:ln/>
+        </p:spPr>
+      </p:sp>
+      <p:sp>
+        <p:nvSpPr>
+          <p:cNvPr id="6" name="Text 4"/>
+          <p:cNvSpPr/>
+          <p:nvPr/>
+        </p:nvSpPr>
+        <p:spPr>
+          <a:xfrm>
+            <a:off x="365760" y="6537960"/>
+            <a:ext cx="5486400" cy="320040"/>
+          </a:xfrm>
+          <a:prstGeom prst="rect">
+            <a:avLst/>
+          </a:prstGeom>
+          <a:noFill/>
+          <a:ln/>
+        </p:spPr>
+        <p:txBody>
+          <a:bodyPr wrap="square" rtlCol="0" anchor="ctr"/>
+          <a:lstStyle/>
+          <a:p>
+            <a:pPr indent="0" marL="0">
+              <a:buNone/>
+            </a:pPr>
+            <a:r>
+              <a:rPr lang="en-US" sz="900" dirty="0">
+                <a:solidFill>
+                  <a:srgbClr val="0A7C63"/>
+                </a:solidFill>
+                <a:latin typeface="Calibri" pitchFamily="34" charset="0"/>
+                <a:ea typeface="Calibri" pitchFamily="34" charset="-122"/>
+                <a:cs typeface="Calibri" pitchFamily="34" charset="-120"/>
+              </a:rPr>
+              <a:t>Kalanso — Manuel d'utilisation</a:t>
+            </a:r>
+            <a:endParaRPr lang="en-US" sz="900" dirty="0"/>
+          </a:p>
+        </p:txBody>
+      </p:sp>
+      <p:sp>
+        <p:nvSpPr>
+          <p:cNvPr id="7" name="Text 5"/>
+          <p:cNvSpPr/>
+          <p:nvPr/>
+        </p:nvSpPr>
+        <p:spPr>
+          <a:xfrm>
+            <a:off x="11277295" y="6537960"/>
+            <a:ext cx="548640" cy="320040"/>
+          </a:xfrm>
+          <a:prstGeom prst="rect">
+            <a:avLst/>
+          </a:prstGeom>
+          <a:noFill/>
+          <a:ln/>
+        </p:spPr>
+        <p:txBody>
+          <a:bodyPr wrap="square" rtlCol="0" anchor="ctr"/>
+          <a:lstStyle/>
+          <a:p>
+            <a:pPr algn="r" indent="0" marL="0">
+              <a:buNone/>
+            </a:pPr>
+            <a:r>
+              <a:rPr lang="en-US" sz="900" dirty="0">
+                <a:solidFill>
+                  <a:srgbClr val="0A7C63"/>
+                </a:solidFill>
+                <a:latin typeface="Calibri" pitchFamily="34" charset="0"/>
+                <a:ea typeface="Calibri" pitchFamily="34" charset="-122"/>
+                <a:cs typeface="Calibri" pitchFamily="34" charset="-120"/>
+              </a:rPr>
+              <a:t>31</a:t>
+            </a:r>
+            <a:endParaRPr lang="en-US" sz="900" dirty="0"/>
+          </a:p>
+        </p:txBody>
+      </p:sp>
+    </p:spTree>
+  </p:cSld>
+  <p:clrMapOvr>
+    <a:masterClrMapping/>
+  </p:clrMapOvr>
+</p:sld>
+</file>
+
+<file path=ppt/slides/slide32.xml><?xml version="1.0" encoding="utf-8"?>
+<p:sld xmlns:a="http://schemas.openxmlformats.org/drawingml/2006/main" xmlns:r="http://schemas.openxmlformats.org/officeDocument/2006/relationships" xmlns:p="http://schemas.openxmlformats.org/presentationml/2006/main">
+  <p:cSld name="Slide 32">
+    <p:spTree>
+      <p:nvGrpSpPr>
+        <p:cNvPr id="1" name=""/>
+        <p:cNvGrpSpPr/>
+        <p:nvPr/>
+      </p:nvGrpSpPr>
+      <p:grpSpPr>
+        <a:xfrm>
+          <a:off x="0" y="0"/>
+          <a:ext cx="0" cy="0"/>
+          <a:chOff x="0" y="0"/>
+          <a:chExt cx="0" cy="0"/>
+        </a:xfrm>
+      </p:grpSpPr>
+      <p:sp>
+        <p:nvSpPr>
+          <p:cNvPr id="2" name="Shape 0"/>
+          <p:cNvSpPr/>
+          <p:nvPr/>
+        </p:nvSpPr>
+        <p:spPr>
+          <a:xfrm>
+            <a:off x="0" y="0"/>
             <a:ext cx="12191695" cy="6858000"/>
           </a:xfrm>
           <a:prstGeom prst="rect">
@@ -13089,16 +13600,1108 @@
           </p:nvPr>
         </p:nvGraphicFramePr>
         <p:xfrm>
-          <a:off x="457200" y="1097280"/>
-          <a:ext cx="11277295" cy="5029200"/>
+          <a:off x="457200" y="1051560"/>
+          <a:ext cx="11277295" cy="5349240"/>
         </p:xfrm>
         <a:graphic>
           <a:graphicData uri="http://schemas.openxmlformats.org/drawingml/2006/table">
             <a:tbl>
               <a:tblPr/>
               <a:tblGrid>
-                <a:gridCol w="2743200"/>
-                <a:gridCol w="8534095"/>
+                <a:gridCol w="2377440"/>
+                <a:gridCol w="8899855"/>
+              </a:tblGrid>
+              <a:tr h="502920">
+                <a:tc>
+                  <a:txBody>
+                    <a:bodyPr/>
+                    <a:lstStyle/>
+                    <a:p>
+                      <a:pPr indent="0" marL="0">
+                        <a:buNone/>
+                      </a:pPr>
+                      <a:r>
+                        <a:rPr lang="en-US" sz="1250" b="1" dirty="0">
+                          <a:solidFill>
+                            <a:srgbClr val="FFFFFF"/>
+                          </a:solidFill>
+                          <a:latin typeface="Calibri" pitchFamily="34" charset="0"/>
+                          <a:ea typeface="Calibri" pitchFamily="34" charset="-122"/>
+                          <a:cs typeface="Calibri" pitchFamily="34" charset="-120"/>
+                        </a:rPr>
+                        <a:t>Rôle</a:t>
+                      </a:r>
+                      <a:endParaRPr lang="en-US" sz="1250" dirty="0">
+                        <a:latin typeface="Calibri" charset="0"/>
+                        <a:ea typeface="Calibri" charset="0"/>
+                        <a:cs typeface="Calibri" charset="0"/>
+                      </a:endParaRPr>
+                    </a:p>
+                  </a:txBody>
+                  <a:tcPr marL="91440" marR="91440" marT="45720" marB="45720" anchor="ctr">
+                    <a:lnL w="12700" cap="flat" cmpd="sng" algn="ctr">
+                      <a:solidFill>
+                        <a:srgbClr val="DDDDDD"/>
+                      </a:solidFill>
+                      <a:prstDash val="solid"/>
+                      <a:round/>
+                      <a:headEnd type="none" w="med" len="med"/>
+                      <a:tailEnd type="none" w="med" len="med"/>
+                    </a:lnL>
+                    <a:lnR w="12700" cap="flat" cmpd="sng" algn="ctr">
+                      <a:solidFill>
+                        <a:srgbClr val="DDDDDD"/>
+                      </a:solidFill>
+                      <a:prstDash val="solid"/>
+                      <a:round/>
+                      <a:headEnd type="none" w="med" len="med"/>
+                      <a:tailEnd type="none" w="med" len="med"/>
+                    </a:lnR>
+                    <a:lnT w="12700" cap="flat" cmpd="sng" algn="ctr">
+                      <a:solidFill>
+                        <a:srgbClr val="DDDDDD"/>
+                      </a:solidFill>
+                      <a:prstDash val="solid"/>
+                      <a:round/>
+                      <a:headEnd type="none" w="med" len="med"/>
+                      <a:tailEnd type="none" w="med" len="med"/>
+                    </a:lnT>
+                    <a:lnB w="12700" cap="flat" cmpd="sng" algn="ctr">
+                      <a:solidFill>
+                        <a:srgbClr val="DDDDDD"/>
+                      </a:solidFill>
+                      <a:prstDash val="solid"/>
+                      <a:round/>
+                      <a:headEnd type="none" w="med" len="med"/>
+                      <a:tailEnd type="none" w="med" len="med"/>
+                    </a:lnB>
+                    <a:solidFill>
+                      <a:srgbClr val="0A7C63"/>
+                    </a:solidFill>
+                  </a:tcPr>
+                </a:tc>
+                <a:tc>
+                  <a:txBody>
+                    <a:bodyPr/>
+                    <a:lstStyle/>
+                    <a:p>
+                      <a:pPr indent="0" marL="0">
+                        <a:buNone/>
+                      </a:pPr>
+                      <a:r>
+                        <a:rPr lang="en-US" sz="1250" b="1" dirty="0">
+                          <a:solidFill>
+                            <a:srgbClr val="FFFFFF"/>
+                          </a:solidFill>
+                          <a:latin typeface="Calibri" pitchFamily="34" charset="0"/>
+                          <a:ea typeface="Calibri" pitchFamily="34" charset="-122"/>
+                          <a:cs typeface="Calibri" pitchFamily="34" charset="-120"/>
+                        </a:rPr>
+                        <a:t>Accès</a:t>
+                      </a:r>
+                      <a:endParaRPr lang="en-US" sz="1250" dirty="0">
+                        <a:latin typeface="Calibri" charset="0"/>
+                        <a:ea typeface="Calibri" charset="0"/>
+                        <a:cs typeface="Calibri" charset="0"/>
+                      </a:endParaRPr>
+                    </a:p>
+                  </a:txBody>
+                  <a:tcPr marL="91440" marR="91440" marT="45720" marB="45720" anchor="ctr">
+                    <a:lnL w="12700" cap="flat" cmpd="sng" algn="ctr">
+                      <a:solidFill>
+                        <a:srgbClr val="DDDDDD"/>
+                      </a:solidFill>
+                      <a:prstDash val="solid"/>
+                      <a:round/>
+                      <a:headEnd type="none" w="med" len="med"/>
+                      <a:tailEnd type="none" w="med" len="med"/>
+                    </a:lnL>
+                    <a:lnR w="12700" cap="flat" cmpd="sng" algn="ctr">
+                      <a:solidFill>
+                        <a:srgbClr val="DDDDDD"/>
+                      </a:solidFill>
+                      <a:prstDash val="solid"/>
+                      <a:round/>
+                      <a:headEnd type="none" w="med" len="med"/>
+                      <a:tailEnd type="none" w="med" len="med"/>
+                    </a:lnR>
+                    <a:lnT w="12700" cap="flat" cmpd="sng" algn="ctr">
+                      <a:solidFill>
+                        <a:srgbClr val="DDDDDD"/>
+                      </a:solidFill>
+                      <a:prstDash val="solid"/>
+                      <a:round/>
+                      <a:headEnd type="none" w="med" len="med"/>
+                      <a:tailEnd type="none" w="med" len="med"/>
+                    </a:lnT>
+                    <a:lnB w="12700" cap="flat" cmpd="sng" algn="ctr">
+                      <a:solidFill>
+                        <a:srgbClr val="DDDDDD"/>
+                      </a:solidFill>
+                      <a:prstDash val="solid"/>
+                      <a:round/>
+                      <a:headEnd type="none" w="med" len="med"/>
+                      <a:tailEnd type="none" w="med" len="med"/>
+                    </a:lnB>
+                    <a:solidFill>
+                      <a:srgbClr val="0A7C63"/>
+                    </a:solidFill>
+                  </a:tcPr>
+                </a:tc>
+              </a:tr>
+              <a:tr h="1051560">
+                <a:tc>
+                  <a:txBody>
+                    <a:bodyPr/>
+                    <a:lstStyle/>
+                    <a:p>
+                      <a:pPr indent="0" marL="0">
+                        <a:buNone/>
+                      </a:pPr>
+                      <a:r>
+                        <a:rPr lang="en-US" sz="1250" dirty="0">
+                          <a:solidFill>
+                            <a:srgbClr val="444444"/>
+                          </a:solidFill>
+                          <a:latin typeface="Calibri" pitchFamily="34" charset="0"/>
+                          <a:ea typeface="Calibri" pitchFamily="34" charset="-122"/>
+                          <a:cs typeface="Calibri" pitchFamily="34" charset="-120"/>
+                        </a:rPr>
+                        <a:t>Fondateur</a:t>
+                      </a:r>
+                      <a:endParaRPr lang="en-US" sz="1250" dirty="0">
+                        <a:latin typeface="Calibri" charset="0"/>
+                        <a:ea typeface="Calibri" charset="0"/>
+                        <a:cs typeface="Calibri" charset="0"/>
+                      </a:endParaRPr>
+                    </a:p>
+                    <a:p>
+                      <a:pPr indent="0" marL="0">
+                        <a:buNone/>
+                      </a:pPr>
+                      <a:r>
+                        <a:rPr lang="en-US" sz="1250" dirty="0">
+                          <a:solidFill>
+                            <a:srgbClr val="444444"/>
+                          </a:solidFill>
+                          <a:latin typeface="Calibri" pitchFamily="34" charset="0"/>
+                          <a:ea typeface="Calibri" pitchFamily="34" charset="-122"/>
+                          <a:cs typeface="Calibri" pitchFamily="34" charset="-120"/>
+                        </a:rPr>
+                        <a:t>et Chef d'établissement</a:t>
+                      </a:r>
+                      <a:endParaRPr lang="en-US" sz="1250" dirty="0">
+                        <a:latin typeface="Calibri" charset="0"/>
+                        <a:ea typeface="Calibri" charset="0"/>
+                        <a:cs typeface="Calibri" charset="0"/>
+                      </a:endParaRPr>
+                    </a:p>
+                  </a:txBody>
+                  <a:tcPr marL="91440" marR="91440" marT="45720" marB="45720" anchor="ctr">
+                    <a:lnL w="12700" cap="flat" cmpd="sng" algn="ctr">
+                      <a:solidFill>
+                        <a:srgbClr val="DDDDDD"/>
+                      </a:solidFill>
+                      <a:prstDash val="solid"/>
+                      <a:round/>
+                      <a:headEnd type="none" w="med" len="med"/>
+                      <a:tailEnd type="none" w="med" len="med"/>
+                    </a:lnL>
+                    <a:lnR w="12700" cap="flat" cmpd="sng" algn="ctr">
+                      <a:solidFill>
+                        <a:srgbClr val="DDDDDD"/>
+                      </a:solidFill>
+                      <a:prstDash val="solid"/>
+                      <a:round/>
+                      <a:headEnd type="none" w="med" len="med"/>
+                      <a:tailEnd type="none" w="med" len="med"/>
+                    </a:lnR>
+                    <a:lnT w="12700" cap="flat" cmpd="sng" algn="ctr">
+                      <a:solidFill>
+                        <a:srgbClr val="DDDDDD"/>
+                      </a:solidFill>
+                      <a:prstDash val="solid"/>
+                      <a:round/>
+                      <a:headEnd type="none" w="med" len="med"/>
+                      <a:tailEnd type="none" w="med" len="med"/>
+                    </a:lnT>
+                    <a:lnB w="12700" cap="flat" cmpd="sng" algn="ctr">
+                      <a:solidFill>
+                        <a:srgbClr val="DDDDDD"/>
+                      </a:solidFill>
+                      <a:prstDash val="solid"/>
+                      <a:round/>
+                      <a:headEnd type="none" w="med" len="med"/>
+                      <a:tailEnd type="none" w="med" len="med"/>
+                    </a:lnB>
+                  </a:tcPr>
+                </a:tc>
+                <a:tc>
+                  <a:txBody>
+                    <a:bodyPr/>
+                    <a:lstStyle/>
+                    <a:p>
+                      <a:pPr indent="0" marL="0">
+                        <a:buNone/>
+                      </a:pPr>
+                      <a:r>
+                        <a:rPr lang="en-US" sz="1250" dirty="0">
+                          <a:solidFill>
+                            <a:srgbClr val="444444"/>
+                          </a:solidFill>
+                          <a:latin typeface="Calibri" pitchFamily="34" charset="0"/>
+                          <a:ea typeface="Calibri" pitchFamily="34" charset="-122"/>
+                          <a:cs typeface="Calibri" pitchFamily="34" charset="-120"/>
+                        </a:rPr>
+                        <a:t>Accès total et identique entre les deux rôles : utilisateurs, niveaux, matières, personnel, emploi du temps, logistique, suivi de parcours, bibliothèque, finances. Ce sont les deux seuls rôles pouvant annuler une admission déjà acceptée.</a:t>
+                      </a:r>
+                      <a:endParaRPr lang="en-US" sz="1250" dirty="0">
+                        <a:latin typeface="Calibri" charset="0"/>
+                        <a:ea typeface="Calibri" charset="0"/>
+                        <a:cs typeface="Calibri" charset="0"/>
+                      </a:endParaRPr>
+                    </a:p>
+                  </a:txBody>
+                  <a:tcPr marL="91440" marR="91440" marT="45720" marB="45720" anchor="ctr">
+                    <a:lnL w="12700" cap="flat" cmpd="sng" algn="ctr">
+                      <a:solidFill>
+                        <a:srgbClr val="DDDDDD"/>
+                      </a:solidFill>
+                      <a:prstDash val="solid"/>
+                      <a:round/>
+                      <a:headEnd type="none" w="med" len="med"/>
+                      <a:tailEnd type="none" w="med" len="med"/>
+                    </a:lnL>
+                    <a:lnR w="12700" cap="flat" cmpd="sng" algn="ctr">
+                      <a:solidFill>
+                        <a:srgbClr val="DDDDDD"/>
+                      </a:solidFill>
+                      <a:prstDash val="solid"/>
+                      <a:round/>
+                      <a:headEnd type="none" w="med" len="med"/>
+                      <a:tailEnd type="none" w="med" len="med"/>
+                    </a:lnR>
+                    <a:lnT w="12700" cap="flat" cmpd="sng" algn="ctr">
+                      <a:solidFill>
+                        <a:srgbClr val="DDDDDD"/>
+                      </a:solidFill>
+                      <a:prstDash val="solid"/>
+                      <a:round/>
+                      <a:headEnd type="none" w="med" len="med"/>
+                      <a:tailEnd type="none" w="med" len="med"/>
+                    </a:lnT>
+                    <a:lnB w="12700" cap="flat" cmpd="sng" algn="ctr">
+                      <a:solidFill>
+                        <a:srgbClr val="DDDDDD"/>
+                      </a:solidFill>
+                      <a:prstDash val="solid"/>
+                      <a:round/>
+                      <a:headEnd type="none" w="med" len="med"/>
+                      <a:tailEnd type="none" w="med" len="med"/>
+                    </a:lnB>
+                  </a:tcPr>
+                </a:tc>
+              </a:tr>
+              <a:tr h="960120">
+                <a:tc>
+                  <a:txBody>
+                    <a:bodyPr/>
+                    <a:lstStyle/>
+                    <a:p>
+                      <a:pPr indent="0" marL="0">
+                        <a:buNone/>
+                      </a:pPr>
+                      <a:r>
+                        <a:rPr lang="en-US" sz="1250" dirty="0">
+                          <a:solidFill>
+                            <a:srgbClr val="444444"/>
+                          </a:solidFill>
+                          <a:latin typeface="Calibri" pitchFamily="34" charset="0"/>
+                          <a:ea typeface="Calibri" pitchFamily="34" charset="-122"/>
+                          <a:cs typeface="Calibri" pitchFamily="34" charset="-120"/>
+                        </a:rPr>
+                        <a:t>Secrétaire</a:t>
+                      </a:r>
+                      <a:endParaRPr lang="en-US" sz="1250" dirty="0">
+                        <a:latin typeface="Calibri" charset="0"/>
+                        <a:ea typeface="Calibri" charset="0"/>
+                        <a:cs typeface="Calibri" charset="0"/>
+                      </a:endParaRPr>
+                    </a:p>
+                  </a:txBody>
+                  <a:tcPr marL="91440" marR="91440" marT="45720" marB="45720" anchor="ctr">
+                    <a:lnL w="12700" cap="flat" cmpd="sng" algn="ctr">
+                      <a:solidFill>
+                        <a:srgbClr val="DDDDDD"/>
+                      </a:solidFill>
+                      <a:prstDash val="solid"/>
+                      <a:round/>
+                      <a:headEnd type="none" w="med" len="med"/>
+                      <a:tailEnd type="none" w="med" len="med"/>
+                    </a:lnL>
+                    <a:lnR w="12700" cap="flat" cmpd="sng" algn="ctr">
+                      <a:solidFill>
+                        <a:srgbClr val="DDDDDD"/>
+                      </a:solidFill>
+                      <a:prstDash val="solid"/>
+                      <a:round/>
+                      <a:headEnd type="none" w="med" len="med"/>
+                      <a:tailEnd type="none" w="med" len="med"/>
+                    </a:lnR>
+                    <a:lnT w="12700" cap="flat" cmpd="sng" algn="ctr">
+                      <a:solidFill>
+                        <a:srgbClr val="DDDDDD"/>
+                      </a:solidFill>
+                      <a:prstDash val="solid"/>
+                      <a:round/>
+                      <a:headEnd type="none" w="med" len="med"/>
+                      <a:tailEnd type="none" w="med" len="med"/>
+                    </a:lnT>
+                    <a:lnB w="12700" cap="flat" cmpd="sng" algn="ctr">
+                      <a:solidFill>
+                        <a:srgbClr val="DDDDDD"/>
+                      </a:solidFill>
+                      <a:prstDash val="solid"/>
+                      <a:round/>
+                      <a:headEnd type="none" w="med" len="med"/>
+                      <a:tailEnd type="none" w="med" len="med"/>
+                    </a:lnB>
+                  </a:tcPr>
+                </a:tc>
+                <a:tc>
+                  <a:txBody>
+                    <a:bodyPr/>
+                    <a:lstStyle/>
+                    <a:p>
+                      <a:pPr indent="0" marL="0">
+                        <a:buNone/>
+                      </a:pPr>
+                      <a:r>
+                        <a:rPr lang="en-US" sz="1250" dirty="0">
+                          <a:solidFill>
+                            <a:srgbClr val="444444"/>
+                          </a:solidFill>
+                          <a:latin typeface="Calibri" pitchFamily="34" charset="0"/>
+                          <a:ea typeface="Calibri" pitchFamily="34" charset="-122"/>
+                          <a:cs typeface="Calibri" pitchFamily="34" charset="-120"/>
+                        </a:rPr>
+                        <a:t>Élèves et admissions (accepter, refuser, remettre en attente un refus, inscription sur place), communication (envoi de messages), bibliothèque. Aucun accès aux finances, à la paie, au personnel, aux niveaux ni aux matières.</a:t>
+                      </a:r>
+                      <a:endParaRPr lang="en-US" sz="1250" dirty="0">
+                        <a:latin typeface="Calibri" charset="0"/>
+                        <a:ea typeface="Calibri" charset="0"/>
+                        <a:cs typeface="Calibri" charset="0"/>
+                      </a:endParaRPr>
+                    </a:p>
+                  </a:txBody>
+                  <a:tcPr marL="91440" marR="91440" marT="45720" marB="45720" anchor="ctr">
+                    <a:lnL w="12700" cap="flat" cmpd="sng" algn="ctr">
+                      <a:solidFill>
+                        <a:srgbClr val="DDDDDD"/>
+                      </a:solidFill>
+                      <a:prstDash val="solid"/>
+                      <a:round/>
+                      <a:headEnd type="none" w="med" len="med"/>
+                      <a:tailEnd type="none" w="med" len="med"/>
+                    </a:lnL>
+                    <a:lnR w="12700" cap="flat" cmpd="sng" algn="ctr">
+                      <a:solidFill>
+                        <a:srgbClr val="DDDDDD"/>
+                      </a:solidFill>
+                      <a:prstDash val="solid"/>
+                      <a:round/>
+                      <a:headEnd type="none" w="med" len="med"/>
+                      <a:tailEnd type="none" w="med" len="med"/>
+                    </a:lnR>
+                    <a:lnT w="12700" cap="flat" cmpd="sng" algn="ctr">
+                      <a:solidFill>
+                        <a:srgbClr val="DDDDDD"/>
+                      </a:solidFill>
+                      <a:prstDash val="solid"/>
+                      <a:round/>
+                      <a:headEnd type="none" w="med" len="med"/>
+                      <a:tailEnd type="none" w="med" len="med"/>
+                    </a:lnT>
+                    <a:lnB w="12700" cap="flat" cmpd="sng" algn="ctr">
+                      <a:solidFill>
+                        <a:srgbClr val="DDDDDD"/>
+                      </a:solidFill>
+                      <a:prstDash val="solid"/>
+                      <a:round/>
+                      <a:headEnd type="none" w="med" len="med"/>
+                      <a:tailEnd type="none" w="med" len="med"/>
+                    </a:lnB>
+                  </a:tcPr>
+                </a:tc>
+              </a:tr>
+              <a:tr h="1051560">
+                <a:tc>
+                  <a:txBody>
+                    <a:bodyPr/>
+                    <a:lstStyle/>
+                    <a:p>
+                      <a:pPr indent="0" marL="0">
+                        <a:buNone/>
+                      </a:pPr>
+                      <a:r>
+                        <a:rPr lang="en-US" sz="1250" dirty="0">
+                          <a:solidFill>
+                            <a:srgbClr val="444444"/>
+                          </a:solidFill>
+                          <a:latin typeface="Calibri" pitchFamily="34" charset="0"/>
+                          <a:ea typeface="Calibri" pitchFamily="34" charset="-122"/>
+                          <a:cs typeface="Calibri" pitchFamily="34" charset="-120"/>
+                        </a:rPr>
+                        <a:t>Comptable</a:t>
+                      </a:r>
+                      <a:endParaRPr lang="en-US" sz="1250" dirty="0">
+                        <a:latin typeface="Calibri" charset="0"/>
+                        <a:ea typeface="Calibri" charset="0"/>
+                        <a:cs typeface="Calibri" charset="0"/>
+                      </a:endParaRPr>
+                    </a:p>
+                  </a:txBody>
+                  <a:tcPr marL="91440" marR="91440" marT="45720" marB="45720" anchor="ctr">
+                    <a:lnL w="12700" cap="flat" cmpd="sng" algn="ctr">
+                      <a:solidFill>
+                        <a:srgbClr val="DDDDDD"/>
+                      </a:solidFill>
+                      <a:prstDash val="solid"/>
+                      <a:round/>
+                      <a:headEnd type="none" w="med" len="med"/>
+                      <a:tailEnd type="none" w="med" len="med"/>
+                    </a:lnL>
+                    <a:lnR w="12700" cap="flat" cmpd="sng" algn="ctr">
+                      <a:solidFill>
+                        <a:srgbClr val="DDDDDD"/>
+                      </a:solidFill>
+                      <a:prstDash val="solid"/>
+                      <a:round/>
+                      <a:headEnd type="none" w="med" len="med"/>
+                      <a:tailEnd type="none" w="med" len="med"/>
+                    </a:lnR>
+                    <a:lnT w="12700" cap="flat" cmpd="sng" algn="ctr">
+                      <a:solidFill>
+                        <a:srgbClr val="DDDDDD"/>
+                      </a:solidFill>
+                      <a:prstDash val="solid"/>
+                      <a:round/>
+                      <a:headEnd type="none" w="med" len="med"/>
+                      <a:tailEnd type="none" w="med" len="med"/>
+                    </a:lnT>
+                    <a:lnB w="12700" cap="flat" cmpd="sng" algn="ctr">
+                      <a:solidFill>
+                        <a:srgbClr val="DDDDDD"/>
+                      </a:solidFill>
+                      <a:prstDash val="solid"/>
+                      <a:round/>
+                      <a:headEnd type="none" w="med" len="med"/>
+                      <a:tailEnd type="none" w="med" len="med"/>
+                    </a:lnB>
+                  </a:tcPr>
+                </a:tc>
+                <a:tc>
+                  <a:txBody>
+                    <a:bodyPr/>
+                    <a:lstStyle/>
+                    <a:p>
+                      <a:pPr indent="0" marL="0">
+                        <a:buNone/>
+                      </a:pPr>
+                      <a:r>
+                        <a:rPr lang="en-US" sz="1250" dirty="0">
+                          <a:solidFill>
+                            <a:srgbClr val="444444"/>
+                          </a:solidFill>
+                          <a:latin typeface="Calibri" pitchFamily="34" charset="0"/>
+                          <a:ea typeface="Calibri" pitchFamily="34" charset="-122"/>
+                          <a:cs typeface="Calibri" pitchFamily="34" charset="-120"/>
+                        </a:rPr>
+                        <a:t>Tout le pôle finances : tarifs d'écolage, frais d'inscription, factures, paiements, Mobile Money, paie du personnel, bilan financier — et l'envoi de rappels de paiement. Aucun accès aux élèves, admissions, personnel, niveaux ou matières.</a:t>
+                      </a:r>
+                      <a:endParaRPr lang="en-US" sz="1250" dirty="0">
+                        <a:latin typeface="Calibri" charset="0"/>
+                        <a:ea typeface="Calibri" charset="0"/>
+                        <a:cs typeface="Calibri" charset="0"/>
+                      </a:endParaRPr>
+                    </a:p>
+                  </a:txBody>
+                  <a:tcPr marL="91440" marR="91440" marT="45720" marB="45720" anchor="ctr">
+                    <a:lnL w="12700" cap="flat" cmpd="sng" algn="ctr">
+                      <a:solidFill>
+                        <a:srgbClr val="DDDDDD"/>
+                      </a:solidFill>
+                      <a:prstDash val="solid"/>
+                      <a:round/>
+                      <a:headEnd type="none" w="med" len="med"/>
+                      <a:tailEnd type="none" w="med" len="med"/>
+                    </a:lnL>
+                    <a:lnR w="12700" cap="flat" cmpd="sng" algn="ctr">
+                      <a:solidFill>
+                        <a:srgbClr val="DDDDDD"/>
+                      </a:solidFill>
+                      <a:prstDash val="solid"/>
+                      <a:round/>
+                      <a:headEnd type="none" w="med" len="med"/>
+                      <a:tailEnd type="none" w="med" len="med"/>
+                    </a:lnR>
+                    <a:lnT w="12700" cap="flat" cmpd="sng" algn="ctr">
+                      <a:solidFill>
+                        <a:srgbClr val="DDDDDD"/>
+                      </a:solidFill>
+                      <a:prstDash val="solid"/>
+                      <a:round/>
+                      <a:headEnd type="none" w="med" len="med"/>
+                      <a:tailEnd type="none" w="med" len="med"/>
+                    </a:lnT>
+                    <a:lnB w="12700" cap="flat" cmpd="sng" algn="ctr">
+                      <a:solidFill>
+                        <a:srgbClr val="DDDDDD"/>
+                      </a:solidFill>
+                      <a:prstDash val="solid"/>
+                      <a:round/>
+                      <a:headEnd type="none" w="med" len="med"/>
+                      <a:tailEnd type="none" w="med" len="med"/>
+                    </a:lnB>
+                  </a:tcPr>
+                </a:tc>
+              </a:tr>
+              <a:tr h="731520">
+                <a:tc>
+                  <a:txBody>
+                    <a:bodyPr/>
+                    <a:lstStyle/>
+                    <a:p>
+                      <a:pPr indent="0" marL="0">
+                        <a:buNone/>
+                      </a:pPr>
+                      <a:r>
+                        <a:rPr lang="en-US" sz="1250" dirty="0">
+                          <a:solidFill>
+                            <a:srgbClr val="444444"/>
+                          </a:solidFill>
+                          <a:latin typeface="Calibri" pitchFamily="34" charset="0"/>
+                          <a:ea typeface="Calibri" pitchFamily="34" charset="-122"/>
+                          <a:cs typeface="Calibri" pitchFamily="34" charset="-120"/>
+                        </a:rPr>
+                        <a:t>Enseignant</a:t>
+                      </a:r>
+                      <a:endParaRPr lang="en-US" sz="1250" dirty="0">
+                        <a:latin typeface="Calibri" charset="0"/>
+                        <a:ea typeface="Calibri" charset="0"/>
+                        <a:cs typeface="Calibri" charset="0"/>
+                      </a:endParaRPr>
+                    </a:p>
+                  </a:txBody>
+                  <a:tcPr marL="91440" marR="91440" marT="45720" marB="45720" anchor="ctr">
+                    <a:lnL w="12700" cap="flat" cmpd="sng" algn="ctr">
+                      <a:solidFill>
+                        <a:srgbClr val="DDDDDD"/>
+                      </a:solidFill>
+                      <a:prstDash val="solid"/>
+                      <a:round/>
+                      <a:headEnd type="none" w="med" len="med"/>
+                      <a:tailEnd type="none" w="med" len="med"/>
+                    </a:lnL>
+                    <a:lnR w="12700" cap="flat" cmpd="sng" algn="ctr">
+                      <a:solidFill>
+                        <a:srgbClr val="DDDDDD"/>
+                      </a:solidFill>
+                      <a:prstDash val="solid"/>
+                      <a:round/>
+                      <a:headEnd type="none" w="med" len="med"/>
+                      <a:tailEnd type="none" w="med" len="med"/>
+                    </a:lnR>
+                    <a:lnT w="12700" cap="flat" cmpd="sng" algn="ctr">
+                      <a:solidFill>
+                        <a:srgbClr val="DDDDDD"/>
+                      </a:solidFill>
+                      <a:prstDash val="solid"/>
+                      <a:round/>
+                      <a:headEnd type="none" w="med" len="med"/>
+                      <a:tailEnd type="none" w="med" len="med"/>
+                    </a:lnT>
+                    <a:lnB w="12700" cap="flat" cmpd="sng" algn="ctr">
+                      <a:solidFill>
+                        <a:srgbClr val="DDDDDD"/>
+                      </a:solidFill>
+                      <a:prstDash val="solid"/>
+                      <a:round/>
+                      <a:headEnd type="none" w="med" len="med"/>
+                      <a:tailEnd type="none" w="med" len="med"/>
+                    </a:lnB>
+                  </a:tcPr>
+                </a:tc>
+                <a:tc>
+                  <a:txBody>
+                    <a:bodyPr/>
+                    <a:lstStyle/>
+                    <a:p>
+                      <a:pPr indent="0" marL="0">
+                        <a:buNone/>
+                      </a:pPr>
+                      <a:r>
+                        <a:rPr lang="en-US" sz="1250" dirty="0">
+                          <a:solidFill>
+                            <a:srgbClr val="444444"/>
+                          </a:solidFill>
+                          <a:latin typeface="Calibri" pitchFamily="34" charset="0"/>
+                          <a:ea typeface="Calibri" pitchFamily="34" charset="-122"/>
+                          <a:cs typeface="Calibri" pitchFamily="34" charset="-120"/>
+                        </a:rPr>
+                        <a:t>Saisie des notes pour ses propres classes. Aucun accès à la gestion des élèves, aux admissions, aux finances, à la paie ni au personnel.</a:t>
+                      </a:r>
+                      <a:endParaRPr lang="en-US" sz="1250" dirty="0">
+                        <a:latin typeface="Calibri" charset="0"/>
+                        <a:ea typeface="Calibri" charset="0"/>
+                        <a:cs typeface="Calibri" charset="0"/>
+                      </a:endParaRPr>
+                    </a:p>
+                  </a:txBody>
+                  <a:tcPr marL="91440" marR="91440" marT="45720" marB="45720" anchor="ctr">
+                    <a:lnL w="12700" cap="flat" cmpd="sng" algn="ctr">
+                      <a:solidFill>
+                        <a:srgbClr val="DDDDDD"/>
+                      </a:solidFill>
+                      <a:prstDash val="solid"/>
+                      <a:round/>
+                      <a:headEnd type="none" w="med" len="med"/>
+                      <a:tailEnd type="none" w="med" len="med"/>
+                    </a:lnL>
+                    <a:lnR w="12700" cap="flat" cmpd="sng" algn="ctr">
+                      <a:solidFill>
+                        <a:srgbClr val="DDDDDD"/>
+                      </a:solidFill>
+                      <a:prstDash val="solid"/>
+                      <a:round/>
+                      <a:headEnd type="none" w="med" len="med"/>
+                      <a:tailEnd type="none" w="med" len="med"/>
+                    </a:lnR>
+                    <a:lnT w="12700" cap="flat" cmpd="sng" algn="ctr">
+                      <a:solidFill>
+                        <a:srgbClr val="DDDDDD"/>
+                      </a:solidFill>
+                      <a:prstDash val="solid"/>
+                      <a:round/>
+                      <a:headEnd type="none" w="med" len="med"/>
+                      <a:tailEnd type="none" w="med" len="med"/>
+                    </a:lnT>
+                    <a:lnB w="12700" cap="flat" cmpd="sng" algn="ctr">
+                      <a:solidFill>
+                        <a:srgbClr val="DDDDDD"/>
+                      </a:solidFill>
+                      <a:prstDash val="solid"/>
+                      <a:round/>
+                      <a:headEnd type="none" w="med" len="med"/>
+                      <a:tailEnd type="none" w="med" len="med"/>
+                    </a:lnB>
+                  </a:tcPr>
+                </a:tc>
+              </a:tr>
+              <a:tr h="868680">
+                <a:tc>
+                  <a:txBody>
+                    <a:bodyPr/>
+                    <a:lstStyle/>
+                    <a:p>
+                      <a:pPr indent="0" marL="0">
+                        <a:buNone/>
+                      </a:pPr>
+                      <a:r>
+                        <a:rPr lang="en-US" sz="1250" dirty="0">
+                          <a:solidFill>
+                            <a:srgbClr val="444444"/>
+                          </a:solidFill>
+                          <a:latin typeface="Calibri" pitchFamily="34" charset="0"/>
+                          <a:ea typeface="Calibri" pitchFamily="34" charset="-122"/>
+                          <a:cs typeface="Calibri" pitchFamily="34" charset="-120"/>
+                        </a:rPr>
+                        <a:t>Accès commun</a:t>
+                      </a:r>
+                      <a:endParaRPr lang="en-US" sz="1250" dirty="0">
+                        <a:latin typeface="Calibri" charset="0"/>
+                        <a:ea typeface="Calibri" charset="0"/>
+                        <a:cs typeface="Calibri" charset="0"/>
+                      </a:endParaRPr>
+                    </a:p>
+                    <a:p>
+                      <a:pPr indent="0" marL="0">
+                        <a:buNone/>
+                      </a:pPr>
+                      <a:r>
+                        <a:rPr lang="en-US" sz="1250" dirty="0">
+                          <a:solidFill>
+                            <a:srgbClr val="444444"/>
+                          </a:solidFill>
+                          <a:latin typeface="Calibri" pitchFamily="34" charset="0"/>
+                          <a:ea typeface="Calibri" pitchFamily="34" charset="-122"/>
+                          <a:cs typeface="Calibri" pitchFamily="34" charset="-120"/>
+                        </a:rPr>
+                        <a:t>(tous les rôles)</a:t>
+                      </a:r>
+                      <a:endParaRPr lang="en-US" sz="1250" dirty="0">
+                        <a:latin typeface="Calibri" charset="0"/>
+                        <a:ea typeface="Calibri" charset="0"/>
+                        <a:cs typeface="Calibri" charset="0"/>
+                      </a:endParaRPr>
+                    </a:p>
+                  </a:txBody>
+                  <a:tcPr marL="91440" marR="91440" marT="45720" marB="45720" anchor="ctr">
+                    <a:lnL w="12700" cap="flat" cmpd="sng" algn="ctr">
+                      <a:solidFill>
+                        <a:srgbClr val="DDDDDD"/>
+                      </a:solidFill>
+                      <a:prstDash val="solid"/>
+                      <a:round/>
+                      <a:headEnd type="none" w="med" len="med"/>
+                      <a:tailEnd type="none" w="med" len="med"/>
+                    </a:lnL>
+                    <a:lnR w="12700" cap="flat" cmpd="sng" algn="ctr">
+                      <a:solidFill>
+                        <a:srgbClr val="DDDDDD"/>
+                      </a:solidFill>
+                      <a:prstDash val="solid"/>
+                      <a:round/>
+                      <a:headEnd type="none" w="med" len="med"/>
+                      <a:tailEnd type="none" w="med" len="med"/>
+                    </a:lnR>
+                    <a:lnT w="12700" cap="flat" cmpd="sng" algn="ctr">
+                      <a:solidFill>
+                        <a:srgbClr val="DDDDDD"/>
+                      </a:solidFill>
+                      <a:prstDash val="solid"/>
+                      <a:round/>
+                      <a:headEnd type="none" w="med" len="med"/>
+                      <a:tailEnd type="none" w="med" len="med"/>
+                    </a:lnT>
+                    <a:lnB w="12700" cap="flat" cmpd="sng" algn="ctr">
+                      <a:solidFill>
+                        <a:srgbClr val="DDDDDD"/>
+                      </a:solidFill>
+                      <a:prstDash val="solid"/>
+                      <a:round/>
+                      <a:headEnd type="none" w="med" len="med"/>
+                      <a:tailEnd type="none" w="med" len="med"/>
+                    </a:lnB>
+                  </a:tcPr>
+                </a:tc>
+                <a:tc>
+                  <a:txBody>
+                    <a:bodyPr/>
+                    <a:lstStyle/>
+                    <a:p>
+                      <a:pPr indent="0" marL="0">
+                        <a:buNone/>
+                      </a:pPr>
+                      <a:r>
+                        <a:rPr lang="en-US" sz="1250" dirty="0">
+                          <a:solidFill>
+                            <a:srgbClr val="444444"/>
+                          </a:solidFill>
+                          <a:latin typeface="Calibri" pitchFamily="34" charset="0"/>
+                          <a:ea typeface="Calibri" pitchFamily="34" charset="-122"/>
+                          <a:cs typeface="Calibri" pitchFamily="34" charset="-120"/>
+                        </a:rPr>
+                        <a:t>Tableau de bord, appel du jour, historique d'absences, consultation de l'emploi du temps et du journal de communication : accessibles à tout compte connecté, quel que soit son rôle.</a:t>
+                      </a:r>
+                      <a:endParaRPr lang="en-US" sz="1250" dirty="0">
+                        <a:latin typeface="Calibri" charset="0"/>
+                        <a:ea typeface="Calibri" charset="0"/>
+                        <a:cs typeface="Calibri" charset="0"/>
+                      </a:endParaRPr>
+                    </a:p>
+                  </a:txBody>
+                  <a:tcPr marL="91440" marR="91440" marT="45720" marB="45720" anchor="ctr">
+                    <a:lnL w="12700" cap="flat" cmpd="sng" algn="ctr">
+                      <a:solidFill>
+                        <a:srgbClr val="DDDDDD"/>
+                      </a:solidFill>
+                      <a:prstDash val="solid"/>
+                      <a:round/>
+                      <a:headEnd type="none" w="med" len="med"/>
+                      <a:tailEnd type="none" w="med" len="med"/>
+                    </a:lnL>
+                    <a:lnR w="12700" cap="flat" cmpd="sng" algn="ctr">
+                      <a:solidFill>
+                        <a:srgbClr val="DDDDDD"/>
+                      </a:solidFill>
+                      <a:prstDash val="solid"/>
+                      <a:round/>
+                      <a:headEnd type="none" w="med" len="med"/>
+                      <a:tailEnd type="none" w="med" len="med"/>
+                    </a:lnR>
+                    <a:lnT w="12700" cap="flat" cmpd="sng" algn="ctr">
+                      <a:solidFill>
+                        <a:srgbClr val="DDDDDD"/>
+                      </a:solidFill>
+                      <a:prstDash val="solid"/>
+                      <a:round/>
+                      <a:headEnd type="none" w="med" len="med"/>
+                      <a:tailEnd type="none" w="med" len="med"/>
+                    </a:lnT>
+                    <a:lnB w="12700" cap="flat" cmpd="sng" algn="ctr">
+                      <a:solidFill>
+                        <a:srgbClr val="DDDDDD"/>
+                      </a:solidFill>
+                      <a:prstDash val="solid"/>
+                      <a:round/>
+                      <a:headEnd type="none" w="med" len="med"/>
+                      <a:tailEnd type="none" w="med" len="med"/>
+                    </a:lnB>
+                  </a:tcPr>
+                </a:tc>
+              </a:tr>
+            </a:tbl>
+          </a:graphicData>
+        </a:graphic>
+      </p:graphicFrame>
+      <p:sp>
+        <p:nvSpPr>
+          <p:cNvPr id="5" name="Shape 2"/>
+          <p:cNvSpPr/>
+          <p:nvPr/>
+        </p:nvSpPr>
+        <p:spPr>
+          <a:xfrm>
+            <a:off x="0" y="6537960"/>
+            <a:ext cx="12191695" cy="320040"/>
+          </a:xfrm>
+          <a:prstGeom prst="rect">
+            <a:avLst/>
+          </a:prstGeom>
+          <a:solidFill>
+            <a:srgbClr val="EAFBF6"/>
+          </a:solidFill>
+          <a:ln/>
+        </p:spPr>
+      </p:sp>
+      <p:sp>
+        <p:nvSpPr>
+          <p:cNvPr id="6" name="Text 3"/>
+          <p:cNvSpPr/>
+          <p:nvPr/>
+        </p:nvSpPr>
+        <p:spPr>
+          <a:xfrm>
+            <a:off x="365760" y="6537960"/>
+            <a:ext cx="5486400" cy="320040"/>
+          </a:xfrm>
+          <a:prstGeom prst="rect">
+            <a:avLst/>
+          </a:prstGeom>
+          <a:noFill/>
+          <a:ln/>
+        </p:spPr>
+        <p:txBody>
+          <a:bodyPr wrap="square" rtlCol="0" anchor="ctr"/>
+          <a:lstStyle/>
+          <a:p>
+            <a:pPr indent="0" marL="0">
+              <a:buNone/>
+            </a:pPr>
+            <a:r>
+              <a:rPr lang="en-US" sz="900" dirty="0">
+                <a:solidFill>
+                  <a:srgbClr val="0A7C63"/>
+                </a:solidFill>
+                <a:latin typeface="Calibri" pitchFamily="34" charset="0"/>
+                <a:ea typeface="Calibri" pitchFamily="34" charset="-122"/>
+                <a:cs typeface="Calibri" pitchFamily="34" charset="-120"/>
+              </a:rPr>
+              <a:t>Kalanso — Manuel d'utilisation</a:t>
+            </a:r>
+            <a:endParaRPr lang="en-US" sz="900" dirty="0"/>
+          </a:p>
+        </p:txBody>
+      </p:sp>
+      <p:sp>
+        <p:nvSpPr>
+          <p:cNvPr id="7" name="Text 4"/>
+          <p:cNvSpPr/>
+          <p:nvPr/>
+        </p:nvSpPr>
+        <p:spPr>
+          <a:xfrm>
+            <a:off x="11277295" y="6537960"/>
+            <a:ext cx="548640" cy="320040"/>
+          </a:xfrm>
+          <a:prstGeom prst="rect">
+            <a:avLst/>
+          </a:prstGeom>
+          <a:noFill/>
+          <a:ln/>
+        </p:spPr>
+        <p:txBody>
+          <a:bodyPr wrap="square" rtlCol="0" anchor="ctr"/>
+          <a:lstStyle/>
+          <a:p>
+            <a:pPr algn="r" indent="0" marL="0">
+              <a:buNone/>
+            </a:pPr>
+            <a:r>
+              <a:rPr lang="en-US" sz="900" dirty="0">
+                <a:solidFill>
+                  <a:srgbClr val="0A7C63"/>
+                </a:solidFill>
+                <a:latin typeface="Calibri" pitchFamily="34" charset="0"/>
+                <a:ea typeface="Calibri" pitchFamily="34" charset="-122"/>
+                <a:cs typeface="Calibri" pitchFamily="34" charset="-120"/>
+              </a:rPr>
+              <a:t>5</a:t>
+            </a:r>
+            <a:endParaRPr lang="en-US" sz="900" dirty="0"/>
+          </a:p>
+        </p:txBody>
+      </p:sp>
+    </p:spTree>
+  </p:cSld>
+  <p:clrMapOvr>
+    <a:masterClrMapping/>
+  </p:clrMapOvr>
+</p:sld>
+</file>
+
+<file path=ppt/slides/slide6.xml><?xml version="1.0" encoding="utf-8"?>
+<p:sld xmlns:a="http://schemas.openxmlformats.org/drawingml/2006/main" xmlns:r="http://schemas.openxmlformats.org/officeDocument/2006/relationships" xmlns:p="http://schemas.openxmlformats.org/presentationml/2006/main">
+  <p:cSld name="Slide 6">
+    <p:spTree>
+      <p:nvGrpSpPr>
+        <p:cNvPr id="1" name=""/>
+        <p:cNvGrpSpPr/>
+        <p:nvPr/>
+      </p:nvGrpSpPr>
+      <p:grpSpPr>
+        <a:xfrm>
+          <a:off x="0" y="0"/>
+          <a:ext cx="0" cy="0"/>
+          <a:chOff x="0" y="0"/>
+          <a:chExt cx="0" cy="0"/>
+        </a:xfrm>
+      </p:grpSpPr>
+      <p:sp>
+        <p:nvSpPr>
+          <p:cNvPr id="2" name="Shape 0"/>
+          <p:cNvSpPr/>
+          <p:nvPr/>
+        </p:nvSpPr>
+        <p:spPr>
+          <a:xfrm>
+            <a:off x="0" y="0"/>
+            <a:ext cx="12191695" cy="822960"/>
+          </a:xfrm>
+          <a:prstGeom prst="rect">
+            <a:avLst/>
+          </a:prstGeom>
+          <a:solidFill>
+            <a:srgbClr val="17AE89"/>
+          </a:solidFill>
+          <a:ln/>
+        </p:spPr>
+      </p:sp>
+      <p:sp>
+        <p:nvSpPr>
+          <p:cNvPr id="3" name="Text 1"/>
+          <p:cNvSpPr/>
+          <p:nvPr/>
+        </p:nvSpPr>
+        <p:spPr>
+          <a:xfrm>
+            <a:off x="457200" y="0"/>
+            <a:ext cx="11277295" cy="822960"/>
+          </a:xfrm>
+          <a:prstGeom prst="rect">
+            <a:avLst/>
+          </a:prstGeom>
+          <a:noFill/>
+          <a:ln/>
+        </p:spPr>
+        <p:txBody>
+          <a:bodyPr wrap="square" rtlCol="0" anchor="ctr"/>
+          <a:lstStyle/>
+          <a:p>
+            <a:pPr indent="0" marL="0">
+              <a:buNone/>
+            </a:pPr>
+            <a:r>
+              <a:rPr lang="en-US" sz="2600" b="1" dirty="0">
+                <a:solidFill>
+                  <a:srgbClr val="FFFFFF"/>
+                </a:solidFill>
+                <a:latin typeface="Calibri" pitchFamily="34" charset="0"/>
+                <a:ea typeface="Calibri" pitchFamily="34" charset="-122"/>
+                <a:cs typeface="Calibri" pitchFamily="34" charset="-120"/>
+              </a:rPr>
+              <a:t>Comptes de démonstration</a:t>
+            </a:r>
+            <a:endParaRPr lang="en-US" sz="2600" dirty="0"/>
+          </a:p>
+        </p:txBody>
+      </p:sp>
+      <p:sp>
+        <p:nvSpPr>
+          <p:cNvPr id="4" name="Text 2"/>
+          <p:cNvSpPr/>
+          <p:nvPr/>
+        </p:nvSpPr>
+        <p:spPr>
+          <a:xfrm>
+            <a:off x="457200" y="960120"/>
+            <a:ext cx="11277295" cy="457200"/>
+          </a:xfrm>
+          <a:prstGeom prst="rect">
+            <a:avLst/>
+          </a:prstGeom>
+          <a:noFill/>
+          <a:ln/>
+        </p:spPr>
+        <p:txBody>
+          <a:bodyPr wrap="square" rtlCol="0" anchor="ctr"/>
+          <a:lstStyle/>
+          <a:p>
+            <a:pPr indent="0" marL="0">
+              <a:buNone/>
+            </a:pPr>
+            <a:r>
+              <a:rPr lang="en-US" sz="1400" i="1" dirty="0">
+                <a:solidFill>
+                  <a:srgbClr val="6B6B6B"/>
+                </a:solidFill>
+                <a:latin typeface="Calibri" pitchFamily="34" charset="0"/>
+                <a:ea typeface="Calibri" pitchFamily="34" charset="-122"/>
+                <a:cs typeface="Calibri" pitchFamily="34" charset="-120"/>
+              </a:rPr>
+              <a:t>Un compte est disponible pour chaque rôle, afin de tester l'application du point de vue de chaque utilisateur.</a:t>
+            </a:r>
+            <a:endParaRPr lang="en-US" sz="1400" dirty="0"/>
+          </a:p>
+        </p:txBody>
+      </p:sp>
+      <p:graphicFrame>
+        <p:nvGraphicFramePr>
+          <p:cNvPr id="7" name="Table 0"/>
+          <p:cNvGraphicFramePr>
+            <a:graphicFrameLocks noGrp="1"/>
+          </p:cNvGraphicFramePr>
+          <p:nvPr>
+            <p:extLst>
+              <p:ext uri="{D42A27DB-BD31-4B8C-83A1-F6EECF244321}">
+                <p14:modId xmlns:p14="http://schemas.microsoft.com/office/powerpoint/2010/main" val="1579011935"/>
+              </p:ext>
+            </p:extLst>
+          </p:nvPr>
+        </p:nvGraphicFramePr>
+        <p:xfrm>
+          <a:off x="457200" y="1554480"/>
+          <a:ext cx="11277295" cy="3291840"/>
+        </p:xfrm>
+        <a:graphic>
+          <a:graphicData uri="http://schemas.openxmlformats.org/drawingml/2006/table">
+            <a:tbl>
+              <a:tblPr/>
+              <a:tblGrid>
+                <a:gridCol w="3017520"/>
+                <a:gridCol w="4572000"/>
+                <a:gridCol w="3687775"/>
               </a:tblGrid>
               <a:tr h="548640">
                 <a:tc>
@@ -13127,7 +14730,7 @@
                       </a:endParaRPr>
                     </a:p>
                   </a:txBody>
-                  <a:tcPr marL="91440" marR="91440" marT="45720" marB="45720">
+                  <a:tcPr marL="91440" marR="91440" marT="45720" marB="45720" anchor="ctr">
                     <a:lnL w="12700" cap="flat" cmpd="sng" algn="ctr">
                       <a:solidFill>
                         <a:srgbClr val="DDDDDD"/>
@@ -13186,7 +14789,7 @@
                           <a:ea typeface="Calibri" pitchFamily="34" charset="-122"/>
                           <a:cs typeface="Calibri" pitchFamily="34" charset="-120"/>
                         </a:rPr>
-                        <a:t>Accès principal</a:t>
+                        <a:t>Email</a:t>
                       </a:r>
                       <a:endParaRPr lang="en-US" sz="1400" dirty="0">
                         <a:latin typeface="Calibri" charset="0"/>
@@ -13195,7 +14798,75 @@
                       </a:endParaRPr>
                     </a:p>
                   </a:txBody>
-                  <a:tcPr marL="91440" marR="91440" marT="45720" marB="45720">
+                  <a:tcPr marL="91440" marR="91440" marT="45720" marB="45720" anchor="ctr">
+                    <a:lnL w="12700" cap="flat" cmpd="sng" algn="ctr">
+                      <a:solidFill>
+                        <a:srgbClr val="DDDDDD"/>
+                      </a:solidFill>
+                      <a:prstDash val="solid"/>
+                      <a:round/>
+                      <a:headEnd type="none" w="med" len="med"/>
+                      <a:tailEnd type="none" w="med" len="med"/>
+                    </a:lnL>
+                    <a:lnR w="12700" cap="flat" cmpd="sng" algn="ctr">
+                      <a:solidFill>
+                        <a:srgbClr val="DDDDDD"/>
+                      </a:solidFill>
+                      <a:prstDash val="solid"/>
+                      <a:round/>
+                      <a:headEnd type="none" w="med" len="med"/>
+                      <a:tailEnd type="none" w="med" len="med"/>
+                    </a:lnR>
+                    <a:lnT w="12700" cap="flat" cmpd="sng" algn="ctr">
+                      <a:solidFill>
+                        <a:srgbClr val="DDDDDD"/>
+                      </a:solidFill>
+                      <a:prstDash val="solid"/>
+                      <a:round/>
+                      <a:headEnd type="none" w="med" len="med"/>
+                      <a:tailEnd type="none" w="med" len="med"/>
+                    </a:lnT>
+                    <a:lnB w="12700" cap="flat" cmpd="sng" algn="ctr">
+                      <a:solidFill>
+                        <a:srgbClr val="DDDDDD"/>
+                      </a:solidFill>
+                      <a:prstDash val="solid"/>
+                      <a:round/>
+                      <a:headEnd type="none" w="med" len="med"/>
+                      <a:tailEnd type="none" w="med" len="med"/>
+                    </a:lnB>
+                    <a:solidFill>
+                      <a:srgbClr val="0A7C63"/>
+                    </a:solidFill>
+                  </a:tcPr>
+                </a:tc>
+                <a:tc>
+                  <a:txBody>
+                    <a:bodyPr/>
+                    <a:lstStyle/>
+                    <a:p>
+                      <a:pPr indent="0" marL="0">
+                        <a:buNone/>
+                      </a:pPr>
+                      <a:r>
+                        <a:rPr lang="en-US" sz="1400" b="1" dirty="0">
+                          <a:solidFill>
+                            <a:srgbClr val="FFFFFF"/>
+                          </a:solidFill>
+                          <a:latin typeface="Calibri" pitchFamily="34" charset="0"/>
+                          <a:ea typeface="Calibri" pitchFamily="34" charset="-122"/>
+                          <a:cs typeface="Calibri" pitchFamily="34" charset="-120"/>
+                        </a:rPr>
+                        <a:t>Mot de passe</a:t>
+                      </a:r>
+                      <a:endParaRPr lang="en-US" sz="1400" dirty="0">
+                        <a:latin typeface="Calibri" charset="0"/>
+                        <a:ea typeface="Calibri" charset="0"/>
+                        <a:cs typeface="Calibri" charset="0"/>
+                      </a:endParaRPr>
+                    </a:p>
+                  </a:txBody>
+                  <a:tcPr marL="91440" marR="91440" marT="45720" marB="45720" anchor="ctr">
                     <a:lnL w="12700" cap="flat" cmpd="sng" algn="ctr">
                       <a:solidFill>
                         <a:srgbClr val="DDDDDD"/>
@@ -13238,7 +14909,7 @@
                   </a:tcPr>
                 </a:tc>
               </a:tr>
-              <a:tr h="868680">
+              <a:tr h="548640">
                 <a:tc>
                   <a:txBody>
                     <a:bodyPr/>
@@ -13265,7 +14936,7 @@
                       </a:endParaRPr>
                     </a:p>
                   </a:txBody>
-                  <a:tcPr marL="91440" marR="91440" marT="45720" marB="45720">
+                  <a:tcPr marL="91440" marR="91440" marT="45720" marB="45720" anchor="ctr">
                     <a:lnL w="12700" cap="flat" cmpd="sng" algn="ctr">
                       <a:solidFill>
                         <a:srgbClr val="DDDDDD"/>
@@ -13321,7 +14992,7 @@
                           <a:ea typeface="Calibri" pitchFamily="34" charset="-122"/>
                           <a:cs typeface="Calibri" pitchFamily="34" charset="-120"/>
                         </a:rPr>
-                        <a:t>Accès total : tous les modules, tous les indicateurs financiers, gestion des rôles et de la configuration de l'école.</a:t>
+                        <a:t>fondateur@kalanso.gn</a:t>
                       </a:r>
                       <a:endParaRPr lang="en-US" sz="1400" dirty="0">
                         <a:latin typeface="Calibri" charset="0"/>
@@ -13330,74 +15001,7 @@
                       </a:endParaRPr>
                     </a:p>
                   </a:txBody>
-                  <a:tcPr marL="91440" marR="91440" marT="45720" marB="45720">
-                    <a:lnL w="12700" cap="flat" cmpd="sng" algn="ctr">
-                      <a:solidFill>
-                        <a:srgbClr val="DDDDDD"/>
-                      </a:solidFill>
-                      <a:prstDash val="solid"/>
-                      <a:round/>
-                      <a:headEnd type="none" w="med" len="med"/>
-                      <a:tailEnd type="none" w="med" len="med"/>
-                    </a:lnL>
-                    <a:lnR w="12700" cap="flat" cmpd="sng" algn="ctr">
-                      <a:solidFill>
-                        <a:srgbClr val="DDDDDD"/>
-                      </a:solidFill>
-                      <a:prstDash val="solid"/>
-                      <a:round/>
-                      <a:headEnd type="none" w="med" len="med"/>
-                      <a:tailEnd type="none" w="med" len="med"/>
-                    </a:lnR>
-                    <a:lnT w="12700" cap="flat" cmpd="sng" algn="ctr">
-                      <a:solidFill>
-                        <a:srgbClr val="DDDDDD"/>
-                      </a:solidFill>
-                      <a:prstDash val="solid"/>
-                      <a:round/>
-                      <a:headEnd type="none" w="med" len="med"/>
-                      <a:tailEnd type="none" w="med" len="med"/>
-                    </a:lnT>
-                    <a:lnB w="12700" cap="flat" cmpd="sng" algn="ctr">
-                      <a:solidFill>
-                        <a:srgbClr val="DDDDDD"/>
-                      </a:solidFill>
-                      <a:prstDash val="solid"/>
-                      <a:round/>
-                      <a:headEnd type="none" w="med" len="med"/>
-                      <a:tailEnd type="none" w="med" len="med"/>
-                    </a:lnB>
-                  </a:tcPr>
-                </a:tc>
-              </a:tr>
-              <a:tr h="868680">
-                <a:tc>
-                  <a:txBody>
-                    <a:bodyPr/>
-                    <a:lstStyle/>
-                    <a:p>
-                      <a:pPr indent="0" marL="0">
-                        <a:buNone/>
-                      </a:pPr>
-                      <a:r>
-                        <a:rPr lang="en-US" sz="1400" dirty="0">
-                          <a:solidFill>
-                            <a:srgbClr val="444444"/>
-                          </a:solidFill>
-                          <a:latin typeface="Calibri" pitchFamily="34" charset="0"/>
-                          <a:ea typeface="Calibri" pitchFamily="34" charset="-122"/>
-                          <a:cs typeface="Calibri" pitchFamily="34" charset="-120"/>
-                        </a:rPr>
-                        <a:t>Chef d'établissement</a:t>
-                      </a:r>
-                      <a:endParaRPr lang="en-US" sz="1400" dirty="0">
-                        <a:latin typeface="Calibri" charset="0"/>
-                        <a:ea typeface="Calibri" charset="0"/>
-                        <a:cs typeface="Calibri" charset="0"/>
-                      </a:endParaRPr>
-                    </a:p>
-                  </a:txBody>
-                  <a:tcPr marL="91440" marR="91440" marT="45720" marB="45720">
+                  <a:tcPr marL="91440" marR="91440" marT="45720" marB="45720" anchor="ctr">
                     <a:lnL w="12700" cap="flat" cmpd="sng" algn="ctr">
                       <a:solidFill>
                         <a:srgbClr val="DDDDDD"/>
@@ -13453,7 +15057,7 @@
                           <a:ea typeface="Calibri" pitchFamily="34" charset="-122"/>
                           <a:cs typeface="Calibri" pitchFamily="34" charset="-120"/>
                         </a:rPr>
-                        <a:t>Accès quasi complet au quotidien pédagogique et administratif (élèves, classes, personnel, finances, communication).</a:t>
+                        <a:t>kalanso2026</a:t>
                       </a:r>
                       <a:endParaRPr lang="en-US" sz="1400" dirty="0">
                         <a:latin typeface="Calibri" charset="0"/>
@@ -13462,7 +15066,7 @@
                       </a:endParaRPr>
                     </a:p>
                   </a:txBody>
-                  <a:tcPr marL="91440" marR="91440" marT="45720" marB="45720">
+                  <a:tcPr marL="91440" marR="91440" marT="45720" marB="45720" anchor="ctr">
                     <a:lnL w="12700" cap="flat" cmpd="sng" algn="ctr">
                       <a:solidFill>
                         <a:srgbClr val="DDDDDD"/>
@@ -13502,7 +15106,7 @@
                   </a:tcPr>
                 </a:tc>
               </a:tr>
-              <a:tr h="777240">
+              <a:tr h="548640">
                 <a:tc>
                   <a:txBody>
                     <a:bodyPr/>
@@ -13520,7 +15124,7 @@
                           <a:ea typeface="Calibri" pitchFamily="34" charset="-122"/>
                           <a:cs typeface="Calibri" pitchFamily="34" charset="-120"/>
                         </a:rPr>
-                        <a:t>Secrétaire</a:t>
+                        <a:t>Chef d'établissement</a:t>
                       </a:r>
                       <a:endParaRPr lang="en-US" sz="1400" dirty="0">
                         <a:latin typeface="Calibri" charset="0"/>
@@ -13529,7 +15133,7 @@
                       </a:endParaRPr>
                     </a:p>
                   </a:txBody>
-                  <a:tcPr marL="91440" marR="91440" marT="45720" marB="45720">
+                  <a:tcPr marL="91440" marR="91440" marT="45720" marB="45720" anchor="ctr">
                     <a:lnL w="12700" cap="flat" cmpd="sng" algn="ctr">
                       <a:solidFill>
                         <a:srgbClr val="DDDDDD"/>
@@ -13585,7 +15189,7 @@
                           <a:ea typeface="Calibri" pitchFamily="34" charset="-122"/>
                           <a:cs typeface="Calibri" pitchFamily="34" charset="-120"/>
                         </a:rPr>
-                        <a:t>Admissions, élèves, classes, communication — la gestion administrative du quotidien.</a:t>
+                        <a:t>chef@kalanso.gn</a:t>
                       </a:r>
                       <a:endParaRPr lang="en-US" sz="1400" dirty="0">
                         <a:latin typeface="Calibri" charset="0"/>
@@ -13594,74 +15198,7 @@
                       </a:endParaRPr>
                     </a:p>
                   </a:txBody>
-                  <a:tcPr marL="91440" marR="91440" marT="45720" marB="45720">
-                    <a:lnL w="12700" cap="flat" cmpd="sng" algn="ctr">
-                      <a:solidFill>
-                        <a:srgbClr val="DDDDDD"/>
-                      </a:solidFill>
-                      <a:prstDash val="solid"/>
-                      <a:round/>
-                      <a:headEnd type="none" w="med" len="med"/>
-                      <a:tailEnd type="none" w="med" len="med"/>
-                    </a:lnL>
-                    <a:lnR w="12700" cap="flat" cmpd="sng" algn="ctr">
-                      <a:solidFill>
-                        <a:srgbClr val="DDDDDD"/>
-                      </a:solidFill>
-                      <a:prstDash val="solid"/>
-                      <a:round/>
-                      <a:headEnd type="none" w="med" len="med"/>
-                      <a:tailEnd type="none" w="med" len="med"/>
-                    </a:lnR>
-                    <a:lnT w="12700" cap="flat" cmpd="sng" algn="ctr">
-                      <a:solidFill>
-                        <a:srgbClr val="DDDDDD"/>
-                      </a:solidFill>
-                      <a:prstDash val="solid"/>
-                      <a:round/>
-                      <a:headEnd type="none" w="med" len="med"/>
-                      <a:tailEnd type="none" w="med" len="med"/>
-                    </a:lnT>
-                    <a:lnB w="12700" cap="flat" cmpd="sng" algn="ctr">
-                      <a:solidFill>
-                        <a:srgbClr val="DDDDDD"/>
-                      </a:solidFill>
-                      <a:prstDash val="solid"/>
-                      <a:round/>
-                      <a:headEnd type="none" w="med" len="med"/>
-                      <a:tailEnd type="none" w="med" len="med"/>
-                    </a:lnB>
-                  </a:tcPr>
-                </a:tc>
-              </a:tr>
-              <a:tr h="777240">
-                <a:tc>
-                  <a:txBody>
-                    <a:bodyPr/>
-                    <a:lstStyle/>
-                    <a:p>
-                      <a:pPr indent="0" marL="0">
-                        <a:buNone/>
-                      </a:pPr>
-                      <a:r>
-                        <a:rPr lang="en-US" sz="1400" dirty="0">
-                          <a:solidFill>
-                            <a:srgbClr val="444444"/>
-                          </a:solidFill>
-                          <a:latin typeface="Calibri" pitchFamily="34" charset="0"/>
-                          <a:ea typeface="Calibri" pitchFamily="34" charset="-122"/>
-                          <a:cs typeface="Calibri" pitchFamily="34" charset="-120"/>
-                        </a:rPr>
-                        <a:t>Comptable</a:t>
-                      </a:r>
-                      <a:endParaRPr lang="en-US" sz="1400" dirty="0">
-                        <a:latin typeface="Calibri" charset="0"/>
-                        <a:ea typeface="Calibri" charset="0"/>
-                        <a:cs typeface="Calibri" charset="0"/>
-                      </a:endParaRPr>
-                    </a:p>
-                  </a:txBody>
-                  <a:tcPr marL="91440" marR="91440" marT="45720" marB="45720">
+                  <a:tcPr marL="91440" marR="91440" marT="45720" marB="45720" anchor="ctr">
                     <a:lnL w="12700" cap="flat" cmpd="sng" algn="ctr">
                       <a:solidFill>
                         <a:srgbClr val="DDDDDD"/>
@@ -13717,7 +15254,7 @@
                           <a:ea typeface="Calibri" pitchFamily="34" charset="-122"/>
                           <a:cs typeface="Calibri" pitchFamily="34" charset="-120"/>
                         </a:rPr>
-                        <a:t>Finances : tarifs, factures, paiements, paie, bilan financier.</a:t>
+                        <a:t>kalanso2026</a:t>
                       </a:r>
                       <a:endParaRPr lang="en-US" sz="1400" dirty="0">
                         <a:latin typeface="Calibri" charset="0"/>
@@ -13726,7 +15263,7 @@
                       </a:endParaRPr>
                     </a:p>
                   </a:txBody>
-                  <a:tcPr marL="91440" marR="91440" marT="45720" marB="45720">
+                  <a:tcPr marL="91440" marR="91440" marT="45720" marB="45720" anchor="ctr">
                     <a:lnL w="12700" cap="flat" cmpd="sng" algn="ctr">
                       <a:solidFill>
                         <a:srgbClr val="DDDDDD"/>
@@ -13766,7 +15303,7 @@
                   </a:tcPr>
                 </a:tc>
               </a:tr>
-              <a:tr h="868680">
+              <a:tr h="548640">
                 <a:tc>
                   <a:txBody>
                     <a:bodyPr/>
@@ -13784,7 +15321,7 @@
                           <a:ea typeface="Calibri" pitchFamily="34" charset="-122"/>
                           <a:cs typeface="Calibri" pitchFamily="34" charset="-120"/>
                         </a:rPr>
-                        <a:t>Enseignant</a:t>
+                        <a:t>Secrétaire</a:t>
                       </a:r>
                       <a:endParaRPr lang="en-US" sz="1400" dirty="0">
                         <a:latin typeface="Calibri" charset="0"/>
@@ -13793,7 +15330,7 @@
                       </a:endParaRPr>
                     </a:p>
                   </a:txBody>
-                  <a:tcPr marL="91440" marR="91440" marT="45720" marB="45720">
+                  <a:tcPr marL="91440" marR="91440" marT="45720" marB="45720" anchor="ctr">
                     <a:lnL w="12700" cap="flat" cmpd="sng" algn="ctr">
                       <a:solidFill>
                         <a:srgbClr val="DDDDDD"/>
@@ -13849,7 +15386,7 @@
                           <a:ea typeface="Calibri" pitchFamily="34" charset="-122"/>
                           <a:cs typeface="Calibri" pitchFamily="34" charset="-120"/>
                         </a:rPr>
-                        <a:t>Notes de ses classes, appel du jour, emploi du temps — accès en lecture sur les élèves de ses classes.</a:t>
+                        <a:t>secretaire@kalanso.gn</a:t>
                       </a:r>
                       <a:endParaRPr lang="en-US" sz="1400" dirty="0">
                         <a:latin typeface="Calibri" charset="0"/>
@@ -13858,7 +15395,466 @@
                       </a:endParaRPr>
                     </a:p>
                   </a:txBody>
-                  <a:tcPr marL="91440" marR="91440" marT="45720" marB="45720">
+                  <a:tcPr marL="91440" marR="91440" marT="45720" marB="45720" anchor="ctr">
+                    <a:lnL w="12700" cap="flat" cmpd="sng" algn="ctr">
+                      <a:solidFill>
+                        <a:srgbClr val="DDDDDD"/>
+                      </a:solidFill>
+                      <a:prstDash val="solid"/>
+                      <a:round/>
+                      <a:headEnd type="none" w="med" len="med"/>
+                      <a:tailEnd type="none" w="med" len="med"/>
+                    </a:lnL>
+                    <a:lnR w="12700" cap="flat" cmpd="sng" algn="ctr">
+                      <a:solidFill>
+                        <a:srgbClr val="DDDDDD"/>
+                      </a:solidFill>
+                      <a:prstDash val="solid"/>
+                      <a:round/>
+                      <a:headEnd type="none" w="med" len="med"/>
+                      <a:tailEnd type="none" w="med" len="med"/>
+                    </a:lnR>
+                    <a:lnT w="12700" cap="flat" cmpd="sng" algn="ctr">
+                      <a:solidFill>
+                        <a:srgbClr val="DDDDDD"/>
+                      </a:solidFill>
+                      <a:prstDash val="solid"/>
+                      <a:round/>
+                      <a:headEnd type="none" w="med" len="med"/>
+                      <a:tailEnd type="none" w="med" len="med"/>
+                    </a:lnT>
+                    <a:lnB w="12700" cap="flat" cmpd="sng" algn="ctr">
+                      <a:solidFill>
+                        <a:srgbClr val="DDDDDD"/>
+                      </a:solidFill>
+                      <a:prstDash val="solid"/>
+                      <a:round/>
+                      <a:headEnd type="none" w="med" len="med"/>
+                      <a:tailEnd type="none" w="med" len="med"/>
+                    </a:lnB>
+                  </a:tcPr>
+                </a:tc>
+                <a:tc>
+                  <a:txBody>
+                    <a:bodyPr/>
+                    <a:lstStyle/>
+                    <a:p>
+                      <a:pPr indent="0" marL="0">
+                        <a:buNone/>
+                      </a:pPr>
+                      <a:r>
+                        <a:rPr lang="en-US" sz="1400" dirty="0">
+                          <a:solidFill>
+                            <a:srgbClr val="444444"/>
+                          </a:solidFill>
+                          <a:latin typeface="Calibri" pitchFamily="34" charset="0"/>
+                          <a:ea typeface="Calibri" pitchFamily="34" charset="-122"/>
+                          <a:cs typeface="Calibri" pitchFamily="34" charset="-120"/>
+                        </a:rPr>
+                        <a:t>kalanso2026</a:t>
+                      </a:r>
+                      <a:endParaRPr lang="en-US" sz="1400" dirty="0">
+                        <a:latin typeface="Calibri" charset="0"/>
+                        <a:ea typeface="Calibri" charset="0"/>
+                        <a:cs typeface="Calibri" charset="0"/>
+                      </a:endParaRPr>
+                    </a:p>
+                  </a:txBody>
+                  <a:tcPr marL="91440" marR="91440" marT="45720" marB="45720" anchor="ctr">
+                    <a:lnL w="12700" cap="flat" cmpd="sng" algn="ctr">
+                      <a:solidFill>
+                        <a:srgbClr val="DDDDDD"/>
+                      </a:solidFill>
+                      <a:prstDash val="solid"/>
+                      <a:round/>
+                      <a:headEnd type="none" w="med" len="med"/>
+                      <a:tailEnd type="none" w="med" len="med"/>
+                    </a:lnL>
+                    <a:lnR w="12700" cap="flat" cmpd="sng" algn="ctr">
+                      <a:solidFill>
+                        <a:srgbClr val="DDDDDD"/>
+                      </a:solidFill>
+                      <a:prstDash val="solid"/>
+                      <a:round/>
+                      <a:headEnd type="none" w="med" len="med"/>
+                      <a:tailEnd type="none" w="med" len="med"/>
+                    </a:lnR>
+                    <a:lnT w="12700" cap="flat" cmpd="sng" algn="ctr">
+                      <a:solidFill>
+                        <a:srgbClr val="DDDDDD"/>
+                      </a:solidFill>
+                      <a:prstDash val="solid"/>
+                      <a:round/>
+                      <a:headEnd type="none" w="med" len="med"/>
+                      <a:tailEnd type="none" w="med" len="med"/>
+                    </a:lnT>
+                    <a:lnB w="12700" cap="flat" cmpd="sng" algn="ctr">
+                      <a:solidFill>
+                        <a:srgbClr val="DDDDDD"/>
+                      </a:solidFill>
+                      <a:prstDash val="solid"/>
+                      <a:round/>
+                      <a:headEnd type="none" w="med" len="med"/>
+                      <a:tailEnd type="none" w="med" len="med"/>
+                    </a:lnB>
+                  </a:tcPr>
+                </a:tc>
+              </a:tr>
+              <a:tr h="548640">
+                <a:tc>
+                  <a:txBody>
+                    <a:bodyPr/>
+                    <a:lstStyle/>
+                    <a:p>
+                      <a:pPr indent="0" marL="0">
+                        <a:buNone/>
+                      </a:pPr>
+                      <a:r>
+                        <a:rPr lang="en-US" sz="1400" dirty="0">
+                          <a:solidFill>
+                            <a:srgbClr val="444444"/>
+                          </a:solidFill>
+                          <a:latin typeface="Calibri" pitchFamily="34" charset="0"/>
+                          <a:ea typeface="Calibri" pitchFamily="34" charset="-122"/>
+                          <a:cs typeface="Calibri" pitchFamily="34" charset="-120"/>
+                        </a:rPr>
+                        <a:t>Comptable</a:t>
+                      </a:r>
+                      <a:endParaRPr lang="en-US" sz="1400" dirty="0">
+                        <a:latin typeface="Calibri" charset="0"/>
+                        <a:ea typeface="Calibri" charset="0"/>
+                        <a:cs typeface="Calibri" charset="0"/>
+                      </a:endParaRPr>
+                    </a:p>
+                  </a:txBody>
+                  <a:tcPr marL="91440" marR="91440" marT="45720" marB="45720" anchor="ctr">
+                    <a:lnL w="12700" cap="flat" cmpd="sng" algn="ctr">
+                      <a:solidFill>
+                        <a:srgbClr val="DDDDDD"/>
+                      </a:solidFill>
+                      <a:prstDash val="solid"/>
+                      <a:round/>
+                      <a:headEnd type="none" w="med" len="med"/>
+                      <a:tailEnd type="none" w="med" len="med"/>
+                    </a:lnL>
+                    <a:lnR w="12700" cap="flat" cmpd="sng" algn="ctr">
+                      <a:solidFill>
+                        <a:srgbClr val="DDDDDD"/>
+                      </a:solidFill>
+                      <a:prstDash val="solid"/>
+                      <a:round/>
+                      <a:headEnd type="none" w="med" len="med"/>
+                      <a:tailEnd type="none" w="med" len="med"/>
+                    </a:lnR>
+                    <a:lnT w="12700" cap="flat" cmpd="sng" algn="ctr">
+                      <a:solidFill>
+                        <a:srgbClr val="DDDDDD"/>
+                      </a:solidFill>
+                      <a:prstDash val="solid"/>
+                      <a:round/>
+                      <a:headEnd type="none" w="med" len="med"/>
+                      <a:tailEnd type="none" w="med" len="med"/>
+                    </a:lnT>
+                    <a:lnB w="12700" cap="flat" cmpd="sng" algn="ctr">
+                      <a:solidFill>
+                        <a:srgbClr val="DDDDDD"/>
+                      </a:solidFill>
+                      <a:prstDash val="solid"/>
+                      <a:round/>
+                      <a:headEnd type="none" w="med" len="med"/>
+                      <a:tailEnd type="none" w="med" len="med"/>
+                    </a:lnB>
+                  </a:tcPr>
+                </a:tc>
+                <a:tc>
+                  <a:txBody>
+                    <a:bodyPr/>
+                    <a:lstStyle/>
+                    <a:p>
+                      <a:pPr indent="0" marL="0">
+                        <a:buNone/>
+                      </a:pPr>
+                      <a:r>
+                        <a:rPr lang="en-US" sz="1400" dirty="0">
+                          <a:solidFill>
+                            <a:srgbClr val="444444"/>
+                          </a:solidFill>
+                          <a:latin typeface="Calibri" pitchFamily="34" charset="0"/>
+                          <a:ea typeface="Calibri" pitchFamily="34" charset="-122"/>
+                          <a:cs typeface="Calibri" pitchFamily="34" charset="-120"/>
+                        </a:rPr>
+                        <a:t>comptable@kalanso.gn</a:t>
+                      </a:r>
+                      <a:endParaRPr lang="en-US" sz="1400" dirty="0">
+                        <a:latin typeface="Calibri" charset="0"/>
+                        <a:ea typeface="Calibri" charset="0"/>
+                        <a:cs typeface="Calibri" charset="0"/>
+                      </a:endParaRPr>
+                    </a:p>
+                  </a:txBody>
+                  <a:tcPr marL="91440" marR="91440" marT="45720" marB="45720" anchor="ctr">
+                    <a:lnL w="12700" cap="flat" cmpd="sng" algn="ctr">
+                      <a:solidFill>
+                        <a:srgbClr val="DDDDDD"/>
+                      </a:solidFill>
+                      <a:prstDash val="solid"/>
+                      <a:round/>
+                      <a:headEnd type="none" w="med" len="med"/>
+                      <a:tailEnd type="none" w="med" len="med"/>
+                    </a:lnL>
+                    <a:lnR w="12700" cap="flat" cmpd="sng" algn="ctr">
+                      <a:solidFill>
+                        <a:srgbClr val="DDDDDD"/>
+                      </a:solidFill>
+                      <a:prstDash val="solid"/>
+                      <a:round/>
+                      <a:headEnd type="none" w="med" len="med"/>
+                      <a:tailEnd type="none" w="med" len="med"/>
+                    </a:lnR>
+                    <a:lnT w="12700" cap="flat" cmpd="sng" algn="ctr">
+                      <a:solidFill>
+                        <a:srgbClr val="DDDDDD"/>
+                      </a:solidFill>
+                      <a:prstDash val="solid"/>
+                      <a:round/>
+                      <a:headEnd type="none" w="med" len="med"/>
+                      <a:tailEnd type="none" w="med" len="med"/>
+                    </a:lnT>
+                    <a:lnB w="12700" cap="flat" cmpd="sng" algn="ctr">
+                      <a:solidFill>
+                        <a:srgbClr val="DDDDDD"/>
+                      </a:solidFill>
+                      <a:prstDash val="solid"/>
+                      <a:round/>
+                      <a:headEnd type="none" w="med" len="med"/>
+                      <a:tailEnd type="none" w="med" len="med"/>
+                    </a:lnB>
+                  </a:tcPr>
+                </a:tc>
+                <a:tc>
+                  <a:txBody>
+                    <a:bodyPr/>
+                    <a:lstStyle/>
+                    <a:p>
+                      <a:pPr indent="0" marL="0">
+                        <a:buNone/>
+                      </a:pPr>
+                      <a:r>
+                        <a:rPr lang="en-US" sz="1400" dirty="0">
+                          <a:solidFill>
+                            <a:srgbClr val="444444"/>
+                          </a:solidFill>
+                          <a:latin typeface="Calibri" pitchFamily="34" charset="0"/>
+                          <a:ea typeface="Calibri" pitchFamily="34" charset="-122"/>
+                          <a:cs typeface="Calibri" pitchFamily="34" charset="-120"/>
+                        </a:rPr>
+                        <a:t>kalanso2026</a:t>
+                      </a:r>
+                      <a:endParaRPr lang="en-US" sz="1400" dirty="0">
+                        <a:latin typeface="Calibri" charset="0"/>
+                        <a:ea typeface="Calibri" charset="0"/>
+                        <a:cs typeface="Calibri" charset="0"/>
+                      </a:endParaRPr>
+                    </a:p>
+                  </a:txBody>
+                  <a:tcPr marL="91440" marR="91440" marT="45720" marB="45720" anchor="ctr">
+                    <a:lnL w="12700" cap="flat" cmpd="sng" algn="ctr">
+                      <a:solidFill>
+                        <a:srgbClr val="DDDDDD"/>
+                      </a:solidFill>
+                      <a:prstDash val="solid"/>
+                      <a:round/>
+                      <a:headEnd type="none" w="med" len="med"/>
+                      <a:tailEnd type="none" w="med" len="med"/>
+                    </a:lnL>
+                    <a:lnR w="12700" cap="flat" cmpd="sng" algn="ctr">
+                      <a:solidFill>
+                        <a:srgbClr val="DDDDDD"/>
+                      </a:solidFill>
+                      <a:prstDash val="solid"/>
+                      <a:round/>
+                      <a:headEnd type="none" w="med" len="med"/>
+                      <a:tailEnd type="none" w="med" len="med"/>
+                    </a:lnR>
+                    <a:lnT w="12700" cap="flat" cmpd="sng" algn="ctr">
+                      <a:solidFill>
+                        <a:srgbClr val="DDDDDD"/>
+                      </a:solidFill>
+                      <a:prstDash val="solid"/>
+                      <a:round/>
+                      <a:headEnd type="none" w="med" len="med"/>
+                      <a:tailEnd type="none" w="med" len="med"/>
+                    </a:lnT>
+                    <a:lnB w="12700" cap="flat" cmpd="sng" algn="ctr">
+                      <a:solidFill>
+                        <a:srgbClr val="DDDDDD"/>
+                      </a:solidFill>
+                      <a:prstDash val="solid"/>
+                      <a:round/>
+                      <a:headEnd type="none" w="med" len="med"/>
+                      <a:tailEnd type="none" w="med" len="med"/>
+                    </a:lnB>
+                  </a:tcPr>
+                </a:tc>
+              </a:tr>
+              <a:tr h="548640">
+                <a:tc>
+                  <a:txBody>
+                    <a:bodyPr/>
+                    <a:lstStyle/>
+                    <a:p>
+                      <a:pPr indent="0" marL="0">
+                        <a:buNone/>
+                      </a:pPr>
+                      <a:r>
+                        <a:rPr lang="en-US" sz="1400" dirty="0">
+                          <a:solidFill>
+                            <a:srgbClr val="444444"/>
+                          </a:solidFill>
+                          <a:latin typeface="Calibri" pitchFamily="34" charset="0"/>
+                          <a:ea typeface="Calibri" pitchFamily="34" charset="-122"/>
+                          <a:cs typeface="Calibri" pitchFamily="34" charset="-120"/>
+                        </a:rPr>
+                        <a:t>Enseignant</a:t>
+                      </a:r>
+                      <a:endParaRPr lang="en-US" sz="1400" dirty="0">
+                        <a:latin typeface="Calibri" charset="0"/>
+                        <a:ea typeface="Calibri" charset="0"/>
+                        <a:cs typeface="Calibri" charset="0"/>
+                      </a:endParaRPr>
+                    </a:p>
+                  </a:txBody>
+                  <a:tcPr marL="91440" marR="91440" marT="45720" marB="45720" anchor="ctr">
+                    <a:lnL w="12700" cap="flat" cmpd="sng" algn="ctr">
+                      <a:solidFill>
+                        <a:srgbClr val="DDDDDD"/>
+                      </a:solidFill>
+                      <a:prstDash val="solid"/>
+                      <a:round/>
+                      <a:headEnd type="none" w="med" len="med"/>
+                      <a:tailEnd type="none" w="med" len="med"/>
+                    </a:lnL>
+                    <a:lnR w="12700" cap="flat" cmpd="sng" algn="ctr">
+                      <a:solidFill>
+                        <a:srgbClr val="DDDDDD"/>
+                      </a:solidFill>
+                      <a:prstDash val="solid"/>
+                      <a:round/>
+                      <a:headEnd type="none" w="med" len="med"/>
+                      <a:tailEnd type="none" w="med" len="med"/>
+                    </a:lnR>
+                    <a:lnT w="12700" cap="flat" cmpd="sng" algn="ctr">
+                      <a:solidFill>
+                        <a:srgbClr val="DDDDDD"/>
+                      </a:solidFill>
+                      <a:prstDash val="solid"/>
+                      <a:round/>
+                      <a:headEnd type="none" w="med" len="med"/>
+                      <a:tailEnd type="none" w="med" len="med"/>
+                    </a:lnT>
+                    <a:lnB w="12700" cap="flat" cmpd="sng" algn="ctr">
+                      <a:solidFill>
+                        <a:srgbClr val="DDDDDD"/>
+                      </a:solidFill>
+                      <a:prstDash val="solid"/>
+                      <a:round/>
+                      <a:headEnd type="none" w="med" len="med"/>
+                      <a:tailEnd type="none" w="med" len="med"/>
+                    </a:lnB>
+                  </a:tcPr>
+                </a:tc>
+                <a:tc>
+                  <a:txBody>
+                    <a:bodyPr/>
+                    <a:lstStyle/>
+                    <a:p>
+                      <a:pPr indent="0" marL="0">
+                        <a:buNone/>
+                      </a:pPr>
+                      <a:r>
+                        <a:rPr lang="en-US" sz="1400" dirty="0">
+                          <a:solidFill>
+                            <a:srgbClr val="444444"/>
+                          </a:solidFill>
+                          <a:latin typeface="Calibri" pitchFamily="34" charset="0"/>
+                          <a:ea typeface="Calibri" pitchFamily="34" charset="-122"/>
+                          <a:cs typeface="Calibri" pitchFamily="34" charset="-120"/>
+                        </a:rPr>
+                        <a:t>enseignant@kalanso.gn</a:t>
+                      </a:r>
+                      <a:endParaRPr lang="en-US" sz="1400" dirty="0">
+                        <a:latin typeface="Calibri" charset="0"/>
+                        <a:ea typeface="Calibri" charset="0"/>
+                        <a:cs typeface="Calibri" charset="0"/>
+                      </a:endParaRPr>
+                    </a:p>
+                  </a:txBody>
+                  <a:tcPr marL="91440" marR="91440" marT="45720" marB="45720" anchor="ctr">
+                    <a:lnL w="12700" cap="flat" cmpd="sng" algn="ctr">
+                      <a:solidFill>
+                        <a:srgbClr val="DDDDDD"/>
+                      </a:solidFill>
+                      <a:prstDash val="solid"/>
+                      <a:round/>
+                      <a:headEnd type="none" w="med" len="med"/>
+                      <a:tailEnd type="none" w="med" len="med"/>
+                    </a:lnL>
+                    <a:lnR w="12700" cap="flat" cmpd="sng" algn="ctr">
+                      <a:solidFill>
+                        <a:srgbClr val="DDDDDD"/>
+                      </a:solidFill>
+                      <a:prstDash val="solid"/>
+                      <a:round/>
+                      <a:headEnd type="none" w="med" len="med"/>
+                      <a:tailEnd type="none" w="med" len="med"/>
+                    </a:lnR>
+                    <a:lnT w="12700" cap="flat" cmpd="sng" algn="ctr">
+                      <a:solidFill>
+                        <a:srgbClr val="DDDDDD"/>
+                      </a:solidFill>
+                      <a:prstDash val="solid"/>
+                      <a:round/>
+                      <a:headEnd type="none" w="med" len="med"/>
+                      <a:tailEnd type="none" w="med" len="med"/>
+                    </a:lnT>
+                    <a:lnB w="12700" cap="flat" cmpd="sng" algn="ctr">
+                      <a:solidFill>
+                        <a:srgbClr val="DDDDDD"/>
+                      </a:solidFill>
+                      <a:prstDash val="solid"/>
+                      <a:round/>
+                      <a:headEnd type="none" w="med" len="med"/>
+                      <a:tailEnd type="none" w="med" len="med"/>
+                    </a:lnB>
+                  </a:tcPr>
+                </a:tc>
+                <a:tc>
+                  <a:txBody>
+                    <a:bodyPr/>
+                    <a:lstStyle/>
+                    <a:p>
+                      <a:pPr indent="0" marL="0">
+                        <a:buNone/>
+                      </a:pPr>
+                      <a:r>
+                        <a:rPr lang="en-US" sz="1400" dirty="0">
+                          <a:solidFill>
+                            <a:srgbClr val="444444"/>
+                          </a:solidFill>
+                          <a:latin typeface="Calibri" pitchFamily="34" charset="0"/>
+                          <a:ea typeface="Calibri" pitchFamily="34" charset="-122"/>
+                          <a:cs typeface="Calibri" pitchFamily="34" charset="-120"/>
+                        </a:rPr>
+                        <a:t>kalanso2026</a:t>
+                      </a:r>
+                      <a:endParaRPr lang="en-US" sz="1400" dirty="0">
+                        <a:latin typeface="Calibri" charset="0"/>
+                        <a:ea typeface="Calibri" charset="0"/>
+                        <a:cs typeface="Calibri" charset="0"/>
+                      </a:endParaRPr>
+                    </a:p>
+                  </a:txBody>
+                  <a:tcPr marL="91440" marR="91440" marT="45720" marB="45720" anchor="ctr">
                     <a:lnL w="12700" cap="flat" cmpd="sng" algn="ctr">
                       <a:solidFill>
                         <a:srgbClr val="DDDDDD"/>
@@ -13904,14 +15900,14 @@
       </p:graphicFrame>
       <p:sp>
         <p:nvSpPr>
-          <p:cNvPr id="5" name="Shape 2"/>
-          <p:cNvSpPr/>
-          <p:nvPr/>
-        </p:nvSpPr>
-        <p:spPr>
-          <a:xfrm>
-            <a:off x="0" y="6537960"/>
-            <a:ext cx="12191695" cy="320040"/>
+          <p:cNvPr id="6" name="Shape 3"/>
+          <p:cNvSpPr/>
+          <p:nvPr/>
+        </p:nvSpPr>
+        <p:spPr>
+          <a:xfrm>
+            <a:off x="457200" y="5897880"/>
+            <a:ext cx="11277295" cy="502920"/>
           </a:xfrm>
           <a:prstGeom prst="rect">
             <a:avLst/>
@@ -13919,19 +15915,24 @@
           <a:solidFill>
             <a:srgbClr val="EAFBF6"/>
           </a:solidFill>
-          <a:ln/>
-        </p:spPr>
-      </p:sp>
-      <p:sp>
-        <p:nvSpPr>
-          <p:cNvPr id="6" name="Text 3"/>
-          <p:cNvSpPr/>
-          <p:nvPr/>
-        </p:nvSpPr>
-        <p:spPr>
-          <a:xfrm>
-            <a:off x="365760" y="6537960"/>
-            <a:ext cx="5486400" cy="320040"/>
+          <a:ln w="9525">
+            <a:solidFill>
+              <a:srgbClr val="17AE89"/>
+            </a:solidFill>
+            <a:prstDash val="solid"/>
+          </a:ln>
+        </p:spPr>
+      </p:sp>
+      <p:sp>
+        <p:nvSpPr>
+          <p:cNvPr id="7" name="Text 4"/>
+          <p:cNvSpPr/>
+          <p:nvPr/>
+        </p:nvSpPr>
+        <p:spPr>
+          <a:xfrm>
+            <a:off x="640080" y="5897880"/>
+            <a:ext cx="10911535" cy="502920"/>
           </a:xfrm>
           <a:prstGeom prst="rect">
             <a:avLst/>
@@ -13947,7 +15948,7 @@
               <a:buNone/>
             </a:pPr>
             <a:r>
-              <a:rPr lang="en-US" sz="900" dirty="0">
+              <a:rPr lang="en-US" sz="1200" dirty="0">
                 <a:solidFill>
                   <a:srgbClr val="0A7C63"/>
                 </a:solidFill>
@@ -13955,38 +15956,13 @@
                 <a:ea typeface="Calibri" pitchFamily="34" charset="-122"/>
                 <a:cs typeface="Calibri" pitchFamily="34" charset="-120"/>
               </a:rPr>
-              <a:t>Kalanso — Manuel d'utilisation</a:t>
-            </a:r>
-            <a:endParaRPr lang="en-US" sz="900" dirty="0"/>
-          </a:p>
-        </p:txBody>
-      </p:sp>
-      <p:sp>
-        <p:nvSpPr>
-          <p:cNvPr id="7" name="Text 4"/>
-          <p:cNvSpPr/>
-          <p:nvPr/>
-        </p:nvSpPr>
-        <p:spPr>
-          <a:xfrm>
-            <a:off x="11277295" y="6537960"/>
-            <a:ext cx="548640" cy="320040"/>
-          </a:xfrm>
-          <a:prstGeom prst="rect">
-            <a:avLst/>
-          </a:prstGeom>
-          <a:noFill/>
-          <a:ln/>
-        </p:spPr>
-        <p:txBody>
-          <a:bodyPr wrap="square" rtlCol="0" anchor="ctr"/>
-          <a:lstStyle/>
-          <a:p>
-            <a:pPr algn="r" indent="0" marL="0">
-              <a:buNone/>
-            </a:pPr>
-            <a:r>
-              <a:rPr lang="en-US" sz="900" dirty="0">
+              <a:t>💡 </a:t>
+            </a:r>
+            <a:pPr indent="0" marL="0">
+              <a:buNone/>
+            </a:pPr>
+            <a:r>
+              <a:rPr lang="en-US" sz="1200" i="1" dirty="0">
                 <a:solidFill>
                   <a:srgbClr val="0A7C63"/>
                 </a:solidFill>
@@ -13994,244 +15970,15 @@
                 <a:ea typeface="Calibri" pitchFamily="34" charset="-122"/>
                 <a:cs typeface="Calibri" pitchFamily="34" charset="-120"/>
               </a:rPr>
-              <a:t>5</a:t>
-            </a:r>
-            <a:endParaRPr lang="en-US" sz="900" dirty="0"/>
-          </a:p>
-        </p:txBody>
-      </p:sp>
-    </p:spTree>
-  </p:cSld>
-  <p:clrMapOvr>
-    <a:masterClrMapping/>
-  </p:clrMapOvr>
-</p:sld>
-</file>
-
-<file path=ppt/slides/slide6.xml><?xml version="1.0" encoding="utf-8"?>
-<p:sld xmlns:a="http://schemas.openxmlformats.org/drawingml/2006/main" xmlns:r="http://schemas.openxmlformats.org/officeDocument/2006/relationships" xmlns:p="http://schemas.openxmlformats.org/presentationml/2006/main">
-  <p:cSld name="Slide 6">
-    <p:spTree>
-      <p:nvGrpSpPr>
-        <p:cNvPr id="1" name=""/>
-        <p:cNvGrpSpPr/>
-        <p:nvPr/>
-      </p:nvGrpSpPr>
-      <p:grpSpPr>
-        <a:xfrm>
-          <a:off x="0" y="0"/>
-          <a:ext cx="0" cy="0"/>
-          <a:chOff x="0" y="0"/>
-          <a:chExt cx="0" cy="0"/>
-        </a:xfrm>
-      </p:grpSpPr>
-      <p:sp>
-        <p:nvSpPr>
-          <p:cNvPr id="2" name="Shape 0"/>
-          <p:cNvSpPr/>
-          <p:nvPr/>
-        </p:nvSpPr>
-        <p:spPr>
-          <a:xfrm>
-            <a:off x="0" y="0"/>
-            <a:ext cx="12191695" cy="822960"/>
-          </a:xfrm>
-          <a:prstGeom prst="rect">
-            <a:avLst/>
-          </a:prstGeom>
-          <a:solidFill>
-            <a:srgbClr val="17AE89"/>
-          </a:solidFill>
-          <a:ln/>
-        </p:spPr>
-      </p:sp>
-      <p:sp>
-        <p:nvSpPr>
-          <p:cNvPr id="3" name="Text 1"/>
-          <p:cNvSpPr/>
-          <p:nvPr/>
-        </p:nvSpPr>
-        <p:spPr>
-          <a:xfrm>
-            <a:off x="457200" y="0"/>
-            <a:ext cx="11277295" cy="822960"/>
-          </a:xfrm>
-          <a:prstGeom prst="rect">
-            <a:avLst/>
-          </a:prstGeom>
-          <a:noFill/>
-          <a:ln/>
-        </p:spPr>
-        <p:txBody>
-          <a:bodyPr wrap="square" rtlCol="0" anchor="ctr"/>
-          <a:lstStyle/>
-          <a:p>
-            <a:pPr indent="0" marL="0">
-              <a:buNone/>
-            </a:pPr>
-            <a:r>
-              <a:rPr lang="en-US" sz="2600" b="1" dirty="0">
-                <a:solidFill>
-                  <a:srgbClr val="FFFFFF"/>
-                </a:solidFill>
-                <a:latin typeface="Calibri" pitchFamily="34" charset="0"/>
-                <a:ea typeface="Calibri" pitchFamily="34" charset="-122"/>
-                <a:cs typeface="Calibri" pitchFamily="34" charset="-120"/>
-              </a:rPr>
-              <a:t>Le tableau de bord</a:t>
-            </a:r>
-            <a:endParaRPr lang="en-US" sz="2600" dirty="0"/>
-          </a:p>
-        </p:txBody>
-      </p:sp>
-      <p:sp>
-        <p:nvSpPr>
-          <p:cNvPr id="4" name="Text 2"/>
-          <p:cNvSpPr/>
-          <p:nvPr/>
-        </p:nvSpPr>
-        <p:spPr>
-          <a:xfrm>
-            <a:off x="457200" y="1051560"/>
-            <a:ext cx="11277295" cy="457200"/>
-          </a:xfrm>
-          <a:prstGeom prst="rect">
-            <a:avLst/>
-          </a:prstGeom>
-          <a:noFill/>
-          <a:ln/>
-        </p:spPr>
-        <p:txBody>
-          <a:bodyPr wrap="square" rtlCol="0" anchor="ctr"/>
-          <a:lstStyle/>
-          <a:p>
-            <a:pPr indent="0" marL="0">
-              <a:buNone/>
-            </a:pPr>
-            <a:r>
-              <a:rPr lang="en-US" sz="1500" i="1" dirty="0">
-                <a:solidFill>
-                  <a:srgbClr val="6B6B6B"/>
-                </a:solidFill>
-                <a:latin typeface="Calibri" pitchFamily="34" charset="0"/>
-                <a:ea typeface="Calibri" pitchFamily="34" charset="-122"/>
-                <a:cs typeface="Calibri" pitchFamily="34" charset="-120"/>
-              </a:rPr>
-              <a:t>Première page après connexion</a:t>
-            </a:r>
-            <a:endParaRPr lang="en-US" sz="1500" dirty="0"/>
-          </a:p>
-        </p:txBody>
-      </p:sp>
-      <p:sp>
-        <p:nvSpPr>
-          <p:cNvPr id="5" name="Text 3"/>
-          <p:cNvSpPr/>
-          <p:nvPr/>
-        </p:nvSpPr>
-        <p:spPr>
-          <a:xfrm>
-            <a:off x="457200" y="1600200"/>
-            <a:ext cx="11277295" cy="4709160"/>
-          </a:xfrm>
-          <a:prstGeom prst="rect">
-            <a:avLst/>
-          </a:prstGeom>
-          <a:noFill/>
-          <a:ln/>
-        </p:spPr>
-        <p:txBody>
-          <a:bodyPr wrap="square" rtlCol="0" anchor="t"/>
-          <a:lstStyle/>
-          <a:p>
-            <a:pPr marL="254000" indent="-254000">
-              <a:spcAft>
-                <a:spcPts val="1000"/>
-              </a:spcAft>
-              <a:buSzPct val="100000"/>
-              <a:buChar char="▸"/>
-            </a:pPr>
-            <a:r>
-              <a:rPr lang="en-US" sz="1500" dirty="0">
-                <a:solidFill>
-                  <a:srgbClr val="444444"/>
-                </a:solidFill>
-                <a:latin typeface="Calibri" pitchFamily="34" charset="0"/>
-                <a:ea typeface="Calibri" pitchFamily="34" charset="-122"/>
-                <a:cs typeface="Calibri" pitchFamily="34" charset="-120"/>
-              </a:rPr>
-              <a:t>Vue d'ensemble instantanée : nombre d'élèves, nombre de personnel, paiements du mois, montant des impayés, absences du jour.</a:t>
-            </a:r>
-            <a:endParaRPr lang="en-US" sz="1500" dirty="0"/>
-          </a:p>
-          <a:p>
-            <a:pPr marL="254000" indent="-254000">
-              <a:spcAft>
-                <a:spcPts val="1000"/>
-              </a:spcAft>
-              <a:buSzPct val="100000"/>
-              <a:buChar char="▸"/>
-            </a:pPr>
-            <a:r>
-              <a:rPr lang="en-US" sz="1500" dirty="0">
-                <a:solidFill>
-                  <a:srgbClr val="444444"/>
-                </a:solidFill>
-                <a:latin typeface="Calibri" pitchFamily="34" charset="0"/>
-                <a:ea typeface="Calibri" pitchFamily="34" charset="-122"/>
-                <a:cs typeface="Calibri" pitchFamily="34" charset="-120"/>
-              </a:rPr>
-              <a:t>Un graphique « Présence du jour » résume en un coup d'œil présents / absents / retards de la journée.</a:t>
-            </a:r>
-            <a:endParaRPr lang="en-US" sz="1500" dirty="0"/>
-          </a:p>
-          <a:p>
-            <a:pPr marL="254000" indent="-254000">
-              <a:spcAft>
-                <a:spcPts val="1000"/>
-              </a:spcAft>
-              <a:buSzPct val="100000"/>
-              <a:buChar char="▸"/>
-            </a:pPr>
-            <a:r>
-              <a:rPr lang="en-US" sz="1500" dirty="0">
-                <a:solidFill>
-                  <a:srgbClr val="444444"/>
-                </a:solidFill>
-                <a:latin typeface="Calibri" pitchFamily="34" charset="0"/>
-                <a:ea typeface="Calibri" pitchFamily="34" charset="-122"/>
-                <a:cs typeface="Calibri" pitchFamily="34" charset="-120"/>
-              </a:rPr>
-              <a:t>Deux boutons de téléchargement rapide : liste complète des élèves, liste des impayés (fichiers Excel).</a:t>
-            </a:r>
-            <a:endParaRPr lang="en-US" sz="1500" dirty="0"/>
-          </a:p>
-          <a:p>
-            <a:pPr marL="254000" indent="-254000">
-              <a:spcAft>
-                <a:spcPts val="1000"/>
-              </a:spcAft>
-              <a:buSzPct val="100000"/>
-              <a:buChar char="▸"/>
-            </a:pPr>
-            <a:r>
-              <a:rPr lang="en-US" sz="1500" dirty="0">
-                <a:solidFill>
-                  <a:srgbClr val="444444"/>
-                </a:solidFill>
-                <a:latin typeface="Calibri" pitchFamily="34" charset="0"/>
-                <a:ea typeface="Calibri" pitchFamily="34" charset="-122"/>
-                <a:cs typeface="Calibri" pitchFamily="34" charset="-120"/>
-              </a:rPr>
-              <a:t>C'est le point de départ recommandé de chaque session de travail : il signale immédiatement les situations qui demandent une action (impayés élevés, absences anormales).</a:t>
-            </a:r>
-            <a:endParaRPr lang="en-US" sz="1500" dirty="0"/>
-          </a:p>
-        </p:txBody>
-      </p:sp>
-      <p:sp>
-        <p:nvSpPr>
-          <p:cNvPr id="6" name="Shape 4"/>
+              <a:t>Ces comptes et ce mot de passe partagé sont réservés à la démonstration : créez des comptes et des mots de passe individuels avant toute utilisation réelle par l'école.</a:t>
+            </a:r>
+            <a:endParaRPr lang="en-US" sz="1200" dirty="0"/>
+          </a:p>
+        </p:txBody>
+      </p:sp>
+      <p:sp>
+        <p:nvSpPr>
+          <p:cNvPr id="8" name="Shape 5"/>
           <p:cNvSpPr/>
           <p:nvPr/>
         </p:nvSpPr>
@@ -14251,7 +15998,7 @@
       </p:sp>
       <p:sp>
         <p:nvSpPr>
-          <p:cNvPr id="7" name="Text 5"/>
+          <p:cNvPr id="9" name="Text 6"/>
           <p:cNvSpPr/>
           <p:nvPr/>
         </p:nvSpPr>
@@ -14290,7 +16037,7 @@
       </p:sp>
       <p:sp>
         <p:nvSpPr>
-          <p:cNvPr id="8" name="Text 6"/>
+          <p:cNvPr id="10" name="Text 7"/>
           <p:cNvSpPr/>
           <p:nvPr/>
         </p:nvSpPr>
@@ -14405,7 +16152,7 @@
                 <a:ea typeface="Calibri" pitchFamily="34" charset="-122"/>
                 <a:cs typeface="Calibri" pitchFamily="34" charset="-120"/>
               </a:rPr>
-              <a:t>Niveaux</a:t>
+              <a:t>Le tableau de bord</a:t>
             </a:r>
             <a:endParaRPr lang="en-US" sz="2600" dirty="0"/>
           </a:p>
@@ -14444,7 +16191,7 @@
                 <a:ea typeface="Calibri" pitchFamily="34" charset="-122"/>
                 <a:cs typeface="Calibri" pitchFamily="34" charset="-120"/>
               </a:rPr>
-              <a:t>Établissement → Niveaux</a:t>
+              <a:t>Première page après connexion</a:t>
             </a:r>
             <a:endParaRPr lang="en-US" sz="1500" dirty="0"/>
           </a:p>
@@ -14459,60 +16206,7 @@
         <p:spPr>
           <a:xfrm>
             <a:off x="457200" y="1600200"/>
-            <a:ext cx="11277295" cy="365760"/>
-          </a:xfrm>
-          <a:prstGeom prst="rect">
-            <a:avLst/>
-          </a:prstGeom>
-          <a:noFill/>
-          <a:ln/>
-        </p:spPr>
-        <p:txBody>
-          <a:bodyPr wrap="square" rtlCol="0" anchor="ctr"/>
-          <a:lstStyle/>
-          <a:p>
-            <a:pPr indent="0" marL="0">
-              <a:buNone/>
-            </a:pPr>
-            <a:r>
-              <a:rPr lang="en-US" sz="1300" b="1" dirty="0">
-                <a:solidFill>
-                  <a:srgbClr val="0A7C63"/>
-                </a:solidFill>
-                <a:latin typeface="Calibri" pitchFamily="34" charset="0"/>
-                <a:ea typeface="Calibri" pitchFamily="34" charset="-122"/>
-                <a:cs typeface="Calibri" pitchFamily="34" charset="-120"/>
-              </a:rPr>
-              <a:t>Accès : </a:t>
-            </a:r>
-            <a:pPr indent="0" marL="0">
-              <a:buNone/>
-            </a:pPr>
-            <a:r>
-              <a:rPr lang="en-US" sz="1300" dirty="0">
-                <a:solidFill>
-                  <a:srgbClr val="444444"/>
-                </a:solidFill>
-                <a:latin typeface="Calibri" pitchFamily="34" charset="0"/>
-                <a:ea typeface="Calibri" pitchFamily="34" charset="-122"/>
-                <a:cs typeface="Calibri" pitchFamily="34" charset="-120"/>
-              </a:rPr>
-              <a:t>Fondateur, Chef d'établissement</a:t>
-            </a:r>
-            <a:endParaRPr lang="en-US" sz="1300" dirty="0"/>
-          </a:p>
-        </p:txBody>
-      </p:sp>
-      <p:sp>
-        <p:nvSpPr>
-          <p:cNvPr id="6" name="Text 4"/>
-          <p:cNvSpPr/>
-          <p:nvPr/>
-        </p:nvSpPr>
-        <p:spPr>
-          <a:xfrm>
-            <a:off x="457200" y="2103120"/>
-            <a:ext cx="11277295" cy="3749040"/>
+            <a:ext cx="11277295" cy="4709160"/>
           </a:xfrm>
           <a:prstGeom prst="rect">
             <a:avLst/>
@@ -14540,7 +16234,7 @@
                 <a:ea typeface="Calibri" pitchFamily="34" charset="-122"/>
                 <a:cs typeface="Calibri" pitchFamily="34" charset="-120"/>
               </a:rPr>
-              <a:t>Un niveau représente une année d'études (CP1, CE1, 6ème, Terminale...). Il structure les classes, les tarifs d'écolage et les frais d'inscription.</a:t>
+              <a:t>Vue d'ensemble instantanée : nombre d'élèves, nombre de personnel, paiements du mois, montant des impayés, absences du jour.</a:t>
             </a:r>
             <a:endParaRPr lang="en-US" sz="1500" dirty="0"/>
           </a:p>
@@ -14561,7 +16255,7 @@
                 <a:ea typeface="Calibri" pitchFamily="34" charset="-122"/>
                 <a:cs typeface="Calibri" pitchFamily="34" charset="-120"/>
               </a:rPr>
-              <a:t>Créer un niveau : renseignez son nom, éventuellement son cycle (Primaire, Collège...) et son ordre d'affichage.</a:t>
+              <a:t>Un graphique « Présence du jour » résume en un coup d'œil présents / absents / retards de la journée.</a:t>
             </a:r>
             <a:endParaRPr lang="en-US" sz="1500" dirty="0"/>
           </a:p>
@@ -14582,7 +16276,7 @@
                 <a:ea typeface="Calibri" pitchFamily="34" charset="-122"/>
                 <a:cs typeface="Calibri" pitchFamily="34" charset="-120"/>
               </a:rPr>
-              <a:t>Modifier : cliquez sur « Modifier » sur la ligne du niveau pour ajuster nom, cycle ou ordre.</a:t>
+              <a:t>Deux boutons de téléchargement rapide : liste complète des élèves, liste des impayés (fichiers Excel).</a:t>
             </a:r>
             <a:endParaRPr lang="en-US" sz="1500" dirty="0"/>
           </a:p>
@@ -14603,7 +16297,7 @@
                 <a:ea typeface="Calibri" pitchFamily="34" charset="-122"/>
                 <a:cs typeface="Calibri" pitchFamily="34" charset="-120"/>
               </a:rPr>
-              <a:t>Supprimer : possible uniquement si le niveau n'est plus utilisé par des classes ou des tarifs existants.</a:t>
+              <a:t>C'est le point de départ recommandé de chaque session de travail : il signale immédiatement les situations qui demandent une action (impayés élevés, absences anormales).</a:t>
             </a:r>
             <a:endParaRPr lang="en-US" sz="1500" dirty="0"/>
           </a:p>
@@ -14611,14 +16305,14 @@
       </p:sp>
       <p:sp>
         <p:nvSpPr>
-          <p:cNvPr id="7" name="Shape 5"/>
-          <p:cNvSpPr/>
-          <p:nvPr/>
-        </p:nvSpPr>
-        <p:spPr>
-          <a:xfrm>
-            <a:off x="457200" y="5897880"/>
-            <a:ext cx="11277295" cy="502920"/>
+          <p:cNvPr id="6" name="Shape 4"/>
+          <p:cNvSpPr/>
+          <p:nvPr/>
+        </p:nvSpPr>
+        <p:spPr>
+          <a:xfrm>
+            <a:off x="0" y="6537960"/>
+            <a:ext cx="12191695" cy="320040"/>
           </a:xfrm>
           <a:prstGeom prst="rect">
             <a:avLst/>
@@ -14626,90 +16320,12 @@
           <a:solidFill>
             <a:srgbClr val="EAFBF6"/>
           </a:solidFill>
-          <a:ln w="9525">
-            <a:solidFill>
-              <a:srgbClr val="17AE89"/>
-            </a:solidFill>
-            <a:prstDash val="solid"/>
-          </a:ln>
-        </p:spPr>
-      </p:sp>
-      <p:sp>
-        <p:nvSpPr>
-          <p:cNvPr id="8" name="Text 6"/>
-          <p:cNvSpPr/>
-          <p:nvPr/>
-        </p:nvSpPr>
-        <p:spPr>
-          <a:xfrm>
-            <a:off x="640080" y="5897880"/>
-            <a:ext cx="10911535" cy="502920"/>
-          </a:xfrm>
-          <a:prstGeom prst="rect">
-            <a:avLst/>
-          </a:prstGeom>
-          <a:noFill/>
-          <a:ln/>
-        </p:spPr>
-        <p:txBody>
-          <a:bodyPr wrap="square" rtlCol="0" anchor="ctr"/>
-          <a:lstStyle/>
-          <a:p>
-            <a:pPr indent="0" marL="0">
-              <a:buNone/>
-            </a:pPr>
-            <a:r>
-              <a:rPr lang="en-US" sz="1200" dirty="0">
-                <a:solidFill>
-                  <a:srgbClr val="0A7C63"/>
-                </a:solidFill>
-                <a:latin typeface="Calibri" pitchFamily="34" charset="0"/>
-                <a:ea typeface="Calibri" pitchFamily="34" charset="-122"/>
-                <a:cs typeface="Calibri" pitchFamily="34" charset="-120"/>
-              </a:rPr>
-              <a:t>💡 </a:t>
-            </a:r>
-            <a:pPr indent="0" marL="0">
-              <a:buNone/>
-            </a:pPr>
-            <a:r>
-              <a:rPr lang="en-US" sz="1200" i="1" dirty="0">
-                <a:solidFill>
-                  <a:srgbClr val="0A7C63"/>
-                </a:solidFill>
-                <a:latin typeface="Calibri" pitchFamily="34" charset="0"/>
-                <a:ea typeface="Calibri" pitchFamily="34" charset="-122"/>
-                <a:cs typeface="Calibri" pitchFamily="34" charset="-120"/>
-              </a:rPr>
-              <a:t>L'ordre détermine la position du niveau dans toutes les listes déroulantes de l'application — à définir en premier lors de la mise en place de l'école.</a:t>
-            </a:r>
-            <a:endParaRPr lang="en-US" sz="1200" dirty="0"/>
-          </a:p>
-        </p:txBody>
-      </p:sp>
-      <p:sp>
-        <p:nvSpPr>
-          <p:cNvPr id="9" name="Shape 7"/>
-          <p:cNvSpPr/>
-          <p:nvPr/>
-        </p:nvSpPr>
-        <p:spPr>
-          <a:xfrm>
-            <a:off x="0" y="6537960"/>
-            <a:ext cx="12191695" cy="320040"/>
-          </a:xfrm>
-          <a:prstGeom prst="rect">
-            <a:avLst/>
-          </a:prstGeom>
-          <a:solidFill>
-            <a:srgbClr val="EAFBF6"/>
-          </a:solidFill>
-          <a:ln/>
-        </p:spPr>
-      </p:sp>
-      <p:sp>
-        <p:nvSpPr>
-          <p:cNvPr id="10" name="Text 8"/>
+          <a:ln/>
+        </p:spPr>
+      </p:sp>
+      <p:sp>
+        <p:nvSpPr>
+          <p:cNvPr id="7" name="Text 5"/>
           <p:cNvSpPr/>
           <p:nvPr/>
         </p:nvSpPr>
@@ -14748,7 +16364,7 @@
       </p:sp>
       <p:sp>
         <p:nvSpPr>
-          <p:cNvPr id="11" name="Text 9"/>
+          <p:cNvPr id="8" name="Text 6"/>
           <p:cNvSpPr/>
           <p:nvPr/>
         </p:nvSpPr>
@@ -14863,7 +16479,7 @@
                 <a:ea typeface="Calibri" pitchFamily="34" charset="-122"/>
                 <a:cs typeface="Calibri" pitchFamily="34" charset="-120"/>
               </a:rPr>
-              <a:t>Classes</a:t>
+              <a:t>Niveaux</a:t>
             </a:r>
             <a:endParaRPr lang="en-US" sz="2600" dirty="0"/>
           </a:p>
@@ -14902,7 +16518,7 @@
                 <a:ea typeface="Calibri" pitchFamily="34" charset="-122"/>
                 <a:cs typeface="Calibri" pitchFamily="34" charset="-120"/>
               </a:rPr>
-              <a:t>Élèves → Classes</a:t>
+              <a:t>Établissement → Niveaux</a:t>
             </a:r>
             <a:endParaRPr lang="en-US" sz="1500" dirty="0"/>
           </a:p>
@@ -14955,7 +16571,7 @@
                 <a:ea typeface="Calibri" pitchFamily="34" charset="-122"/>
                 <a:cs typeface="Calibri" pitchFamily="34" charset="-120"/>
               </a:rPr>
-              <a:t>Création : tous rôles de gestion — consultation : tous</a:t>
+              <a:t>Fondateur, Chef d'établissement</a:t>
             </a:r>
             <a:endParaRPr lang="en-US" sz="1300" dirty="0"/>
           </a:p>
@@ -14970,7 +16586,7 @@
         <p:spPr>
           <a:xfrm>
             <a:off x="457200" y="2103120"/>
-            <a:ext cx="11277295" cy="4206240"/>
+            <a:ext cx="11277295" cy="3749040"/>
           </a:xfrm>
           <a:prstGeom prst="rect">
             <a:avLst/>
@@ -14998,7 +16614,7 @@
                 <a:ea typeface="Calibri" pitchFamily="34" charset="-122"/>
                 <a:cs typeface="Calibri" pitchFamily="34" charset="-120"/>
               </a:rPr>
-              <a:t>Créer une classe : nom (ex. CM1 A), niveau, année scolaire. Le frais d'inscription est automatiquement celui défini pour le niveau.</a:t>
+              <a:t>Un niveau représente une année d'études (CP1, CE1, 6ème, Terminale...). Il structure les classes, les tarifs d'écolage et les frais d'inscription.</a:t>
             </a:r>
             <a:endParaRPr lang="en-US" sz="1500" dirty="0"/>
           </a:p>
@@ -15019,7 +16635,7 @@
                 <a:ea typeface="Calibri" pitchFamily="34" charset="-122"/>
                 <a:cs typeface="Calibri" pitchFamily="34" charset="-120"/>
               </a:rPr>
-              <a:t>Créer une nouvelle année scolaire (libellé, dates de début/fin) directement depuis cette page — nécessaire pour préparer le passage de classe.</a:t>
+              <a:t>Créer un niveau : renseignez son nom, éventuellement son cycle (Primaire, Collège...) et son ordre d'affichage.</a:t>
             </a:r>
             <a:endParaRPr lang="en-US" sz="1500" dirty="0"/>
           </a:p>
@@ -15040,7 +16656,7 @@
                 <a:ea typeface="Calibri" pitchFamily="34" charset="-122"/>
                 <a:cs typeface="Calibri" pitchFamily="34" charset="-120"/>
               </a:rPr>
-              <a:t>Le tableau des effectifs affiche, pour chaque classe : niveau, année scolaire, frais d'inscription, nombre de filles/garçons, total, et un lien « Voir les élèves ».</a:t>
+              <a:t>Modifier : cliquez sur « Modifier » sur la ligne du niveau pour ajuster nom, cycle ou ordre.</a:t>
             </a:r>
             <a:endParaRPr lang="en-US" sz="1500" dirty="0"/>
           </a:p>
@@ -15061,7 +16677,7 @@
                 <a:ea typeface="Calibri" pitchFamily="34" charset="-122"/>
                 <a:cs typeface="Calibri" pitchFamily="34" charset="-120"/>
               </a:rPr>
-              <a:t>Une barre de recherche permet de retrouver rapidement une classe par nom ou niveau.</a:t>
+              <a:t>Supprimer : possible uniquement si le niveau n'est plus utilisé par des classes ou des tarifs existants.</a:t>
             </a:r>
             <a:endParaRPr lang="en-US" sz="1500" dirty="0"/>
           </a:p>
@@ -15075,8 +16691,8 @@
         </p:nvSpPr>
         <p:spPr>
           <a:xfrm>
-            <a:off x="0" y="6537960"/>
-            <a:ext cx="12191695" cy="320040"/>
+            <a:off x="457200" y="5897880"/>
+            <a:ext cx="11277295" cy="502920"/>
           </a:xfrm>
           <a:prstGeom prst="rect">
             <a:avLst/>
@@ -15084,12 +16700,90 @@
           <a:solidFill>
             <a:srgbClr val="EAFBF6"/>
           </a:solidFill>
-          <a:ln/>
+          <a:ln w="9525">
+            <a:solidFill>
+              <a:srgbClr val="17AE89"/>
+            </a:solidFill>
+            <a:prstDash val="solid"/>
+          </a:ln>
         </p:spPr>
       </p:sp>
       <p:sp>
         <p:nvSpPr>
           <p:cNvPr id="8" name="Text 6"/>
+          <p:cNvSpPr/>
+          <p:nvPr/>
+        </p:nvSpPr>
+        <p:spPr>
+          <a:xfrm>
+            <a:off x="640080" y="5897880"/>
+            <a:ext cx="10911535" cy="502920"/>
+          </a:xfrm>
+          <a:prstGeom prst="rect">
+            <a:avLst/>
+          </a:prstGeom>
+          <a:noFill/>
+          <a:ln/>
+        </p:spPr>
+        <p:txBody>
+          <a:bodyPr wrap="square" rtlCol="0" anchor="ctr"/>
+          <a:lstStyle/>
+          <a:p>
+            <a:pPr indent="0" marL="0">
+              <a:buNone/>
+            </a:pPr>
+            <a:r>
+              <a:rPr lang="en-US" sz="1200" dirty="0">
+                <a:solidFill>
+                  <a:srgbClr val="0A7C63"/>
+                </a:solidFill>
+                <a:latin typeface="Calibri" pitchFamily="34" charset="0"/>
+                <a:ea typeface="Calibri" pitchFamily="34" charset="-122"/>
+                <a:cs typeface="Calibri" pitchFamily="34" charset="-120"/>
+              </a:rPr>
+              <a:t>💡 </a:t>
+            </a:r>
+            <a:pPr indent="0" marL="0">
+              <a:buNone/>
+            </a:pPr>
+            <a:r>
+              <a:rPr lang="en-US" sz="1200" i="1" dirty="0">
+                <a:solidFill>
+                  <a:srgbClr val="0A7C63"/>
+                </a:solidFill>
+                <a:latin typeface="Calibri" pitchFamily="34" charset="0"/>
+                <a:ea typeface="Calibri" pitchFamily="34" charset="-122"/>
+                <a:cs typeface="Calibri" pitchFamily="34" charset="-120"/>
+              </a:rPr>
+              <a:t>L'ordre détermine la position du niveau dans toutes les listes déroulantes de l'application — à définir en premier lors de la mise en place de l'école.</a:t>
+            </a:r>
+            <a:endParaRPr lang="en-US" sz="1200" dirty="0"/>
+          </a:p>
+        </p:txBody>
+      </p:sp>
+      <p:sp>
+        <p:nvSpPr>
+          <p:cNvPr id="9" name="Shape 7"/>
+          <p:cNvSpPr/>
+          <p:nvPr/>
+        </p:nvSpPr>
+        <p:spPr>
+          <a:xfrm>
+            <a:off x="0" y="6537960"/>
+            <a:ext cx="12191695" cy="320040"/>
+          </a:xfrm>
+          <a:prstGeom prst="rect">
+            <a:avLst/>
+          </a:prstGeom>
+          <a:solidFill>
+            <a:srgbClr val="EAFBF6"/>
+          </a:solidFill>
+          <a:ln/>
+        </p:spPr>
+      </p:sp>
+      <p:sp>
+        <p:nvSpPr>
+          <p:cNvPr id="10" name="Text 8"/>
           <p:cNvSpPr/>
           <p:nvPr/>
         </p:nvSpPr>
@@ -15128,7 +16822,7 @@
       </p:sp>
       <p:sp>
         <p:nvSpPr>
-          <p:cNvPr id="9" name="Text 7"/>
+          <p:cNvPr id="11" name="Text 9"/>
           <p:cNvSpPr/>
           <p:nvPr/>
         </p:nvSpPr>
@@ -15243,7 +16937,7 @@
                 <a:ea typeface="Calibri" pitchFamily="34" charset="-122"/>
                 <a:cs typeface="Calibri" pitchFamily="34" charset="-120"/>
               </a:rPr>
-              <a:t>Admissions — Demandes</a:t>
+              <a:t>Classes</a:t>
             </a:r>
             <a:endParaRPr lang="en-US" sz="2600" dirty="0"/>
           </a:p>
@@ -15282,7 +16976,7 @@
                 <a:ea typeface="Calibri" pitchFamily="34" charset="-122"/>
                 <a:cs typeface="Calibri" pitchFamily="34" charset="-120"/>
               </a:rPr>
-              <a:t>Élèves → Admissions</a:t>
+              <a:t>Élèves → Classes</a:t>
             </a:r>
             <a:endParaRPr lang="en-US" sz="1500" dirty="0"/>
           </a:p>
@@ -15335,7 +17029,7 @@
                 <a:ea typeface="Calibri" pitchFamily="34" charset="-122"/>
                 <a:cs typeface="Calibri" pitchFamily="34" charset="-120"/>
               </a:rPr>
-              <a:t>Fondateur, Chef d'établissement, Secrétaire</a:t>
+              <a:t>Création : tous rôles de gestion — consultation : tous</a:t>
             </a:r>
             <a:endParaRPr lang="en-US" sz="1300" dirty="0"/>
           </a:p>
@@ -15378,7 +17072,7 @@
                 <a:ea typeface="Calibri" pitchFamily="34" charset="-122"/>
                 <a:cs typeface="Calibri" pitchFamily="34" charset="-120"/>
               </a:rPr>
-              <a:t>Aucun élève n'est créé directement : toute entrée d'élève passe par une demande d'admission, acceptée ou refusée.</a:t>
+              <a:t>Créer une classe : nom (ex. CM1 A), niveau, année scolaire. Le frais d'inscription est automatiquement celui défini pour le niveau.</a:t>
             </a:r>
             <a:endParaRPr lang="en-US" sz="1500" dirty="0"/>
           </a:p>
@@ -15391,7 +17085,7 @@
               <a:buChar char="▸"/>
             </a:pPr>
             <a:r>
-              <a:rPr lang="en-US" sz="1500" b="1" dirty="0">
+              <a:rPr lang="en-US" sz="1500" dirty="0">
                 <a:solidFill>
                   <a:srgbClr val="444444"/>
                 </a:solidFill>
@@ -15399,49 +17093,7 @@
                 <a:ea typeface="Calibri" pitchFamily="34" charset="-122"/>
                 <a:cs typeface="Calibri" pitchFamily="34" charset="-120"/>
               </a:rPr>
-              <a:t>Deux façons de recevoir une demande :</a:t>
-            </a:r>
-            <a:endParaRPr lang="en-US" sz="1500" dirty="0"/>
-          </a:p>
-          <a:p>
-            <a:pPr marL="406400" indent="-406400">
-              <a:spcAft>
-                <a:spcPts val="600"/>
-              </a:spcAft>
-              <a:buSzPct val="100000"/>
-              <a:buChar char="–"/>
-            </a:pPr>
-            <a:r>
-              <a:rPr lang="en-US" sz="1300" dirty="0">
-                <a:solidFill>
-                  <a:srgbClr val="6B6B6B"/>
-                </a:solidFill>
-                <a:latin typeface="Calibri" pitchFamily="34" charset="0"/>
-                <a:ea typeface="Calibri" pitchFamily="34" charset="-122"/>
-                <a:cs typeface="Calibri" pitchFamily="34" charset="-120"/>
-              </a:rPr>
-              <a:t>Formulaire public en ligne : un lien unique par école, à partager aux parents (réseaux sociaux, affichage).</a:t>
-            </a:r>
-            <a:endParaRPr lang="en-US" sz="1500" dirty="0"/>
-          </a:p>
-          <a:p>
-            <a:pPr marL="406400" indent="-406400">
-              <a:spcAft>
-                <a:spcPts val="600"/>
-              </a:spcAft>
-              <a:buSzPct val="100000"/>
-              <a:buChar char="–"/>
-            </a:pPr>
-            <a:r>
-              <a:rPr lang="en-US" sz="1300" dirty="0">
-                <a:solidFill>
-                  <a:srgbClr val="6B6B6B"/>
-                </a:solidFill>
-                <a:latin typeface="Calibri" pitchFamily="34" charset="0"/>
-                <a:ea typeface="Calibri" pitchFamily="34" charset="-122"/>
-                <a:cs typeface="Calibri" pitchFamily="34" charset="-120"/>
-              </a:rPr>
-              <a:t>« Inscription sur place » : le secrétariat saisit lui-même les informations d'un élève reçu au bureau.</a:t>
+              <a:t>Créer une nouvelle année scolaire (libellé, dates de début/fin) directement depuis cette page — nécessaire pour préparer le passage de classe.</a:t>
             </a:r>
             <a:endParaRPr lang="en-US" sz="1500" dirty="0"/>
           </a:p>
@@ -15462,7 +17114,7 @@
                 <a:ea typeface="Calibri" pitchFamily="34" charset="-122"/>
                 <a:cs typeface="Calibri" pitchFamily="34" charset="-120"/>
               </a:rPr>
-              <a:t>Chaque demande peut être accompagnée de pièces jointes (photo, acte de naissance, bulletin précédent...).</a:t>
+              <a:t>Le tableau des effectifs affiche, pour chaque classe : niveau, année scolaire, frais d'inscription, nombre de filles/garçons, total, et un lien « Voir les élèves ».</a:t>
             </a:r>
             <a:endParaRPr lang="en-US" sz="1500" dirty="0"/>
           </a:p>
@@ -15483,7 +17135,7 @@
                 <a:ea typeface="Calibri" pitchFamily="34" charset="-122"/>
                 <a:cs typeface="Calibri" pitchFamily="34" charset="-120"/>
               </a:rPr>
-              <a:t>Les demandes apparaissent dans l'onglet « En attente », classées ensuite en « Acceptées » ou « Refusées ».</a:t>
+              <a:t>Une barre de recherche permet de retrouver rapidement une classe par nom ou niveau.</a:t>
             </a:r>
             <a:endParaRPr lang="en-US" sz="1500" dirty="0"/>
           </a:p>
